--- a/CortexCLMS-Presentation.pptx
+++ b/CortexCLMS-Presentation.pptx
@@ -17,6 +17,7 @@
     <p:sldId id="265" r:id="rId16"/>
     <p:sldId id="266" r:id="rId17"/>
     <p:sldId id="267" r:id="rId18"/>
+    <p:sldId id="268" r:id="rId19"/>
   </p:sldIdLst>
   <p:sldSz cx="12188952" cy="6858000" type="screen4x3"/>
   <p:notesSz cx="6858000" cy="9144000"/>
@@ -4264,7 +4265,7 @@
                   <a:srgbClr val="E94560"/>
                 </a:solidFill>
               </a:rPr>
-              <a:t>CORTEX AI TECHNOLOGIES</a:t>
+              <a:t>CORTEX TECHNOLOGIES</a:t>
             </a:r>
           </a:p>
         </p:txBody>
@@ -4410,7 +4411,7 @@
                   <a:srgbClr val="CCDDF0"/>
                 </a:solidFill>
               </a:rPr>
-              <a:t>Transform Your Lab Operations with AI-Powered Intelligence</a:t>
+              <a:t>Automate, Comply, and Grow — End-to-End Lab Management</a:t>
             </a:r>
           </a:p>
         </p:txBody>
@@ -4535,6 +4536,2992 @@
 </file>
 
 <file path=ppt/slides/slide10.xml><?xml version="1.0" encoding="utf-8"?>
+<p:sld xmlns:a="http://schemas.openxmlformats.org/drawingml/2006/main" xmlns:p="http://schemas.openxmlformats.org/presentationml/2006/main" xmlns:r="http://schemas.openxmlformats.org/officeDocument/2006/relationships">
+  <p:cSld>
+    <p:bg>
+      <p:bgPr>
+        <a:solidFill>
+          <a:srgbClr val="F5F7FA"/>
+        </a:solidFill>
+        <a:effectLst/>
+      </p:bgPr>
+    </p:bg>
+    <p:spTree>
+      <p:nvGrpSpPr>
+        <p:cNvPr id="1" name=""/>
+        <p:cNvGrpSpPr/>
+        <p:nvPr/>
+      </p:nvGrpSpPr>
+      <p:grpSpPr/>
+      <p:sp>
+        <p:nvSpPr>
+          <p:cNvPr id="2" name="Rectangle 1"/>
+          <p:cNvSpPr/>
+          <p:nvPr/>
+        </p:nvSpPr>
+        <p:spPr>
+          <a:xfrm>
+            <a:off x="0" y="0"/>
+            <a:ext cx="12188952" cy="1051560"/>
+          </a:xfrm>
+          <a:prstGeom prst="rect">
+            <a:avLst/>
+          </a:prstGeom>
+          <a:solidFill>
+            <a:srgbClr val="0F3460"/>
+          </a:solidFill>
+          <a:ln>
+            <a:noFill/>
+          </a:ln>
+        </p:spPr>
+        <p:style>
+          <a:lnRef idx="1">
+            <a:schemeClr val="accent1"/>
+          </a:lnRef>
+          <a:fillRef idx="3">
+            <a:schemeClr val="accent1"/>
+          </a:fillRef>
+          <a:effectRef idx="2">
+            <a:schemeClr val="accent1"/>
+          </a:effectRef>
+          <a:fontRef idx="minor">
+            <a:schemeClr val="lt1"/>
+          </a:fontRef>
+        </p:style>
+        <p:txBody>
+          <a:bodyPr rtlCol="0" anchor="ctr"/>
+          <a:lstStyle/>
+          <a:p>
+            <a:pPr algn="ctr"/>
+          </a:p>
+        </p:txBody>
+      </p:sp>
+      <p:sp>
+        <p:nvSpPr>
+          <p:cNvPr id="3" name="TextBox 2"/>
+          <p:cNvSpPr txBox="1"/>
+          <p:nvPr/>
+        </p:nvSpPr>
+        <p:spPr>
+          <a:xfrm>
+            <a:off x="365760" y="137160"/>
+            <a:ext cx="9144000" cy="685800"/>
+          </a:xfrm>
+          <a:prstGeom prst="rect">
+            <a:avLst/>
+          </a:prstGeom>
+          <a:noFill/>
+        </p:spPr>
+        <p:txBody>
+          <a:bodyPr wrap="square">
+            <a:spAutoFit/>
+          </a:bodyPr>
+          <a:lstStyle/>
+          <a:p>
+            <a:pPr algn="l"/>
+            <a:r>
+              <a:rPr sz="2600" b="1" i="0">
+                <a:solidFill>
+                  <a:srgbClr val="FFFFFF"/>
+                </a:solidFill>
+              </a:rPr>
+              <a:t>CortexCLMS Pricing Plans</a:t>
+            </a:r>
+          </a:p>
+        </p:txBody>
+      </p:sp>
+      <p:sp>
+        <p:nvSpPr>
+          <p:cNvPr id="4" name="TextBox 3"/>
+          <p:cNvSpPr txBox="1"/>
+          <p:nvPr/>
+        </p:nvSpPr>
+        <p:spPr>
+          <a:xfrm>
+            <a:off x="365760" y="594360"/>
+            <a:ext cx="9144000" cy="411480"/>
+          </a:xfrm>
+          <a:prstGeom prst="rect">
+            <a:avLst/>
+          </a:prstGeom>
+          <a:noFill/>
+        </p:spPr>
+        <p:txBody>
+          <a:bodyPr wrap="square">
+            <a:spAutoFit/>
+          </a:bodyPr>
+          <a:lstStyle/>
+          <a:p>
+            <a:pPr algn="l"/>
+            <a:r>
+              <a:rPr sz="1100" b="0" i="0">
+                <a:solidFill>
+                  <a:srgbClr val="B0C4DE"/>
+                </a:solidFill>
+              </a:rPr>
+              <a:t>Transparent, all-inclusive pricing — no hidden charges</a:t>
+            </a:r>
+          </a:p>
+        </p:txBody>
+      </p:sp>
+      <p:sp>
+        <p:nvSpPr>
+          <p:cNvPr id="5" name="Rectangle 4"/>
+          <p:cNvSpPr/>
+          <p:nvPr/>
+        </p:nvSpPr>
+        <p:spPr>
+          <a:xfrm>
+            <a:off x="283464" y="1197864"/>
+            <a:ext cx="2788920" cy="5394960"/>
+          </a:xfrm>
+          <a:prstGeom prst="rect">
+            <a:avLst/>
+          </a:prstGeom>
+          <a:solidFill>
+            <a:srgbClr val="CCCCCC"/>
+          </a:solidFill>
+          <a:ln>
+            <a:noFill/>
+          </a:ln>
+        </p:spPr>
+        <p:style>
+          <a:lnRef idx="1">
+            <a:schemeClr val="accent1"/>
+          </a:lnRef>
+          <a:fillRef idx="3">
+            <a:schemeClr val="accent1"/>
+          </a:fillRef>
+          <a:effectRef idx="2">
+            <a:schemeClr val="accent1"/>
+          </a:effectRef>
+          <a:fontRef idx="minor">
+            <a:schemeClr val="lt1"/>
+          </a:fontRef>
+        </p:style>
+        <p:txBody>
+          <a:bodyPr rtlCol="0" anchor="ctr"/>
+          <a:lstStyle/>
+          <a:p>
+            <a:pPr algn="ctr"/>
+          </a:p>
+        </p:txBody>
+      </p:sp>
+      <p:sp>
+        <p:nvSpPr>
+          <p:cNvPr id="6" name="Rectangle 5"/>
+          <p:cNvSpPr/>
+          <p:nvPr/>
+        </p:nvSpPr>
+        <p:spPr>
+          <a:xfrm>
+            <a:off x="228600" y="1143000"/>
+            <a:ext cx="2788920" cy="5394960"/>
+          </a:xfrm>
+          <a:prstGeom prst="rect">
+            <a:avLst/>
+          </a:prstGeom>
+          <a:solidFill>
+            <a:srgbClr val="FFFFFF"/>
+          </a:solidFill>
+          <a:ln w="6350">
+            <a:solidFill>
+              <a:srgbClr val="E2E8F0"/>
+            </a:solidFill>
+          </a:ln>
+        </p:spPr>
+        <p:style>
+          <a:lnRef idx="1">
+            <a:schemeClr val="accent1"/>
+          </a:lnRef>
+          <a:fillRef idx="3">
+            <a:schemeClr val="accent1"/>
+          </a:fillRef>
+          <a:effectRef idx="2">
+            <a:schemeClr val="accent1"/>
+          </a:effectRef>
+          <a:fontRef idx="minor">
+            <a:schemeClr val="lt1"/>
+          </a:fontRef>
+        </p:style>
+        <p:txBody>
+          <a:bodyPr rtlCol="0" anchor="ctr"/>
+          <a:lstStyle/>
+          <a:p>
+            <a:pPr algn="ctr"/>
+          </a:p>
+        </p:txBody>
+      </p:sp>
+      <p:sp>
+        <p:nvSpPr>
+          <p:cNvPr id="7" name="Rectangle 6"/>
+          <p:cNvSpPr/>
+          <p:nvPr/>
+        </p:nvSpPr>
+        <p:spPr>
+          <a:xfrm>
+            <a:off x="228600" y="1143000"/>
+            <a:ext cx="2788920" cy="1188720"/>
+          </a:xfrm>
+          <a:prstGeom prst="rect">
+            <a:avLst/>
+          </a:prstGeom>
+          <a:solidFill>
+            <a:srgbClr val="0F3460"/>
+          </a:solidFill>
+          <a:ln>
+            <a:noFill/>
+          </a:ln>
+        </p:spPr>
+        <p:style>
+          <a:lnRef idx="1">
+            <a:schemeClr val="accent1"/>
+          </a:lnRef>
+          <a:fillRef idx="3">
+            <a:schemeClr val="accent1"/>
+          </a:fillRef>
+          <a:effectRef idx="2">
+            <a:schemeClr val="accent1"/>
+          </a:effectRef>
+          <a:fontRef idx="minor">
+            <a:schemeClr val="lt1"/>
+          </a:fontRef>
+        </p:style>
+        <p:txBody>
+          <a:bodyPr rtlCol="0" anchor="ctr"/>
+          <a:lstStyle/>
+          <a:p>
+            <a:pPr algn="ctr"/>
+          </a:p>
+        </p:txBody>
+      </p:sp>
+      <p:sp>
+        <p:nvSpPr>
+          <p:cNvPr id="8" name="TextBox 7"/>
+          <p:cNvSpPr txBox="1"/>
+          <p:nvPr/>
+        </p:nvSpPr>
+        <p:spPr>
+          <a:xfrm>
+            <a:off x="228600" y="1234440"/>
+            <a:ext cx="2788920" cy="411480"/>
+          </a:xfrm>
+          <a:prstGeom prst="rect">
+            <a:avLst/>
+          </a:prstGeom>
+          <a:noFill/>
+        </p:spPr>
+        <p:txBody>
+          <a:bodyPr wrap="square">
+            <a:spAutoFit/>
+          </a:bodyPr>
+          <a:lstStyle/>
+          <a:p>
+            <a:pPr algn="ctr"/>
+            <a:r>
+              <a:rPr sz="1800" b="0" i="0">
+                <a:solidFill>
+                  <a:srgbClr val="FFFFFF"/>
+                </a:solidFill>
+              </a:rPr>
+              <a:t>🚀</a:t>
+            </a:r>
+          </a:p>
+        </p:txBody>
+      </p:sp>
+      <p:sp>
+        <p:nvSpPr>
+          <p:cNvPr id="9" name="TextBox 8"/>
+          <p:cNvSpPr txBox="1"/>
+          <p:nvPr/>
+        </p:nvSpPr>
+        <p:spPr>
+          <a:xfrm>
+            <a:off x="228600" y="1618488"/>
+            <a:ext cx="2788920" cy="365760"/>
+          </a:xfrm>
+          <a:prstGeom prst="rect">
+            <a:avLst/>
+          </a:prstGeom>
+          <a:noFill/>
+        </p:spPr>
+        <p:txBody>
+          <a:bodyPr wrap="square">
+            <a:spAutoFit/>
+          </a:bodyPr>
+          <a:lstStyle/>
+          <a:p>
+            <a:pPr algn="ctr"/>
+            <a:r>
+              <a:rPr sz="1400" b="1" i="0">
+                <a:solidFill>
+                  <a:srgbClr val="FFFFFF"/>
+                </a:solidFill>
+              </a:rPr>
+              <a:t>Starter</a:t>
+            </a:r>
+          </a:p>
+        </p:txBody>
+      </p:sp>
+      <p:sp>
+        <p:nvSpPr>
+          <p:cNvPr id="10" name="TextBox 9"/>
+          <p:cNvSpPr txBox="1"/>
+          <p:nvPr/>
+        </p:nvSpPr>
+        <p:spPr>
+          <a:xfrm>
+            <a:off x="228600" y="1965960"/>
+            <a:ext cx="2788920" cy="274320"/>
+          </a:xfrm>
+          <a:prstGeom prst="rect">
+            <a:avLst/>
+          </a:prstGeom>
+          <a:noFill/>
+        </p:spPr>
+        <p:txBody>
+          <a:bodyPr wrap="square">
+            <a:spAutoFit/>
+          </a:bodyPr>
+          <a:lstStyle/>
+          <a:p>
+            <a:pPr algn="ctr"/>
+            <a:r>
+              <a:rPr sz="850" b="0" i="0">
+                <a:solidFill>
+                  <a:srgbClr val="CCDDFF"/>
+                </a:solidFill>
+              </a:rPr>
+              <a:t>Up to 25 Users</a:t>
+            </a:r>
+          </a:p>
+        </p:txBody>
+      </p:sp>
+      <p:sp>
+        <p:nvSpPr>
+          <p:cNvPr id="11" name="Rectangle 10"/>
+          <p:cNvSpPr/>
+          <p:nvPr/>
+        </p:nvSpPr>
+        <p:spPr>
+          <a:xfrm>
+            <a:off x="228600" y="2331720"/>
+            <a:ext cx="2788920" cy="502920"/>
+          </a:xfrm>
+          <a:prstGeom prst="rect">
+            <a:avLst/>
+          </a:prstGeom>
+          <a:solidFill>
+            <a:srgbClr val="F5F7FA"/>
+          </a:solidFill>
+          <a:ln>
+            <a:noFill/>
+          </a:ln>
+        </p:spPr>
+        <p:style>
+          <a:lnRef idx="1">
+            <a:schemeClr val="accent1"/>
+          </a:lnRef>
+          <a:fillRef idx="3">
+            <a:schemeClr val="accent1"/>
+          </a:fillRef>
+          <a:effectRef idx="2">
+            <a:schemeClr val="accent1"/>
+          </a:effectRef>
+          <a:fontRef idx="minor">
+            <a:schemeClr val="lt1"/>
+          </a:fontRef>
+        </p:style>
+        <p:txBody>
+          <a:bodyPr rtlCol="0" anchor="ctr"/>
+          <a:lstStyle/>
+          <a:p>
+            <a:pPr algn="ctr"/>
+          </a:p>
+        </p:txBody>
+      </p:sp>
+      <p:sp>
+        <p:nvSpPr>
+          <p:cNvPr id="12" name="TextBox 11"/>
+          <p:cNvSpPr txBox="1"/>
+          <p:nvPr/>
+        </p:nvSpPr>
+        <p:spPr>
+          <a:xfrm>
+            <a:off x="320040" y="2350008"/>
+            <a:ext cx="2606039" cy="228600"/>
+          </a:xfrm>
+          <a:prstGeom prst="rect">
+            <a:avLst/>
+          </a:prstGeom>
+          <a:noFill/>
+        </p:spPr>
+        <p:txBody>
+          <a:bodyPr wrap="square">
+            <a:spAutoFit/>
+          </a:bodyPr>
+          <a:lstStyle/>
+          <a:p>
+            <a:pPr algn="l"/>
+            <a:r>
+              <a:rPr sz="750" b="0" i="0">
+                <a:solidFill>
+                  <a:srgbClr val="888888"/>
+                </a:solidFill>
+              </a:rPr>
+              <a:t>Implementation &amp; Onboarding</a:t>
+            </a:r>
+          </a:p>
+        </p:txBody>
+      </p:sp>
+      <p:sp>
+        <p:nvSpPr>
+          <p:cNvPr id="13" name="TextBox 12"/>
+          <p:cNvSpPr txBox="1"/>
+          <p:nvPr/>
+        </p:nvSpPr>
+        <p:spPr>
+          <a:xfrm>
+            <a:off x="320040" y="2560320"/>
+            <a:ext cx="2606039" cy="228600"/>
+          </a:xfrm>
+          <a:prstGeom prst="rect">
+            <a:avLst/>
+          </a:prstGeom>
+          <a:noFill/>
+        </p:spPr>
+        <p:txBody>
+          <a:bodyPr wrap="square">
+            <a:spAutoFit/>
+          </a:bodyPr>
+          <a:lstStyle/>
+          <a:p>
+            <a:pPr algn="l"/>
+            <a:r>
+              <a:rPr sz="1100" b="1" i="0">
+                <a:solidFill>
+                  <a:srgbClr val="0F3460"/>
+                </a:solidFill>
+              </a:rPr>
+              <a:t>₹99,999</a:t>
+            </a:r>
+          </a:p>
+        </p:txBody>
+      </p:sp>
+      <p:sp>
+        <p:nvSpPr>
+          <p:cNvPr id="14" name="Rectangle 13"/>
+          <p:cNvSpPr/>
+          <p:nvPr/>
+        </p:nvSpPr>
+        <p:spPr>
+          <a:xfrm>
+            <a:off x="228600" y="2834640"/>
+            <a:ext cx="2788920" cy="640080"/>
+          </a:xfrm>
+          <a:prstGeom prst="rect">
+            <a:avLst/>
+          </a:prstGeom>
+          <a:solidFill>
+            <a:srgbClr val="0F3460"/>
+          </a:solidFill>
+          <a:ln>
+            <a:noFill/>
+          </a:ln>
+        </p:spPr>
+        <p:style>
+          <a:lnRef idx="1">
+            <a:schemeClr val="accent1"/>
+          </a:lnRef>
+          <a:fillRef idx="3">
+            <a:schemeClr val="accent1"/>
+          </a:fillRef>
+          <a:effectRef idx="2">
+            <a:schemeClr val="accent1"/>
+          </a:effectRef>
+          <a:fontRef idx="minor">
+            <a:schemeClr val="lt1"/>
+          </a:fontRef>
+        </p:style>
+        <p:txBody>
+          <a:bodyPr rtlCol="0" anchor="ctr"/>
+          <a:lstStyle/>
+          <a:p>
+            <a:pPr algn="ctr"/>
+          </a:p>
+        </p:txBody>
+      </p:sp>
+      <p:sp>
+        <p:nvSpPr>
+          <p:cNvPr id="15" name="TextBox 14"/>
+          <p:cNvSpPr txBox="1"/>
+          <p:nvPr/>
+        </p:nvSpPr>
+        <p:spPr>
+          <a:xfrm>
+            <a:off x="228600" y="2880360"/>
+            <a:ext cx="2788920" cy="347472"/>
+          </a:xfrm>
+          <a:prstGeom prst="rect">
+            <a:avLst/>
+          </a:prstGeom>
+          <a:noFill/>
+        </p:spPr>
+        <p:txBody>
+          <a:bodyPr wrap="square">
+            <a:spAutoFit/>
+          </a:bodyPr>
+          <a:lstStyle/>
+          <a:p>
+            <a:pPr algn="ctr"/>
+            <a:r>
+              <a:rPr sz="1600" b="1" i="0">
+                <a:solidFill>
+                  <a:srgbClr val="FFFFFF"/>
+                </a:solidFill>
+              </a:rPr>
+              <a:t>₹15,000/month</a:t>
+            </a:r>
+          </a:p>
+        </p:txBody>
+      </p:sp>
+      <p:sp>
+        <p:nvSpPr>
+          <p:cNvPr id="16" name="TextBox 15"/>
+          <p:cNvSpPr txBox="1"/>
+          <p:nvPr/>
+        </p:nvSpPr>
+        <p:spPr>
+          <a:xfrm>
+            <a:off x="228600" y="3227832"/>
+            <a:ext cx="2788920" cy="201168"/>
+          </a:xfrm>
+          <a:prstGeom prst="rect">
+            <a:avLst/>
+          </a:prstGeom>
+          <a:noFill/>
+        </p:spPr>
+        <p:txBody>
+          <a:bodyPr wrap="square">
+            <a:spAutoFit/>
+          </a:bodyPr>
+          <a:lstStyle/>
+          <a:p>
+            <a:pPr algn="ctr"/>
+            <a:r>
+              <a:rPr sz="750" b="0" i="0">
+                <a:solidFill>
+                  <a:srgbClr val="CCDDFF"/>
+                </a:solidFill>
+              </a:rPr>
+              <a:t>Monthly Subscription</a:t>
+            </a:r>
+          </a:p>
+        </p:txBody>
+      </p:sp>
+      <p:sp>
+        <p:nvSpPr>
+          <p:cNvPr id="17" name="TextBox 16"/>
+          <p:cNvSpPr txBox="1"/>
+          <p:nvPr/>
+        </p:nvSpPr>
+        <p:spPr>
+          <a:xfrm>
+            <a:off x="365760" y="3611880"/>
+            <a:ext cx="2560320" cy="347472"/>
+          </a:xfrm>
+          <a:prstGeom prst="rect">
+            <a:avLst/>
+          </a:prstGeom>
+          <a:noFill/>
+        </p:spPr>
+        <p:txBody>
+          <a:bodyPr wrap="square">
+            <a:spAutoFit/>
+          </a:bodyPr>
+          <a:lstStyle/>
+          <a:p>
+            <a:pPr algn="l"/>
+            <a:r>
+              <a:rPr sz="900" b="0" i="0">
+                <a:solidFill>
+                  <a:srgbClr val="333333"/>
+                </a:solidFill>
+              </a:rPr>
+              <a:t>✓  All Core Modules</a:t>
+            </a:r>
+          </a:p>
+        </p:txBody>
+      </p:sp>
+      <p:sp>
+        <p:nvSpPr>
+          <p:cNvPr id="18" name="TextBox 17"/>
+          <p:cNvSpPr txBox="1"/>
+          <p:nvPr/>
+        </p:nvSpPr>
+        <p:spPr>
+          <a:xfrm>
+            <a:off x="365760" y="3995928"/>
+            <a:ext cx="2560320" cy="347472"/>
+          </a:xfrm>
+          <a:prstGeom prst="rect">
+            <a:avLst/>
+          </a:prstGeom>
+          <a:noFill/>
+        </p:spPr>
+        <p:txBody>
+          <a:bodyPr wrap="square">
+            <a:spAutoFit/>
+          </a:bodyPr>
+          <a:lstStyle/>
+          <a:p>
+            <a:pPr algn="l"/>
+            <a:r>
+              <a:rPr sz="900" b="0" i="0">
+                <a:solidFill>
+                  <a:srgbClr val="333333"/>
+                </a:solidFill>
+              </a:rPr>
+              <a:t>✓  5 Engineer Accounts</a:t>
+            </a:r>
+          </a:p>
+        </p:txBody>
+      </p:sp>
+      <p:sp>
+        <p:nvSpPr>
+          <p:cNvPr id="19" name="TextBox 18"/>
+          <p:cNvSpPr txBox="1"/>
+          <p:nvPr/>
+        </p:nvSpPr>
+        <p:spPr>
+          <a:xfrm>
+            <a:off x="365760" y="4379976"/>
+            <a:ext cx="2560320" cy="347472"/>
+          </a:xfrm>
+          <a:prstGeom prst="rect">
+            <a:avLst/>
+          </a:prstGeom>
+          <a:noFill/>
+        </p:spPr>
+        <p:txBody>
+          <a:bodyPr wrap="square">
+            <a:spAutoFit/>
+          </a:bodyPr>
+          <a:lstStyle/>
+          <a:p>
+            <a:pPr algn="l"/>
+            <a:r>
+              <a:rPr sz="900" b="0" i="0">
+                <a:solidFill>
+                  <a:srgbClr val="333333"/>
+                </a:solidFill>
+              </a:rPr>
+              <a:t>✓  Email Support</a:t>
+            </a:r>
+          </a:p>
+        </p:txBody>
+      </p:sp>
+      <p:sp>
+        <p:nvSpPr>
+          <p:cNvPr id="20" name="TextBox 19"/>
+          <p:cNvSpPr txBox="1"/>
+          <p:nvPr/>
+        </p:nvSpPr>
+        <p:spPr>
+          <a:xfrm>
+            <a:off x="365760" y="4764024"/>
+            <a:ext cx="2560320" cy="347472"/>
+          </a:xfrm>
+          <a:prstGeom prst="rect">
+            <a:avLst/>
+          </a:prstGeom>
+          <a:noFill/>
+        </p:spPr>
+        <p:txBody>
+          <a:bodyPr wrap="square">
+            <a:spAutoFit/>
+          </a:bodyPr>
+          <a:lstStyle/>
+          <a:p>
+            <a:pPr algn="l"/>
+            <a:r>
+              <a:rPr sz="900" b="0" i="0">
+                <a:solidFill>
+                  <a:srgbClr val="333333"/>
+                </a:solidFill>
+              </a:rPr>
+              <a:t>✓  1 Lab Location</a:t>
+            </a:r>
+          </a:p>
+        </p:txBody>
+      </p:sp>
+      <p:sp>
+        <p:nvSpPr>
+          <p:cNvPr id="21" name="TextBox 20"/>
+          <p:cNvSpPr txBox="1"/>
+          <p:nvPr/>
+        </p:nvSpPr>
+        <p:spPr>
+          <a:xfrm>
+            <a:off x="365760" y="5148072"/>
+            <a:ext cx="2560320" cy="347472"/>
+          </a:xfrm>
+          <a:prstGeom prst="rect">
+            <a:avLst/>
+          </a:prstGeom>
+          <a:noFill/>
+        </p:spPr>
+        <p:txBody>
+          <a:bodyPr wrap="square">
+            <a:spAutoFit/>
+          </a:bodyPr>
+          <a:lstStyle/>
+          <a:p>
+            <a:pPr algn="l"/>
+            <a:r>
+              <a:rPr sz="900" b="0" i="0">
+                <a:solidFill>
+                  <a:srgbClr val="333333"/>
+                </a:solidFill>
+              </a:rPr>
+              <a:t>✓  Basic Reports</a:t>
+            </a:r>
+          </a:p>
+        </p:txBody>
+      </p:sp>
+      <p:sp>
+        <p:nvSpPr>
+          <p:cNvPr id="22" name="TextBox 21"/>
+          <p:cNvSpPr txBox="1"/>
+          <p:nvPr/>
+        </p:nvSpPr>
+        <p:spPr>
+          <a:xfrm>
+            <a:off x="365760" y="5532120"/>
+            <a:ext cx="2560320" cy="347472"/>
+          </a:xfrm>
+          <a:prstGeom prst="rect">
+            <a:avLst/>
+          </a:prstGeom>
+          <a:noFill/>
+        </p:spPr>
+        <p:txBody>
+          <a:bodyPr wrap="square">
+            <a:spAutoFit/>
+          </a:bodyPr>
+          <a:lstStyle/>
+          <a:p>
+            <a:pPr algn="l"/>
+            <a:r>
+              <a:rPr sz="900" b="0" i="0">
+                <a:solidFill>
+                  <a:srgbClr val="333333"/>
+                </a:solidFill>
+              </a:rPr>
+              <a:t>✓  Customer Portal</a:t>
+            </a:r>
+          </a:p>
+        </p:txBody>
+      </p:sp>
+      <p:sp>
+        <p:nvSpPr>
+          <p:cNvPr id="23" name="Rectangle 22"/>
+          <p:cNvSpPr/>
+          <p:nvPr/>
+        </p:nvSpPr>
+        <p:spPr>
+          <a:xfrm>
+            <a:off x="3273552" y="1197864"/>
+            <a:ext cx="2788920" cy="5394960"/>
+          </a:xfrm>
+          <a:prstGeom prst="rect">
+            <a:avLst/>
+          </a:prstGeom>
+          <a:solidFill>
+            <a:srgbClr val="CCCCCC"/>
+          </a:solidFill>
+          <a:ln>
+            <a:noFill/>
+          </a:ln>
+        </p:spPr>
+        <p:style>
+          <a:lnRef idx="1">
+            <a:schemeClr val="accent1"/>
+          </a:lnRef>
+          <a:fillRef idx="3">
+            <a:schemeClr val="accent1"/>
+          </a:fillRef>
+          <a:effectRef idx="2">
+            <a:schemeClr val="accent1"/>
+          </a:effectRef>
+          <a:fontRef idx="minor">
+            <a:schemeClr val="lt1"/>
+          </a:fontRef>
+        </p:style>
+        <p:txBody>
+          <a:bodyPr rtlCol="0" anchor="ctr"/>
+          <a:lstStyle/>
+          <a:p>
+            <a:pPr algn="ctr"/>
+          </a:p>
+        </p:txBody>
+      </p:sp>
+      <p:sp>
+        <p:nvSpPr>
+          <p:cNvPr id="24" name="Rectangle 23"/>
+          <p:cNvSpPr/>
+          <p:nvPr/>
+        </p:nvSpPr>
+        <p:spPr>
+          <a:xfrm>
+            <a:off x="3218688" y="1143000"/>
+            <a:ext cx="2788920" cy="5394960"/>
+          </a:xfrm>
+          <a:prstGeom prst="rect">
+            <a:avLst/>
+          </a:prstGeom>
+          <a:solidFill>
+            <a:srgbClr val="FFFFFF"/>
+          </a:solidFill>
+          <a:ln w="6350">
+            <a:solidFill>
+              <a:srgbClr val="E2E8F0"/>
+            </a:solidFill>
+          </a:ln>
+        </p:spPr>
+        <p:style>
+          <a:lnRef idx="1">
+            <a:schemeClr val="accent1"/>
+          </a:lnRef>
+          <a:fillRef idx="3">
+            <a:schemeClr val="accent1"/>
+          </a:fillRef>
+          <a:effectRef idx="2">
+            <a:schemeClr val="accent1"/>
+          </a:effectRef>
+          <a:fontRef idx="minor">
+            <a:schemeClr val="lt1"/>
+          </a:fontRef>
+        </p:style>
+        <p:txBody>
+          <a:bodyPr rtlCol="0" anchor="ctr"/>
+          <a:lstStyle/>
+          <a:p>
+            <a:pPr algn="ctr"/>
+          </a:p>
+        </p:txBody>
+      </p:sp>
+      <p:sp>
+        <p:nvSpPr>
+          <p:cNvPr id="25" name="Rectangle 24"/>
+          <p:cNvSpPr/>
+          <p:nvPr/>
+        </p:nvSpPr>
+        <p:spPr>
+          <a:xfrm>
+            <a:off x="3218688" y="1143000"/>
+            <a:ext cx="2788920" cy="1188720"/>
+          </a:xfrm>
+          <a:prstGeom prst="rect">
+            <a:avLst/>
+          </a:prstGeom>
+          <a:solidFill>
+            <a:srgbClr val="E94560"/>
+          </a:solidFill>
+          <a:ln>
+            <a:noFill/>
+          </a:ln>
+        </p:spPr>
+        <p:style>
+          <a:lnRef idx="1">
+            <a:schemeClr val="accent1"/>
+          </a:lnRef>
+          <a:fillRef idx="3">
+            <a:schemeClr val="accent1"/>
+          </a:fillRef>
+          <a:effectRef idx="2">
+            <a:schemeClr val="accent1"/>
+          </a:effectRef>
+          <a:fontRef idx="minor">
+            <a:schemeClr val="lt1"/>
+          </a:fontRef>
+        </p:style>
+        <p:txBody>
+          <a:bodyPr rtlCol="0" anchor="ctr"/>
+          <a:lstStyle/>
+          <a:p>
+            <a:pPr algn="ctr"/>
+          </a:p>
+        </p:txBody>
+      </p:sp>
+      <p:sp>
+        <p:nvSpPr>
+          <p:cNvPr id="26" name="Rectangle 25"/>
+          <p:cNvSpPr/>
+          <p:nvPr/>
+        </p:nvSpPr>
+        <p:spPr>
+          <a:xfrm>
+            <a:off x="3218688" y="1143000"/>
+            <a:ext cx="2788920" cy="274320"/>
+          </a:xfrm>
+          <a:prstGeom prst="rect">
+            <a:avLst/>
+          </a:prstGeom>
+          <a:solidFill>
+            <a:srgbClr val="F5A623"/>
+          </a:solidFill>
+          <a:ln>
+            <a:noFill/>
+          </a:ln>
+        </p:spPr>
+        <p:style>
+          <a:lnRef idx="1">
+            <a:schemeClr val="accent1"/>
+          </a:lnRef>
+          <a:fillRef idx="3">
+            <a:schemeClr val="accent1"/>
+          </a:fillRef>
+          <a:effectRef idx="2">
+            <a:schemeClr val="accent1"/>
+          </a:effectRef>
+          <a:fontRef idx="minor">
+            <a:schemeClr val="lt1"/>
+          </a:fontRef>
+        </p:style>
+        <p:txBody>
+          <a:bodyPr rtlCol="0" anchor="ctr"/>
+          <a:lstStyle/>
+          <a:p>
+            <a:pPr algn="ctr"/>
+          </a:p>
+        </p:txBody>
+      </p:sp>
+      <p:sp>
+        <p:nvSpPr>
+          <p:cNvPr id="27" name="TextBox 26"/>
+          <p:cNvSpPr txBox="1"/>
+          <p:nvPr/>
+        </p:nvSpPr>
+        <p:spPr>
+          <a:xfrm>
+            <a:off x="3218688" y="1161288"/>
+            <a:ext cx="2788920" cy="237744"/>
+          </a:xfrm>
+          <a:prstGeom prst="rect">
+            <a:avLst/>
+          </a:prstGeom>
+          <a:noFill/>
+        </p:spPr>
+        <p:txBody>
+          <a:bodyPr wrap="square">
+            <a:spAutoFit/>
+          </a:bodyPr>
+          <a:lstStyle/>
+          <a:p>
+            <a:pPr algn="ctr"/>
+            <a:r>
+              <a:rPr sz="800" b="1" i="0">
+                <a:solidFill>
+                  <a:srgbClr val="0F3460"/>
+                </a:solidFill>
+              </a:rPr>
+              <a:t>⭐ MOST POPULAR</a:t>
+            </a:r>
+          </a:p>
+        </p:txBody>
+      </p:sp>
+      <p:sp>
+        <p:nvSpPr>
+          <p:cNvPr id="28" name="TextBox 27"/>
+          <p:cNvSpPr txBox="1"/>
+          <p:nvPr/>
+        </p:nvSpPr>
+        <p:spPr>
+          <a:xfrm>
+            <a:off x="3218688" y="1463040"/>
+            <a:ext cx="2788920" cy="411480"/>
+          </a:xfrm>
+          <a:prstGeom prst="rect">
+            <a:avLst/>
+          </a:prstGeom>
+          <a:noFill/>
+        </p:spPr>
+        <p:txBody>
+          <a:bodyPr wrap="square">
+            <a:spAutoFit/>
+          </a:bodyPr>
+          <a:lstStyle/>
+          <a:p>
+            <a:pPr algn="ctr"/>
+            <a:r>
+              <a:rPr sz="1800" b="0" i="0">
+                <a:solidFill>
+                  <a:srgbClr val="FFFFFF"/>
+                </a:solidFill>
+              </a:rPr>
+              <a:t>⭐</a:t>
+            </a:r>
+          </a:p>
+        </p:txBody>
+      </p:sp>
+      <p:sp>
+        <p:nvSpPr>
+          <p:cNvPr id="29" name="TextBox 28"/>
+          <p:cNvSpPr txBox="1"/>
+          <p:nvPr/>
+        </p:nvSpPr>
+        <p:spPr>
+          <a:xfrm>
+            <a:off x="3218688" y="1847088"/>
+            <a:ext cx="2788920" cy="365760"/>
+          </a:xfrm>
+          <a:prstGeom prst="rect">
+            <a:avLst/>
+          </a:prstGeom>
+          <a:noFill/>
+        </p:spPr>
+        <p:txBody>
+          <a:bodyPr wrap="square">
+            <a:spAutoFit/>
+          </a:bodyPr>
+          <a:lstStyle/>
+          <a:p>
+            <a:pPr algn="ctr"/>
+            <a:r>
+              <a:rPr sz="1400" b="1" i="0">
+                <a:solidFill>
+                  <a:srgbClr val="FFFFFF"/>
+                </a:solidFill>
+              </a:rPr>
+              <a:t>Professional</a:t>
+            </a:r>
+          </a:p>
+        </p:txBody>
+      </p:sp>
+      <p:sp>
+        <p:nvSpPr>
+          <p:cNvPr id="30" name="TextBox 29"/>
+          <p:cNvSpPr txBox="1"/>
+          <p:nvPr/>
+        </p:nvSpPr>
+        <p:spPr>
+          <a:xfrm>
+            <a:off x="3218688" y="2194560"/>
+            <a:ext cx="2788920" cy="274320"/>
+          </a:xfrm>
+          <a:prstGeom prst="rect">
+            <a:avLst/>
+          </a:prstGeom>
+          <a:noFill/>
+        </p:spPr>
+        <p:txBody>
+          <a:bodyPr wrap="square">
+            <a:spAutoFit/>
+          </a:bodyPr>
+          <a:lstStyle/>
+          <a:p>
+            <a:pPr algn="ctr"/>
+            <a:r>
+              <a:rPr sz="850" b="0" i="0">
+                <a:solidFill>
+                  <a:srgbClr val="CCDDFF"/>
+                </a:solidFill>
+              </a:rPr>
+              <a:t>Up to 50 Users</a:t>
+            </a:r>
+          </a:p>
+        </p:txBody>
+      </p:sp>
+      <p:sp>
+        <p:nvSpPr>
+          <p:cNvPr id="31" name="Rectangle 30"/>
+          <p:cNvSpPr/>
+          <p:nvPr/>
+        </p:nvSpPr>
+        <p:spPr>
+          <a:xfrm>
+            <a:off x="3218688" y="2331720"/>
+            <a:ext cx="2788920" cy="502920"/>
+          </a:xfrm>
+          <a:prstGeom prst="rect">
+            <a:avLst/>
+          </a:prstGeom>
+          <a:solidFill>
+            <a:srgbClr val="F5F7FA"/>
+          </a:solidFill>
+          <a:ln>
+            <a:noFill/>
+          </a:ln>
+        </p:spPr>
+        <p:style>
+          <a:lnRef idx="1">
+            <a:schemeClr val="accent1"/>
+          </a:lnRef>
+          <a:fillRef idx="3">
+            <a:schemeClr val="accent1"/>
+          </a:fillRef>
+          <a:effectRef idx="2">
+            <a:schemeClr val="accent1"/>
+          </a:effectRef>
+          <a:fontRef idx="minor">
+            <a:schemeClr val="lt1"/>
+          </a:fontRef>
+        </p:style>
+        <p:txBody>
+          <a:bodyPr rtlCol="0" anchor="ctr"/>
+          <a:lstStyle/>
+          <a:p>
+            <a:pPr algn="ctr"/>
+          </a:p>
+        </p:txBody>
+      </p:sp>
+      <p:sp>
+        <p:nvSpPr>
+          <p:cNvPr id="32" name="TextBox 31"/>
+          <p:cNvSpPr txBox="1"/>
+          <p:nvPr/>
+        </p:nvSpPr>
+        <p:spPr>
+          <a:xfrm>
+            <a:off x="3310128" y="2350008"/>
+            <a:ext cx="2606039" cy="228600"/>
+          </a:xfrm>
+          <a:prstGeom prst="rect">
+            <a:avLst/>
+          </a:prstGeom>
+          <a:noFill/>
+        </p:spPr>
+        <p:txBody>
+          <a:bodyPr wrap="square">
+            <a:spAutoFit/>
+          </a:bodyPr>
+          <a:lstStyle/>
+          <a:p>
+            <a:pPr algn="l"/>
+            <a:r>
+              <a:rPr sz="750" b="0" i="0">
+                <a:solidFill>
+                  <a:srgbClr val="888888"/>
+                </a:solidFill>
+              </a:rPr>
+              <a:t>Implementation &amp; Onboarding</a:t>
+            </a:r>
+          </a:p>
+        </p:txBody>
+      </p:sp>
+      <p:sp>
+        <p:nvSpPr>
+          <p:cNvPr id="33" name="TextBox 32"/>
+          <p:cNvSpPr txBox="1"/>
+          <p:nvPr/>
+        </p:nvSpPr>
+        <p:spPr>
+          <a:xfrm>
+            <a:off x="3310128" y="2560320"/>
+            <a:ext cx="2606039" cy="228600"/>
+          </a:xfrm>
+          <a:prstGeom prst="rect">
+            <a:avLst/>
+          </a:prstGeom>
+          <a:noFill/>
+        </p:spPr>
+        <p:txBody>
+          <a:bodyPr wrap="square">
+            <a:spAutoFit/>
+          </a:bodyPr>
+          <a:lstStyle/>
+          <a:p>
+            <a:pPr algn="l"/>
+            <a:r>
+              <a:rPr sz="1100" b="1" i="0">
+                <a:solidFill>
+                  <a:srgbClr val="0F3460"/>
+                </a:solidFill>
+              </a:rPr>
+              <a:t>₹1,49,999</a:t>
+            </a:r>
+          </a:p>
+        </p:txBody>
+      </p:sp>
+      <p:sp>
+        <p:nvSpPr>
+          <p:cNvPr id="34" name="Rectangle 33"/>
+          <p:cNvSpPr/>
+          <p:nvPr/>
+        </p:nvSpPr>
+        <p:spPr>
+          <a:xfrm>
+            <a:off x="3218688" y="2834640"/>
+            <a:ext cx="2788920" cy="640080"/>
+          </a:xfrm>
+          <a:prstGeom prst="rect">
+            <a:avLst/>
+          </a:prstGeom>
+          <a:solidFill>
+            <a:srgbClr val="E94560"/>
+          </a:solidFill>
+          <a:ln>
+            <a:noFill/>
+          </a:ln>
+        </p:spPr>
+        <p:style>
+          <a:lnRef idx="1">
+            <a:schemeClr val="accent1"/>
+          </a:lnRef>
+          <a:fillRef idx="3">
+            <a:schemeClr val="accent1"/>
+          </a:fillRef>
+          <a:effectRef idx="2">
+            <a:schemeClr val="accent1"/>
+          </a:effectRef>
+          <a:fontRef idx="minor">
+            <a:schemeClr val="lt1"/>
+          </a:fontRef>
+        </p:style>
+        <p:txBody>
+          <a:bodyPr rtlCol="0" anchor="ctr"/>
+          <a:lstStyle/>
+          <a:p>
+            <a:pPr algn="ctr"/>
+          </a:p>
+        </p:txBody>
+      </p:sp>
+      <p:sp>
+        <p:nvSpPr>
+          <p:cNvPr id="35" name="TextBox 34"/>
+          <p:cNvSpPr txBox="1"/>
+          <p:nvPr/>
+        </p:nvSpPr>
+        <p:spPr>
+          <a:xfrm>
+            <a:off x="3218688" y="2880360"/>
+            <a:ext cx="2788920" cy="347472"/>
+          </a:xfrm>
+          <a:prstGeom prst="rect">
+            <a:avLst/>
+          </a:prstGeom>
+          <a:noFill/>
+        </p:spPr>
+        <p:txBody>
+          <a:bodyPr wrap="square">
+            <a:spAutoFit/>
+          </a:bodyPr>
+          <a:lstStyle/>
+          <a:p>
+            <a:pPr algn="ctr"/>
+            <a:r>
+              <a:rPr sz="1600" b="1" i="0">
+                <a:solidFill>
+                  <a:srgbClr val="FFFFFF"/>
+                </a:solidFill>
+              </a:rPr>
+              <a:t>₹22,000/month</a:t>
+            </a:r>
+          </a:p>
+        </p:txBody>
+      </p:sp>
+      <p:sp>
+        <p:nvSpPr>
+          <p:cNvPr id="36" name="TextBox 35"/>
+          <p:cNvSpPr txBox="1"/>
+          <p:nvPr/>
+        </p:nvSpPr>
+        <p:spPr>
+          <a:xfrm>
+            <a:off x="3218688" y="3227832"/>
+            <a:ext cx="2788920" cy="201168"/>
+          </a:xfrm>
+          <a:prstGeom prst="rect">
+            <a:avLst/>
+          </a:prstGeom>
+          <a:noFill/>
+        </p:spPr>
+        <p:txBody>
+          <a:bodyPr wrap="square">
+            <a:spAutoFit/>
+          </a:bodyPr>
+          <a:lstStyle/>
+          <a:p>
+            <a:pPr algn="ctr"/>
+            <a:r>
+              <a:rPr sz="750" b="0" i="0">
+                <a:solidFill>
+                  <a:srgbClr val="CCDDFF"/>
+                </a:solidFill>
+              </a:rPr>
+              <a:t>Monthly Subscription</a:t>
+            </a:r>
+          </a:p>
+        </p:txBody>
+      </p:sp>
+      <p:sp>
+        <p:nvSpPr>
+          <p:cNvPr id="37" name="TextBox 36"/>
+          <p:cNvSpPr txBox="1"/>
+          <p:nvPr/>
+        </p:nvSpPr>
+        <p:spPr>
+          <a:xfrm>
+            <a:off x="3355848" y="3611880"/>
+            <a:ext cx="2560320" cy="347472"/>
+          </a:xfrm>
+          <a:prstGeom prst="rect">
+            <a:avLst/>
+          </a:prstGeom>
+          <a:noFill/>
+        </p:spPr>
+        <p:txBody>
+          <a:bodyPr wrap="square">
+            <a:spAutoFit/>
+          </a:bodyPr>
+          <a:lstStyle/>
+          <a:p>
+            <a:pPr algn="l"/>
+            <a:r>
+              <a:rPr sz="900" b="0" i="0">
+                <a:solidFill>
+                  <a:srgbClr val="333333"/>
+                </a:solidFill>
+              </a:rPr>
+              <a:t>✓  Everything in Starter</a:t>
+            </a:r>
+          </a:p>
+        </p:txBody>
+      </p:sp>
+      <p:sp>
+        <p:nvSpPr>
+          <p:cNvPr id="38" name="TextBox 37"/>
+          <p:cNvSpPr txBox="1"/>
+          <p:nvPr/>
+        </p:nvSpPr>
+        <p:spPr>
+          <a:xfrm>
+            <a:off x="3355848" y="3995928"/>
+            <a:ext cx="2560320" cy="347472"/>
+          </a:xfrm>
+          <a:prstGeom prst="rect">
+            <a:avLst/>
+          </a:prstGeom>
+          <a:noFill/>
+        </p:spPr>
+        <p:txBody>
+          <a:bodyPr wrap="square">
+            <a:spAutoFit/>
+          </a:bodyPr>
+          <a:lstStyle/>
+          <a:p>
+            <a:pPr algn="l"/>
+            <a:r>
+              <a:rPr sz="900" b="0" i="0">
+                <a:solidFill>
+                  <a:srgbClr val="333333"/>
+                </a:solidFill>
+              </a:rPr>
+              <a:t>✓  Unlimited Certificates</a:t>
+            </a:r>
+          </a:p>
+        </p:txBody>
+      </p:sp>
+      <p:sp>
+        <p:nvSpPr>
+          <p:cNvPr id="39" name="TextBox 38"/>
+          <p:cNvSpPr txBox="1"/>
+          <p:nvPr/>
+        </p:nvSpPr>
+        <p:spPr>
+          <a:xfrm>
+            <a:off x="3355848" y="4379976"/>
+            <a:ext cx="2560320" cy="347472"/>
+          </a:xfrm>
+          <a:prstGeom prst="rect">
+            <a:avLst/>
+          </a:prstGeom>
+          <a:noFill/>
+        </p:spPr>
+        <p:txBody>
+          <a:bodyPr wrap="square">
+            <a:spAutoFit/>
+          </a:bodyPr>
+          <a:lstStyle/>
+          <a:p>
+            <a:pPr algn="l"/>
+            <a:r>
+              <a:rPr sz="900" b="0" i="0">
+                <a:solidFill>
+                  <a:srgbClr val="333333"/>
+                </a:solidFill>
+              </a:rPr>
+              <a:t>✓  Priority Support</a:t>
+            </a:r>
+          </a:p>
+        </p:txBody>
+      </p:sp>
+      <p:sp>
+        <p:nvSpPr>
+          <p:cNvPr id="40" name="TextBox 39"/>
+          <p:cNvSpPr txBox="1"/>
+          <p:nvPr/>
+        </p:nvSpPr>
+        <p:spPr>
+          <a:xfrm>
+            <a:off x="3355848" y="4764024"/>
+            <a:ext cx="2560320" cy="347472"/>
+          </a:xfrm>
+          <a:prstGeom prst="rect">
+            <a:avLst/>
+          </a:prstGeom>
+          <a:noFill/>
+        </p:spPr>
+        <p:txBody>
+          <a:bodyPr wrap="square">
+            <a:spAutoFit/>
+          </a:bodyPr>
+          <a:lstStyle/>
+          <a:p>
+            <a:pPr algn="l"/>
+            <a:r>
+              <a:rPr sz="900" b="0" i="0">
+                <a:solidFill>
+                  <a:srgbClr val="333333"/>
+                </a:solidFill>
+              </a:rPr>
+              <a:t>✓  Multi-location</a:t>
+            </a:r>
+          </a:p>
+        </p:txBody>
+      </p:sp>
+      <p:sp>
+        <p:nvSpPr>
+          <p:cNvPr id="41" name="TextBox 40"/>
+          <p:cNvSpPr txBox="1"/>
+          <p:nvPr/>
+        </p:nvSpPr>
+        <p:spPr>
+          <a:xfrm>
+            <a:off x="3355848" y="5148072"/>
+            <a:ext cx="2560320" cy="347472"/>
+          </a:xfrm>
+          <a:prstGeom prst="rect">
+            <a:avLst/>
+          </a:prstGeom>
+          <a:noFill/>
+        </p:spPr>
+        <p:txBody>
+          <a:bodyPr wrap="square">
+            <a:spAutoFit/>
+          </a:bodyPr>
+          <a:lstStyle/>
+          <a:p>
+            <a:pPr algn="l"/>
+            <a:r>
+              <a:rPr sz="900" b="0" i="0">
+                <a:solidFill>
+                  <a:srgbClr val="333333"/>
+                </a:solidFill>
+              </a:rPr>
+              <a:t>✓  Advanced Analytics</a:t>
+            </a:r>
+          </a:p>
+        </p:txBody>
+      </p:sp>
+      <p:sp>
+        <p:nvSpPr>
+          <p:cNvPr id="42" name="TextBox 41"/>
+          <p:cNvSpPr txBox="1"/>
+          <p:nvPr/>
+        </p:nvSpPr>
+        <p:spPr>
+          <a:xfrm>
+            <a:off x="3355848" y="5532120"/>
+            <a:ext cx="2560320" cy="347472"/>
+          </a:xfrm>
+          <a:prstGeom prst="rect">
+            <a:avLst/>
+          </a:prstGeom>
+          <a:noFill/>
+        </p:spPr>
+        <p:txBody>
+          <a:bodyPr wrap="square">
+            <a:spAutoFit/>
+          </a:bodyPr>
+          <a:lstStyle/>
+          <a:p>
+            <a:pPr algn="l"/>
+            <a:r>
+              <a:rPr sz="900" b="0" i="0">
+                <a:solidFill>
+                  <a:srgbClr val="333333"/>
+                </a:solidFill>
+              </a:rPr>
+              <a:t>✓  API Access</a:t>
+            </a:r>
+          </a:p>
+        </p:txBody>
+      </p:sp>
+      <p:sp>
+        <p:nvSpPr>
+          <p:cNvPr id="43" name="TextBox 42"/>
+          <p:cNvSpPr txBox="1"/>
+          <p:nvPr/>
+        </p:nvSpPr>
+        <p:spPr>
+          <a:xfrm>
+            <a:off x="3355848" y="5916168"/>
+            <a:ext cx="2560320" cy="347472"/>
+          </a:xfrm>
+          <a:prstGeom prst="rect">
+            <a:avLst/>
+          </a:prstGeom>
+          <a:noFill/>
+        </p:spPr>
+        <p:txBody>
+          <a:bodyPr wrap="square">
+            <a:spAutoFit/>
+          </a:bodyPr>
+          <a:lstStyle/>
+          <a:p>
+            <a:pPr algn="l"/>
+            <a:r>
+              <a:rPr sz="900" b="0" i="0">
+                <a:solidFill>
+                  <a:srgbClr val="333333"/>
+                </a:solidFill>
+              </a:rPr>
+              <a:t>✓  Custom Certificate Template</a:t>
+            </a:r>
+          </a:p>
+        </p:txBody>
+      </p:sp>
+      <p:sp>
+        <p:nvSpPr>
+          <p:cNvPr id="44" name="Rectangle 43"/>
+          <p:cNvSpPr/>
+          <p:nvPr/>
+        </p:nvSpPr>
+        <p:spPr>
+          <a:xfrm>
+            <a:off x="6263640" y="1197864"/>
+            <a:ext cx="2788920" cy="5394960"/>
+          </a:xfrm>
+          <a:prstGeom prst="rect">
+            <a:avLst/>
+          </a:prstGeom>
+          <a:solidFill>
+            <a:srgbClr val="CCCCCC"/>
+          </a:solidFill>
+          <a:ln>
+            <a:noFill/>
+          </a:ln>
+        </p:spPr>
+        <p:style>
+          <a:lnRef idx="1">
+            <a:schemeClr val="accent1"/>
+          </a:lnRef>
+          <a:fillRef idx="3">
+            <a:schemeClr val="accent1"/>
+          </a:fillRef>
+          <a:effectRef idx="2">
+            <a:schemeClr val="accent1"/>
+          </a:effectRef>
+          <a:fontRef idx="minor">
+            <a:schemeClr val="lt1"/>
+          </a:fontRef>
+        </p:style>
+        <p:txBody>
+          <a:bodyPr rtlCol="0" anchor="ctr"/>
+          <a:lstStyle/>
+          <a:p>
+            <a:pPr algn="ctr"/>
+          </a:p>
+        </p:txBody>
+      </p:sp>
+      <p:sp>
+        <p:nvSpPr>
+          <p:cNvPr id="45" name="Rectangle 44"/>
+          <p:cNvSpPr/>
+          <p:nvPr/>
+        </p:nvSpPr>
+        <p:spPr>
+          <a:xfrm>
+            <a:off x="6208776" y="1143000"/>
+            <a:ext cx="2788920" cy="5394960"/>
+          </a:xfrm>
+          <a:prstGeom prst="rect">
+            <a:avLst/>
+          </a:prstGeom>
+          <a:solidFill>
+            <a:srgbClr val="FFFFFF"/>
+          </a:solidFill>
+          <a:ln w="6350">
+            <a:solidFill>
+              <a:srgbClr val="E2E8F0"/>
+            </a:solidFill>
+          </a:ln>
+        </p:spPr>
+        <p:style>
+          <a:lnRef idx="1">
+            <a:schemeClr val="accent1"/>
+          </a:lnRef>
+          <a:fillRef idx="3">
+            <a:schemeClr val="accent1"/>
+          </a:fillRef>
+          <a:effectRef idx="2">
+            <a:schemeClr val="accent1"/>
+          </a:effectRef>
+          <a:fontRef idx="minor">
+            <a:schemeClr val="lt1"/>
+          </a:fontRef>
+        </p:style>
+        <p:txBody>
+          <a:bodyPr rtlCol="0" anchor="ctr"/>
+          <a:lstStyle/>
+          <a:p>
+            <a:pPr algn="ctr"/>
+          </a:p>
+        </p:txBody>
+      </p:sp>
+      <p:sp>
+        <p:nvSpPr>
+          <p:cNvPr id="46" name="Rectangle 45"/>
+          <p:cNvSpPr/>
+          <p:nvPr/>
+        </p:nvSpPr>
+        <p:spPr>
+          <a:xfrm>
+            <a:off x="6208776" y="1143000"/>
+            <a:ext cx="2788920" cy="1188720"/>
+          </a:xfrm>
+          <a:prstGeom prst="rect">
+            <a:avLst/>
+          </a:prstGeom>
+          <a:solidFill>
+            <a:srgbClr val="1A1A3E"/>
+          </a:solidFill>
+          <a:ln>
+            <a:noFill/>
+          </a:ln>
+        </p:spPr>
+        <p:style>
+          <a:lnRef idx="1">
+            <a:schemeClr val="accent1"/>
+          </a:lnRef>
+          <a:fillRef idx="3">
+            <a:schemeClr val="accent1"/>
+          </a:fillRef>
+          <a:effectRef idx="2">
+            <a:schemeClr val="accent1"/>
+          </a:effectRef>
+          <a:fontRef idx="minor">
+            <a:schemeClr val="lt1"/>
+          </a:fontRef>
+        </p:style>
+        <p:txBody>
+          <a:bodyPr rtlCol="0" anchor="ctr"/>
+          <a:lstStyle/>
+          <a:p>
+            <a:pPr algn="ctr"/>
+          </a:p>
+        </p:txBody>
+      </p:sp>
+      <p:sp>
+        <p:nvSpPr>
+          <p:cNvPr id="47" name="TextBox 46"/>
+          <p:cNvSpPr txBox="1"/>
+          <p:nvPr/>
+        </p:nvSpPr>
+        <p:spPr>
+          <a:xfrm>
+            <a:off x="6208776" y="1234440"/>
+            <a:ext cx="2788920" cy="411480"/>
+          </a:xfrm>
+          <a:prstGeom prst="rect">
+            <a:avLst/>
+          </a:prstGeom>
+          <a:noFill/>
+        </p:spPr>
+        <p:txBody>
+          <a:bodyPr wrap="square">
+            <a:spAutoFit/>
+          </a:bodyPr>
+          <a:lstStyle/>
+          <a:p>
+            <a:pPr algn="ctr"/>
+            <a:r>
+              <a:rPr sz="1800" b="0" i="0">
+                <a:solidFill>
+                  <a:srgbClr val="FFFFFF"/>
+                </a:solidFill>
+              </a:rPr>
+              <a:t>🏢</a:t>
+            </a:r>
+          </a:p>
+        </p:txBody>
+      </p:sp>
+      <p:sp>
+        <p:nvSpPr>
+          <p:cNvPr id="48" name="TextBox 47"/>
+          <p:cNvSpPr txBox="1"/>
+          <p:nvPr/>
+        </p:nvSpPr>
+        <p:spPr>
+          <a:xfrm>
+            <a:off x="6208776" y="1618488"/>
+            <a:ext cx="2788920" cy="365760"/>
+          </a:xfrm>
+          <a:prstGeom prst="rect">
+            <a:avLst/>
+          </a:prstGeom>
+          <a:noFill/>
+        </p:spPr>
+        <p:txBody>
+          <a:bodyPr wrap="square">
+            <a:spAutoFit/>
+          </a:bodyPr>
+          <a:lstStyle/>
+          <a:p>
+            <a:pPr algn="ctr"/>
+            <a:r>
+              <a:rPr sz="1400" b="1" i="0">
+                <a:solidFill>
+                  <a:srgbClr val="FFFFFF"/>
+                </a:solidFill>
+              </a:rPr>
+              <a:t>Enterprise</a:t>
+            </a:r>
+          </a:p>
+        </p:txBody>
+      </p:sp>
+      <p:sp>
+        <p:nvSpPr>
+          <p:cNvPr id="49" name="TextBox 48"/>
+          <p:cNvSpPr txBox="1"/>
+          <p:nvPr/>
+        </p:nvSpPr>
+        <p:spPr>
+          <a:xfrm>
+            <a:off x="6208776" y="1965960"/>
+            <a:ext cx="2788920" cy="274320"/>
+          </a:xfrm>
+          <a:prstGeom prst="rect">
+            <a:avLst/>
+          </a:prstGeom>
+          <a:noFill/>
+        </p:spPr>
+        <p:txBody>
+          <a:bodyPr wrap="square">
+            <a:spAutoFit/>
+          </a:bodyPr>
+          <a:lstStyle/>
+          <a:p>
+            <a:pPr algn="ctr"/>
+            <a:r>
+              <a:rPr sz="850" b="0" i="0">
+                <a:solidFill>
+                  <a:srgbClr val="CCDDFF"/>
+                </a:solidFill>
+              </a:rPr>
+              <a:t>Up to 100 Users</a:t>
+            </a:r>
+          </a:p>
+        </p:txBody>
+      </p:sp>
+      <p:sp>
+        <p:nvSpPr>
+          <p:cNvPr id="50" name="Rectangle 49"/>
+          <p:cNvSpPr/>
+          <p:nvPr/>
+        </p:nvSpPr>
+        <p:spPr>
+          <a:xfrm>
+            <a:off x="6208776" y="2331720"/>
+            <a:ext cx="2788920" cy="502920"/>
+          </a:xfrm>
+          <a:prstGeom prst="rect">
+            <a:avLst/>
+          </a:prstGeom>
+          <a:solidFill>
+            <a:srgbClr val="F5F7FA"/>
+          </a:solidFill>
+          <a:ln>
+            <a:noFill/>
+          </a:ln>
+        </p:spPr>
+        <p:style>
+          <a:lnRef idx="1">
+            <a:schemeClr val="accent1"/>
+          </a:lnRef>
+          <a:fillRef idx="3">
+            <a:schemeClr val="accent1"/>
+          </a:fillRef>
+          <a:effectRef idx="2">
+            <a:schemeClr val="accent1"/>
+          </a:effectRef>
+          <a:fontRef idx="minor">
+            <a:schemeClr val="lt1"/>
+          </a:fontRef>
+        </p:style>
+        <p:txBody>
+          <a:bodyPr rtlCol="0" anchor="ctr"/>
+          <a:lstStyle/>
+          <a:p>
+            <a:pPr algn="ctr"/>
+          </a:p>
+        </p:txBody>
+      </p:sp>
+      <p:sp>
+        <p:nvSpPr>
+          <p:cNvPr id="51" name="TextBox 50"/>
+          <p:cNvSpPr txBox="1"/>
+          <p:nvPr/>
+        </p:nvSpPr>
+        <p:spPr>
+          <a:xfrm>
+            <a:off x="6300216" y="2350008"/>
+            <a:ext cx="2606039" cy="228600"/>
+          </a:xfrm>
+          <a:prstGeom prst="rect">
+            <a:avLst/>
+          </a:prstGeom>
+          <a:noFill/>
+        </p:spPr>
+        <p:txBody>
+          <a:bodyPr wrap="square">
+            <a:spAutoFit/>
+          </a:bodyPr>
+          <a:lstStyle/>
+          <a:p>
+            <a:pPr algn="l"/>
+            <a:r>
+              <a:rPr sz="750" b="0" i="0">
+                <a:solidFill>
+                  <a:srgbClr val="888888"/>
+                </a:solidFill>
+              </a:rPr>
+              <a:t>Implementation &amp; Onboarding</a:t>
+            </a:r>
+          </a:p>
+        </p:txBody>
+      </p:sp>
+      <p:sp>
+        <p:nvSpPr>
+          <p:cNvPr id="52" name="TextBox 51"/>
+          <p:cNvSpPr txBox="1"/>
+          <p:nvPr/>
+        </p:nvSpPr>
+        <p:spPr>
+          <a:xfrm>
+            <a:off x="6300216" y="2560320"/>
+            <a:ext cx="2606039" cy="228600"/>
+          </a:xfrm>
+          <a:prstGeom prst="rect">
+            <a:avLst/>
+          </a:prstGeom>
+          <a:noFill/>
+        </p:spPr>
+        <p:txBody>
+          <a:bodyPr wrap="square">
+            <a:spAutoFit/>
+          </a:bodyPr>
+          <a:lstStyle/>
+          <a:p>
+            <a:pPr algn="l"/>
+            <a:r>
+              <a:rPr sz="1100" b="1" i="0">
+                <a:solidFill>
+                  <a:srgbClr val="0F3460"/>
+                </a:solidFill>
+              </a:rPr>
+              <a:t>₹2,99,999</a:t>
+            </a:r>
+          </a:p>
+        </p:txBody>
+      </p:sp>
+      <p:sp>
+        <p:nvSpPr>
+          <p:cNvPr id="53" name="Rectangle 52"/>
+          <p:cNvSpPr/>
+          <p:nvPr/>
+        </p:nvSpPr>
+        <p:spPr>
+          <a:xfrm>
+            <a:off x="6208776" y="2834640"/>
+            <a:ext cx="2788920" cy="640080"/>
+          </a:xfrm>
+          <a:prstGeom prst="rect">
+            <a:avLst/>
+          </a:prstGeom>
+          <a:solidFill>
+            <a:srgbClr val="1A1A3E"/>
+          </a:solidFill>
+          <a:ln>
+            <a:noFill/>
+          </a:ln>
+        </p:spPr>
+        <p:style>
+          <a:lnRef idx="1">
+            <a:schemeClr val="accent1"/>
+          </a:lnRef>
+          <a:fillRef idx="3">
+            <a:schemeClr val="accent1"/>
+          </a:fillRef>
+          <a:effectRef idx="2">
+            <a:schemeClr val="accent1"/>
+          </a:effectRef>
+          <a:fontRef idx="minor">
+            <a:schemeClr val="lt1"/>
+          </a:fontRef>
+        </p:style>
+        <p:txBody>
+          <a:bodyPr rtlCol="0" anchor="ctr"/>
+          <a:lstStyle/>
+          <a:p>
+            <a:pPr algn="ctr"/>
+          </a:p>
+        </p:txBody>
+      </p:sp>
+      <p:sp>
+        <p:nvSpPr>
+          <p:cNvPr id="54" name="TextBox 53"/>
+          <p:cNvSpPr txBox="1"/>
+          <p:nvPr/>
+        </p:nvSpPr>
+        <p:spPr>
+          <a:xfrm>
+            <a:off x="6208776" y="2880360"/>
+            <a:ext cx="2788920" cy="347472"/>
+          </a:xfrm>
+          <a:prstGeom prst="rect">
+            <a:avLst/>
+          </a:prstGeom>
+          <a:noFill/>
+        </p:spPr>
+        <p:txBody>
+          <a:bodyPr wrap="square">
+            <a:spAutoFit/>
+          </a:bodyPr>
+          <a:lstStyle/>
+          <a:p>
+            <a:pPr algn="ctr"/>
+            <a:r>
+              <a:rPr sz="1600" b="1" i="0">
+                <a:solidFill>
+                  <a:srgbClr val="FFFFFF"/>
+                </a:solidFill>
+              </a:rPr>
+              <a:t>₹35,000/month</a:t>
+            </a:r>
+          </a:p>
+        </p:txBody>
+      </p:sp>
+      <p:sp>
+        <p:nvSpPr>
+          <p:cNvPr id="55" name="TextBox 54"/>
+          <p:cNvSpPr txBox="1"/>
+          <p:nvPr/>
+        </p:nvSpPr>
+        <p:spPr>
+          <a:xfrm>
+            <a:off x="6208776" y="3227832"/>
+            <a:ext cx="2788920" cy="201168"/>
+          </a:xfrm>
+          <a:prstGeom prst="rect">
+            <a:avLst/>
+          </a:prstGeom>
+          <a:noFill/>
+        </p:spPr>
+        <p:txBody>
+          <a:bodyPr wrap="square">
+            <a:spAutoFit/>
+          </a:bodyPr>
+          <a:lstStyle/>
+          <a:p>
+            <a:pPr algn="ctr"/>
+            <a:r>
+              <a:rPr sz="750" b="0" i="0">
+                <a:solidFill>
+                  <a:srgbClr val="CCDDFF"/>
+                </a:solidFill>
+              </a:rPr>
+              <a:t>Monthly Subscription</a:t>
+            </a:r>
+          </a:p>
+        </p:txBody>
+      </p:sp>
+      <p:sp>
+        <p:nvSpPr>
+          <p:cNvPr id="56" name="TextBox 55"/>
+          <p:cNvSpPr txBox="1"/>
+          <p:nvPr/>
+        </p:nvSpPr>
+        <p:spPr>
+          <a:xfrm>
+            <a:off x="6345936" y="3611880"/>
+            <a:ext cx="2560320" cy="347472"/>
+          </a:xfrm>
+          <a:prstGeom prst="rect">
+            <a:avLst/>
+          </a:prstGeom>
+          <a:noFill/>
+        </p:spPr>
+        <p:txBody>
+          <a:bodyPr wrap="square">
+            <a:spAutoFit/>
+          </a:bodyPr>
+          <a:lstStyle/>
+          <a:p>
+            <a:pPr algn="l"/>
+            <a:r>
+              <a:rPr sz="900" b="0" i="0">
+                <a:solidFill>
+                  <a:srgbClr val="333333"/>
+                </a:solidFill>
+              </a:rPr>
+              <a:t>✓  Everything in Professional</a:t>
+            </a:r>
+          </a:p>
+        </p:txBody>
+      </p:sp>
+      <p:sp>
+        <p:nvSpPr>
+          <p:cNvPr id="57" name="TextBox 56"/>
+          <p:cNvSpPr txBox="1"/>
+          <p:nvPr/>
+        </p:nvSpPr>
+        <p:spPr>
+          <a:xfrm>
+            <a:off x="6345936" y="3995928"/>
+            <a:ext cx="2560320" cy="347472"/>
+          </a:xfrm>
+          <a:prstGeom prst="rect">
+            <a:avLst/>
+          </a:prstGeom>
+          <a:noFill/>
+        </p:spPr>
+        <p:txBody>
+          <a:bodyPr wrap="square">
+            <a:spAutoFit/>
+          </a:bodyPr>
+          <a:lstStyle/>
+          <a:p>
+            <a:pPr algn="l"/>
+            <a:r>
+              <a:rPr sz="900" b="0" i="0">
+                <a:solidFill>
+                  <a:srgbClr val="333333"/>
+                </a:solidFill>
+              </a:rPr>
+              <a:t>✓  Dedicated Account Manager</a:t>
+            </a:r>
+          </a:p>
+        </p:txBody>
+      </p:sp>
+      <p:sp>
+        <p:nvSpPr>
+          <p:cNvPr id="58" name="TextBox 57"/>
+          <p:cNvSpPr txBox="1"/>
+          <p:nvPr/>
+        </p:nvSpPr>
+        <p:spPr>
+          <a:xfrm>
+            <a:off x="6345936" y="4379976"/>
+            <a:ext cx="2560320" cy="347472"/>
+          </a:xfrm>
+          <a:prstGeom prst="rect">
+            <a:avLst/>
+          </a:prstGeom>
+          <a:noFill/>
+        </p:spPr>
+        <p:txBody>
+          <a:bodyPr wrap="square">
+            <a:spAutoFit/>
+          </a:bodyPr>
+          <a:lstStyle/>
+          <a:p>
+            <a:pPr algn="l"/>
+            <a:r>
+              <a:rPr sz="900" b="0" i="0">
+                <a:solidFill>
+                  <a:srgbClr val="333333"/>
+                </a:solidFill>
+              </a:rPr>
+              <a:t>✓  SLA Guarantee</a:t>
+            </a:r>
+          </a:p>
+        </p:txBody>
+      </p:sp>
+      <p:sp>
+        <p:nvSpPr>
+          <p:cNvPr id="59" name="TextBox 58"/>
+          <p:cNvSpPr txBox="1"/>
+          <p:nvPr/>
+        </p:nvSpPr>
+        <p:spPr>
+          <a:xfrm>
+            <a:off x="6345936" y="4764024"/>
+            <a:ext cx="2560320" cy="347472"/>
+          </a:xfrm>
+          <a:prstGeom prst="rect">
+            <a:avLst/>
+          </a:prstGeom>
+          <a:noFill/>
+        </p:spPr>
+        <p:txBody>
+          <a:bodyPr wrap="square">
+            <a:spAutoFit/>
+          </a:bodyPr>
+          <a:lstStyle/>
+          <a:p>
+            <a:pPr algn="l"/>
+            <a:r>
+              <a:rPr sz="900" b="0" i="0">
+                <a:solidFill>
+                  <a:srgbClr val="333333"/>
+                </a:solidFill>
+              </a:rPr>
+              <a:t>✓  Custom Integrations</a:t>
+            </a:r>
+          </a:p>
+        </p:txBody>
+      </p:sp>
+      <p:sp>
+        <p:nvSpPr>
+          <p:cNvPr id="60" name="TextBox 59"/>
+          <p:cNvSpPr txBox="1"/>
+          <p:nvPr/>
+        </p:nvSpPr>
+        <p:spPr>
+          <a:xfrm>
+            <a:off x="6345936" y="5148072"/>
+            <a:ext cx="2560320" cy="347472"/>
+          </a:xfrm>
+          <a:prstGeom prst="rect">
+            <a:avLst/>
+          </a:prstGeom>
+          <a:noFill/>
+        </p:spPr>
+        <p:txBody>
+          <a:bodyPr wrap="square">
+            <a:spAutoFit/>
+          </a:bodyPr>
+          <a:lstStyle/>
+          <a:p>
+            <a:pPr algn="l"/>
+            <a:r>
+              <a:rPr sz="900" b="0" i="0">
+                <a:solidFill>
+                  <a:srgbClr val="333333"/>
+                </a:solidFill>
+              </a:rPr>
+              <a:t>✓  On-premise Option</a:t>
+            </a:r>
+          </a:p>
+        </p:txBody>
+      </p:sp>
+      <p:sp>
+        <p:nvSpPr>
+          <p:cNvPr id="61" name="TextBox 60"/>
+          <p:cNvSpPr txBox="1"/>
+          <p:nvPr/>
+        </p:nvSpPr>
+        <p:spPr>
+          <a:xfrm>
+            <a:off x="6345936" y="5532120"/>
+            <a:ext cx="2560320" cy="347472"/>
+          </a:xfrm>
+          <a:prstGeom prst="rect">
+            <a:avLst/>
+          </a:prstGeom>
+          <a:noFill/>
+        </p:spPr>
+        <p:txBody>
+          <a:bodyPr wrap="square">
+            <a:spAutoFit/>
+          </a:bodyPr>
+          <a:lstStyle/>
+          <a:p>
+            <a:pPr algn="l"/>
+            <a:r>
+              <a:rPr sz="900" b="0" i="0">
+                <a:solidFill>
+                  <a:srgbClr val="333333"/>
+                </a:solidFill>
+              </a:rPr>
+              <a:t>✓  Training Workshops</a:t>
+            </a:r>
+          </a:p>
+        </p:txBody>
+      </p:sp>
+      <p:sp>
+        <p:nvSpPr>
+          <p:cNvPr id="62" name="TextBox 61"/>
+          <p:cNvSpPr txBox="1"/>
+          <p:nvPr/>
+        </p:nvSpPr>
+        <p:spPr>
+          <a:xfrm>
+            <a:off x="6345936" y="5916168"/>
+            <a:ext cx="2560320" cy="347472"/>
+          </a:xfrm>
+          <a:prstGeom prst="rect">
+            <a:avLst/>
+          </a:prstGeom>
+          <a:noFill/>
+        </p:spPr>
+        <p:txBody>
+          <a:bodyPr wrap="square">
+            <a:spAutoFit/>
+          </a:bodyPr>
+          <a:lstStyle/>
+          <a:p>
+            <a:pPr algn="l"/>
+            <a:r>
+              <a:rPr sz="900" b="0" i="0">
+                <a:solidFill>
+                  <a:srgbClr val="333333"/>
+                </a:solidFill>
+              </a:rPr>
+              <a:t>✓  NABL Audit Support</a:t>
+            </a:r>
+          </a:p>
+        </p:txBody>
+      </p:sp>
+      <p:sp>
+        <p:nvSpPr>
+          <p:cNvPr id="63" name="Rectangle 62"/>
+          <p:cNvSpPr/>
+          <p:nvPr/>
+        </p:nvSpPr>
+        <p:spPr>
+          <a:xfrm>
+            <a:off x="9253728" y="1197864"/>
+            <a:ext cx="2788920" cy="5394960"/>
+          </a:xfrm>
+          <a:prstGeom prst="rect">
+            <a:avLst/>
+          </a:prstGeom>
+          <a:solidFill>
+            <a:srgbClr val="CCCCCC"/>
+          </a:solidFill>
+          <a:ln>
+            <a:noFill/>
+          </a:ln>
+        </p:spPr>
+        <p:style>
+          <a:lnRef idx="1">
+            <a:schemeClr val="accent1"/>
+          </a:lnRef>
+          <a:fillRef idx="3">
+            <a:schemeClr val="accent1"/>
+          </a:fillRef>
+          <a:effectRef idx="2">
+            <a:schemeClr val="accent1"/>
+          </a:effectRef>
+          <a:fontRef idx="minor">
+            <a:schemeClr val="lt1"/>
+          </a:fontRef>
+        </p:style>
+        <p:txBody>
+          <a:bodyPr rtlCol="0" anchor="ctr"/>
+          <a:lstStyle/>
+          <a:p>
+            <a:pPr algn="ctr"/>
+          </a:p>
+        </p:txBody>
+      </p:sp>
+      <p:sp>
+        <p:nvSpPr>
+          <p:cNvPr id="64" name="Rectangle 63"/>
+          <p:cNvSpPr/>
+          <p:nvPr/>
+        </p:nvSpPr>
+        <p:spPr>
+          <a:xfrm>
+            <a:off x="9198864" y="1143000"/>
+            <a:ext cx="2788920" cy="5394960"/>
+          </a:xfrm>
+          <a:prstGeom prst="rect">
+            <a:avLst/>
+          </a:prstGeom>
+          <a:solidFill>
+            <a:srgbClr val="FFFFFF"/>
+          </a:solidFill>
+          <a:ln w="6350">
+            <a:solidFill>
+              <a:srgbClr val="E2E8F0"/>
+            </a:solidFill>
+          </a:ln>
+        </p:spPr>
+        <p:style>
+          <a:lnRef idx="1">
+            <a:schemeClr val="accent1"/>
+          </a:lnRef>
+          <a:fillRef idx="3">
+            <a:schemeClr val="accent1"/>
+          </a:fillRef>
+          <a:effectRef idx="2">
+            <a:schemeClr val="accent1"/>
+          </a:effectRef>
+          <a:fontRef idx="minor">
+            <a:schemeClr val="lt1"/>
+          </a:fontRef>
+        </p:style>
+        <p:txBody>
+          <a:bodyPr rtlCol="0" anchor="ctr"/>
+          <a:lstStyle/>
+          <a:p>
+            <a:pPr algn="ctr"/>
+          </a:p>
+        </p:txBody>
+      </p:sp>
+      <p:sp>
+        <p:nvSpPr>
+          <p:cNvPr id="65" name="Rectangle 64"/>
+          <p:cNvSpPr/>
+          <p:nvPr/>
+        </p:nvSpPr>
+        <p:spPr>
+          <a:xfrm>
+            <a:off x="9198864" y="1143000"/>
+            <a:ext cx="2788920" cy="1188720"/>
+          </a:xfrm>
+          <a:prstGeom prst="rect">
+            <a:avLst/>
+          </a:prstGeom>
+          <a:solidFill>
+            <a:srgbClr val="2D1B69"/>
+          </a:solidFill>
+          <a:ln>
+            <a:noFill/>
+          </a:ln>
+        </p:spPr>
+        <p:style>
+          <a:lnRef idx="1">
+            <a:schemeClr val="accent1"/>
+          </a:lnRef>
+          <a:fillRef idx="3">
+            <a:schemeClr val="accent1"/>
+          </a:fillRef>
+          <a:effectRef idx="2">
+            <a:schemeClr val="accent1"/>
+          </a:effectRef>
+          <a:fontRef idx="minor">
+            <a:schemeClr val="lt1"/>
+          </a:fontRef>
+        </p:style>
+        <p:txBody>
+          <a:bodyPr rtlCol="0" anchor="ctr"/>
+          <a:lstStyle/>
+          <a:p>
+            <a:pPr algn="ctr"/>
+          </a:p>
+        </p:txBody>
+      </p:sp>
+      <p:sp>
+        <p:nvSpPr>
+          <p:cNvPr id="66" name="TextBox 65"/>
+          <p:cNvSpPr txBox="1"/>
+          <p:nvPr/>
+        </p:nvSpPr>
+        <p:spPr>
+          <a:xfrm>
+            <a:off x="9198864" y="1234440"/>
+            <a:ext cx="2788920" cy="411480"/>
+          </a:xfrm>
+          <a:prstGeom prst="rect">
+            <a:avLst/>
+          </a:prstGeom>
+          <a:noFill/>
+        </p:spPr>
+        <p:txBody>
+          <a:bodyPr wrap="square">
+            <a:spAutoFit/>
+          </a:bodyPr>
+          <a:lstStyle/>
+          <a:p>
+            <a:pPr algn="ctr"/>
+            <a:r>
+              <a:rPr sz="1800" b="0" i="0">
+                <a:solidFill>
+                  <a:srgbClr val="FFFFFF"/>
+                </a:solidFill>
+              </a:rPr>
+              <a:t>🌐</a:t>
+            </a:r>
+          </a:p>
+        </p:txBody>
+      </p:sp>
+      <p:sp>
+        <p:nvSpPr>
+          <p:cNvPr id="67" name="TextBox 66"/>
+          <p:cNvSpPr txBox="1"/>
+          <p:nvPr/>
+        </p:nvSpPr>
+        <p:spPr>
+          <a:xfrm>
+            <a:off x="9198864" y="1618488"/>
+            <a:ext cx="2788920" cy="365760"/>
+          </a:xfrm>
+          <a:prstGeom prst="rect">
+            <a:avLst/>
+          </a:prstGeom>
+          <a:noFill/>
+        </p:spPr>
+        <p:txBody>
+          <a:bodyPr wrap="square">
+            <a:spAutoFit/>
+          </a:bodyPr>
+          <a:lstStyle/>
+          <a:p>
+            <a:pPr algn="ctr"/>
+            <a:r>
+              <a:rPr sz="1400" b="1" i="0">
+                <a:solidFill>
+                  <a:srgbClr val="FFFFFF"/>
+                </a:solidFill>
+              </a:rPr>
+              <a:t>Enterprise+</a:t>
+            </a:r>
+          </a:p>
+        </p:txBody>
+      </p:sp>
+      <p:sp>
+        <p:nvSpPr>
+          <p:cNvPr id="68" name="TextBox 67"/>
+          <p:cNvSpPr txBox="1"/>
+          <p:nvPr/>
+        </p:nvSpPr>
+        <p:spPr>
+          <a:xfrm>
+            <a:off x="9198864" y="1965960"/>
+            <a:ext cx="2788920" cy="274320"/>
+          </a:xfrm>
+          <a:prstGeom prst="rect">
+            <a:avLst/>
+          </a:prstGeom>
+          <a:noFill/>
+        </p:spPr>
+        <p:txBody>
+          <a:bodyPr wrap="square">
+            <a:spAutoFit/>
+          </a:bodyPr>
+          <a:lstStyle/>
+          <a:p>
+            <a:pPr algn="ctr"/>
+            <a:r>
+              <a:rPr sz="850" b="0" i="0">
+                <a:solidFill>
+                  <a:srgbClr val="CCDDFF"/>
+                </a:solidFill>
+              </a:rPr>
+              <a:t>Unlimited Users</a:t>
+            </a:r>
+          </a:p>
+        </p:txBody>
+      </p:sp>
+      <p:sp>
+        <p:nvSpPr>
+          <p:cNvPr id="69" name="Rectangle 68"/>
+          <p:cNvSpPr/>
+          <p:nvPr/>
+        </p:nvSpPr>
+        <p:spPr>
+          <a:xfrm>
+            <a:off x="9198864" y="2331720"/>
+            <a:ext cx="2788920" cy="502920"/>
+          </a:xfrm>
+          <a:prstGeom prst="rect">
+            <a:avLst/>
+          </a:prstGeom>
+          <a:solidFill>
+            <a:srgbClr val="F5F7FA"/>
+          </a:solidFill>
+          <a:ln>
+            <a:noFill/>
+          </a:ln>
+        </p:spPr>
+        <p:style>
+          <a:lnRef idx="1">
+            <a:schemeClr val="accent1"/>
+          </a:lnRef>
+          <a:fillRef idx="3">
+            <a:schemeClr val="accent1"/>
+          </a:fillRef>
+          <a:effectRef idx="2">
+            <a:schemeClr val="accent1"/>
+          </a:effectRef>
+          <a:fontRef idx="minor">
+            <a:schemeClr val="lt1"/>
+          </a:fontRef>
+        </p:style>
+        <p:txBody>
+          <a:bodyPr rtlCol="0" anchor="ctr"/>
+          <a:lstStyle/>
+          <a:p>
+            <a:pPr algn="ctr"/>
+          </a:p>
+        </p:txBody>
+      </p:sp>
+      <p:sp>
+        <p:nvSpPr>
+          <p:cNvPr id="70" name="TextBox 69"/>
+          <p:cNvSpPr txBox="1"/>
+          <p:nvPr/>
+        </p:nvSpPr>
+        <p:spPr>
+          <a:xfrm>
+            <a:off x="9290304" y="2350008"/>
+            <a:ext cx="2606039" cy="228600"/>
+          </a:xfrm>
+          <a:prstGeom prst="rect">
+            <a:avLst/>
+          </a:prstGeom>
+          <a:noFill/>
+        </p:spPr>
+        <p:txBody>
+          <a:bodyPr wrap="square">
+            <a:spAutoFit/>
+          </a:bodyPr>
+          <a:lstStyle/>
+          <a:p>
+            <a:pPr algn="l"/>
+            <a:r>
+              <a:rPr sz="750" b="0" i="0">
+                <a:solidFill>
+                  <a:srgbClr val="888888"/>
+                </a:solidFill>
+              </a:rPr>
+              <a:t>Implementation &amp; Onboarding</a:t>
+            </a:r>
+          </a:p>
+        </p:txBody>
+      </p:sp>
+      <p:sp>
+        <p:nvSpPr>
+          <p:cNvPr id="71" name="TextBox 70"/>
+          <p:cNvSpPr txBox="1"/>
+          <p:nvPr/>
+        </p:nvSpPr>
+        <p:spPr>
+          <a:xfrm>
+            <a:off x="9290304" y="2560320"/>
+            <a:ext cx="2606039" cy="228600"/>
+          </a:xfrm>
+          <a:prstGeom prst="rect">
+            <a:avLst/>
+          </a:prstGeom>
+          <a:noFill/>
+        </p:spPr>
+        <p:txBody>
+          <a:bodyPr wrap="square">
+            <a:spAutoFit/>
+          </a:bodyPr>
+          <a:lstStyle/>
+          <a:p>
+            <a:pPr algn="l"/>
+            <a:r>
+              <a:rPr sz="1100" b="1" i="0">
+                <a:solidFill>
+                  <a:srgbClr val="0F3460"/>
+                </a:solidFill>
+              </a:rPr>
+              <a:t>Custom Quote</a:t>
+            </a:r>
+          </a:p>
+        </p:txBody>
+      </p:sp>
+      <p:sp>
+        <p:nvSpPr>
+          <p:cNvPr id="72" name="Rectangle 71"/>
+          <p:cNvSpPr/>
+          <p:nvPr/>
+        </p:nvSpPr>
+        <p:spPr>
+          <a:xfrm>
+            <a:off x="9198864" y="2834640"/>
+            <a:ext cx="2788920" cy="640080"/>
+          </a:xfrm>
+          <a:prstGeom prst="rect">
+            <a:avLst/>
+          </a:prstGeom>
+          <a:solidFill>
+            <a:srgbClr val="2D1B69"/>
+          </a:solidFill>
+          <a:ln>
+            <a:noFill/>
+          </a:ln>
+        </p:spPr>
+        <p:style>
+          <a:lnRef idx="1">
+            <a:schemeClr val="accent1"/>
+          </a:lnRef>
+          <a:fillRef idx="3">
+            <a:schemeClr val="accent1"/>
+          </a:fillRef>
+          <a:effectRef idx="2">
+            <a:schemeClr val="accent1"/>
+          </a:effectRef>
+          <a:fontRef idx="minor">
+            <a:schemeClr val="lt1"/>
+          </a:fontRef>
+        </p:style>
+        <p:txBody>
+          <a:bodyPr rtlCol="0" anchor="ctr"/>
+          <a:lstStyle/>
+          <a:p>
+            <a:pPr algn="ctr"/>
+          </a:p>
+        </p:txBody>
+      </p:sp>
+      <p:sp>
+        <p:nvSpPr>
+          <p:cNvPr id="73" name="TextBox 72"/>
+          <p:cNvSpPr txBox="1"/>
+          <p:nvPr/>
+        </p:nvSpPr>
+        <p:spPr>
+          <a:xfrm>
+            <a:off x="9198864" y="2880360"/>
+            <a:ext cx="2788920" cy="347472"/>
+          </a:xfrm>
+          <a:prstGeom prst="rect">
+            <a:avLst/>
+          </a:prstGeom>
+          <a:noFill/>
+        </p:spPr>
+        <p:txBody>
+          <a:bodyPr wrap="square">
+            <a:spAutoFit/>
+          </a:bodyPr>
+          <a:lstStyle/>
+          <a:p>
+            <a:pPr algn="ctr"/>
+            <a:r>
+              <a:rPr sz="1600" b="1" i="0">
+                <a:solidFill>
+                  <a:srgbClr val="FFFFFF"/>
+                </a:solidFill>
+              </a:rPr>
+              <a:t>Custom Quote</a:t>
+            </a:r>
+          </a:p>
+        </p:txBody>
+      </p:sp>
+      <p:sp>
+        <p:nvSpPr>
+          <p:cNvPr id="74" name="TextBox 73"/>
+          <p:cNvSpPr txBox="1"/>
+          <p:nvPr/>
+        </p:nvSpPr>
+        <p:spPr>
+          <a:xfrm>
+            <a:off x="9198864" y="3227832"/>
+            <a:ext cx="2788920" cy="201168"/>
+          </a:xfrm>
+          <a:prstGeom prst="rect">
+            <a:avLst/>
+          </a:prstGeom>
+          <a:noFill/>
+        </p:spPr>
+        <p:txBody>
+          <a:bodyPr wrap="square">
+            <a:spAutoFit/>
+          </a:bodyPr>
+          <a:lstStyle/>
+          <a:p>
+            <a:pPr algn="ctr"/>
+            <a:r>
+              <a:rPr sz="750" b="0" i="0">
+                <a:solidFill>
+                  <a:srgbClr val="CCDDFF"/>
+                </a:solidFill>
+              </a:rPr>
+              <a:t>Monthly Subscription</a:t>
+            </a:r>
+          </a:p>
+        </p:txBody>
+      </p:sp>
+      <p:sp>
+        <p:nvSpPr>
+          <p:cNvPr id="75" name="TextBox 74"/>
+          <p:cNvSpPr txBox="1"/>
+          <p:nvPr/>
+        </p:nvSpPr>
+        <p:spPr>
+          <a:xfrm>
+            <a:off x="9336024" y="3611880"/>
+            <a:ext cx="2560320" cy="347472"/>
+          </a:xfrm>
+          <a:prstGeom prst="rect">
+            <a:avLst/>
+          </a:prstGeom>
+          <a:noFill/>
+        </p:spPr>
+        <p:txBody>
+          <a:bodyPr wrap="square">
+            <a:spAutoFit/>
+          </a:bodyPr>
+          <a:lstStyle/>
+          <a:p>
+            <a:pPr algn="l"/>
+            <a:r>
+              <a:rPr sz="900" b="0" i="0">
+                <a:solidFill>
+                  <a:srgbClr val="333333"/>
+                </a:solidFill>
+              </a:rPr>
+              <a:t>✓  Everything in Enterprise</a:t>
+            </a:r>
+          </a:p>
+        </p:txBody>
+      </p:sp>
+      <p:sp>
+        <p:nvSpPr>
+          <p:cNvPr id="76" name="TextBox 75"/>
+          <p:cNvSpPr txBox="1"/>
+          <p:nvPr/>
+        </p:nvSpPr>
+        <p:spPr>
+          <a:xfrm>
+            <a:off x="9336024" y="3995928"/>
+            <a:ext cx="2560320" cy="347472"/>
+          </a:xfrm>
+          <a:prstGeom prst="rect">
+            <a:avLst/>
+          </a:prstGeom>
+          <a:noFill/>
+        </p:spPr>
+        <p:txBody>
+          <a:bodyPr wrap="square">
+            <a:spAutoFit/>
+          </a:bodyPr>
+          <a:lstStyle/>
+          <a:p>
+            <a:pPr algn="l"/>
+            <a:r>
+              <a:rPr sz="900" b="0" i="0">
+                <a:solidFill>
+                  <a:srgbClr val="333333"/>
+                </a:solidFill>
+              </a:rPr>
+              <a:t>✓  White-label Option</a:t>
+            </a:r>
+          </a:p>
+        </p:txBody>
+      </p:sp>
+      <p:sp>
+        <p:nvSpPr>
+          <p:cNvPr id="77" name="TextBox 76"/>
+          <p:cNvSpPr txBox="1"/>
+          <p:nvPr/>
+        </p:nvSpPr>
+        <p:spPr>
+          <a:xfrm>
+            <a:off x="9336024" y="4379976"/>
+            <a:ext cx="2560320" cy="347472"/>
+          </a:xfrm>
+          <a:prstGeom prst="rect">
+            <a:avLst/>
+          </a:prstGeom>
+          <a:noFill/>
+        </p:spPr>
+        <p:txBody>
+          <a:bodyPr wrap="square">
+            <a:spAutoFit/>
+          </a:bodyPr>
+          <a:lstStyle/>
+          <a:p>
+            <a:pPr algn="l"/>
+            <a:r>
+              <a:rPr sz="900" b="0" i="0">
+                <a:solidFill>
+                  <a:srgbClr val="333333"/>
+                </a:solidFill>
+              </a:rPr>
+              <a:t>✓  Source Code License</a:t>
+            </a:r>
+          </a:p>
+        </p:txBody>
+      </p:sp>
+      <p:sp>
+        <p:nvSpPr>
+          <p:cNvPr id="78" name="TextBox 77"/>
+          <p:cNvSpPr txBox="1"/>
+          <p:nvPr/>
+        </p:nvSpPr>
+        <p:spPr>
+          <a:xfrm>
+            <a:off x="9336024" y="4764024"/>
+            <a:ext cx="2560320" cy="347472"/>
+          </a:xfrm>
+          <a:prstGeom prst="rect">
+            <a:avLst/>
+          </a:prstGeom>
+          <a:noFill/>
+        </p:spPr>
+        <p:txBody>
+          <a:bodyPr wrap="square">
+            <a:spAutoFit/>
+          </a:bodyPr>
+          <a:lstStyle/>
+          <a:p>
+            <a:pPr algn="l"/>
+            <a:r>
+              <a:rPr sz="900" b="0" i="0">
+                <a:solidFill>
+                  <a:srgbClr val="333333"/>
+                </a:solidFill>
+              </a:rPr>
+              <a:t>✓  Custom Uncertainty Models</a:t>
+            </a:r>
+          </a:p>
+        </p:txBody>
+      </p:sp>
+      <p:sp>
+        <p:nvSpPr>
+          <p:cNvPr id="79" name="TextBox 78"/>
+          <p:cNvSpPr txBox="1"/>
+          <p:nvPr/>
+        </p:nvSpPr>
+        <p:spPr>
+          <a:xfrm>
+            <a:off x="9336024" y="5148072"/>
+            <a:ext cx="2560320" cy="347472"/>
+          </a:xfrm>
+          <a:prstGeom prst="rect">
+            <a:avLst/>
+          </a:prstGeom>
+          <a:noFill/>
+        </p:spPr>
+        <p:txBody>
+          <a:bodyPr wrap="square">
+            <a:spAutoFit/>
+          </a:bodyPr>
+          <a:lstStyle/>
+          <a:p>
+            <a:pPr algn="l"/>
+            <a:r>
+              <a:rPr sz="900" b="0" i="0">
+                <a:solidFill>
+                  <a:srgbClr val="333333"/>
+                </a:solidFill>
+              </a:rPr>
+              <a:t>✓  Multi-lab Group Mgmt</a:t>
+            </a:r>
+          </a:p>
+        </p:txBody>
+      </p:sp>
+      <p:sp>
+        <p:nvSpPr>
+          <p:cNvPr id="80" name="TextBox 79"/>
+          <p:cNvSpPr txBox="1"/>
+          <p:nvPr/>
+        </p:nvSpPr>
+        <p:spPr>
+          <a:xfrm>
+            <a:off x="9336024" y="5532120"/>
+            <a:ext cx="2560320" cy="347472"/>
+          </a:xfrm>
+          <a:prstGeom prst="rect">
+            <a:avLst/>
+          </a:prstGeom>
+          <a:noFill/>
+        </p:spPr>
+        <p:txBody>
+          <a:bodyPr wrap="square">
+            <a:spAutoFit/>
+          </a:bodyPr>
+          <a:lstStyle/>
+          <a:p>
+            <a:pPr algn="l"/>
+            <a:r>
+              <a:rPr sz="900" b="0" i="0">
+                <a:solidFill>
+                  <a:srgbClr val="333333"/>
+                </a:solidFill>
+              </a:rPr>
+              <a:t>✓  24×7 Dedicated Support</a:t>
+            </a:r>
+          </a:p>
+        </p:txBody>
+      </p:sp>
+      <p:sp>
+        <p:nvSpPr>
+          <p:cNvPr id="81" name="TextBox 80"/>
+          <p:cNvSpPr txBox="1"/>
+          <p:nvPr/>
+        </p:nvSpPr>
+        <p:spPr>
+          <a:xfrm>
+            <a:off x="9336024" y="5916168"/>
+            <a:ext cx="2560320" cy="347472"/>
+          </a:xfrm>
+          <a:prstGeom prst="rect">
+            <a:avLst/>
+          </a:prstGeom>
+          <a:noFill/>
+        </p:spPr>
+        <p:txBody>
+          <a:bodyPr wrap="square">
+            <a:spAutoFit/>
+          </a:bodyPr>
+          <a:lstStyle/>
+          <a:p>
+            <a:pPr algn="l"/>
+            <a:r>
+              <a:rPr sz="900" b="0" i="0">
+                <a:solidFill>
+                  <a:srgbClr val="333333"/>
+                </a:solidFill>
+              </a:rPr>
+              <a:t>✓  Quarterly Business Review</a:t>
+            </a:r>
+          </a:p>
+        </p:txBody>
+      </p:sp>
+      <p:sp>
+        <p:nvSpPr>
+          <p:cNvPr id="82" name="TextBox 81"/>
+          <p:cNvSpPr txBox="1"/>
+          <p:nvPr/>
+        </p:nvSpPr>
+        <p:spPr>
+          <a:xfrm>
+            <a:off x="228600" y="6492240"/>
+            <a:ext cx="11704320" cy="320040"/>
+          </a:xfrm>
+          <a:prstGeom prst="rect">
+            <a:avLst/>
+          </a:prstGeom>
+          <a:noFill/>
+        </p:spPr>
+        <p:txBody>
+          <a:bodyPr wrap="square">
+            <a:spAutoFit/>
+          </a:bodyPr>
+          <a:lstStyle/>
+          <a:p>
+            <a:pPr algn="l"/>
+            <a:r>
+              <a:rPr sz="850" b="0" i="1">
+                <a:solidFill>
+                  <a:srgbClr val="888888"/>
+                </a:solidFill>
+              </a:rPr>
+              <a:t>* All plans include: Free Setup, Data Migration Assistance, User Training, 30-day free trial period, and 1-year bug-fix warranty.</a:t>
+            </a:r>
+          </a:p>
+        </p:txBody>
+      </p:sp>
+    </p:spTree>
+  </p:cSld>
+  <p:clrMapOvr>
+    <a:masterClrMapping/>
+  </p:clrMapOvr>
+</p:sld>
+</file>
+
+<file path=ppt/slides/slide11.xml><?xml version="1.0" encoding="utf-8"?>
 <p:sld xmlns:a="http://schemas.openxmlformats.org/drawingml/2006/main" xmlns:p="http://schemas.openxmlformats.org/presentationml/2006/main" xmlns:r="http://schemas.openxmlformats.org/officeDocument/2006/relationships">
   <p:cSld>
     <p:bg>
@@ -11442,7 +14429,7 @@
                   <a:srgbClr val="333333"/>
                 </a:solidFill>
               </a:rPr>
-              <a:t>Custom AI Features</a:t>
+              <a:t>Custom Uncertainty Models</a:t>
             </a:r>
           </a:p>
         </p:txBody>
@@ -11771,7 +14758,7 @@
 </p:sld>
 </file>
 
-<file path=ppt/slides/slide11.xml><?xml version="1.0" encoding="utf-8"?>
+<file path=ppt/slides/slide12.xml><?xml version="1.0" encoding="utf-8"?>
 <p:sld xmlns:a="http://schemas.openxmlformats.org/drawingml/2006/main" xmlns:p="http://schemas.openxmlformats.org/presentationml/2006/main" xmlns:r="http://schemas.openxmlformats.org/officeDocument/2006/relationships">
   <p:cSld>
     <p:bg>
@@ -13190,7 +16177,7 @@
 </p:sld>
 </file>
 
-<file path=ppt/slides/slide12.xml><?xml version="1.0" encoding="utf-8"?>
+<file path=ppt/slides/slide13.xml><?xml version="1.0" encoding="utf-8"?>
 <p:sld xmlns:a="http://schemas.openxmlformats.org/drawingml/2006/main" xmlns:p="http://schemas.openxmlformats.org/presentationml/2006/main" xmlns:r="http://schemas.openxmlformats.org/officeDocument/2006/relationships">
   <p:cSld>
     <p:bg>
@@ -14356,7 +17343,7 @@
                   <a:srgbClr val="FFCCCC"/>
                 </a:solidFill>
               </a:rPr>
-              <a:t>Cortex AI Technologies Pvt. Ltd.  ·  Making Calibration Labs Smarter, Faster, Compliant</a:t>
+              <a:t>Cortex Technologies Pvt. Ltd.  ·  Making Calibration Labs Smarter, Faster, Compliant</a:t>
             </a:r>
           </a:p>
         </p:txBody>
@@ -14649,7 +17636,7 @@
                   <a:srgbClr val="0F3460"/>
                 </a:solidFill>
               </a:rPr>
-              <a:t>About Cortex AI Technologies</a:t>
+              <a:t>About Cortex Technologies</a:t>
             </a:r>
           </a:p>
         </p:txBody>
@@ -15219,7 +18206,7 @@
                   <a:srgbClr val="0F3460"/>
                 </a:solidFill>
               </a:rPr>
-              <a:t>Key Benefits &amp; ROI</a:t>
+              <a:t>Uncertainty Calculations</a:t>
             </a:r>
           </a:p>
         </p:txBody>
@@ -15253,7 +18240,7 @@
                   <a:srgbClr val="888888"/>
                 </a:solidFill>
               </a:rPr>
-              <a:t>How CLMS transforms your operations</a:t>
+              <a:t>Built-in GUM-compliant uncertainty engine</a:t>
             </a:r>
           </a:p>
         </p:txBody>
@@ -15409,7 +18396,7 @@
                   <a:srgbClr val="0F3460"/>
                 </a:solidFill>
               </a:rPr>
-              <a:t>Performance Analytics</a:t>
+              <a:t>Key Benefits &amp; ROI</a:t>
             </a:r>
           </a:p>
         </p:txBody>
@@ -15443,7 +18430,7 @@
                   <a:srgbClr val="888888"/>
                 </a:solidFill>
               </a:rPr>
-              <a:t>Charts &amp; data from real lab deployments</a:t>
+              <a:t>How CLMS transforms your operations</a:t>
             </a:r>
           </a:p>
         </p:txBody>
@@ -15599,7 +18586,7 @@
                   <a:srgbClr val="0F3460"/>
                 </a:solidFill>
               </a:rPr>
-              <a:t>Pricing Plans</a:t>
+              <a:t>Performance Analytics</a:t>
             </a:r>
           </a:p>
         </p:txBody>
@@ -15633,7 +18620,7 @@
                   <a:srgbClr val="888888"/>
                 </a:solidFill>
               </a:rPr>
-              <a:t>Flexible plans for every lab size</a:t>
+              <a:t>Charts &amp; data from real lab deployments</a:t>
             </a:r>
           </a:p>
         </p:txBody>
@@ -15789,7 +18776,7 @@
                   <a:srgbClr val="0F3460"/>
                 </a:solidFill>
               </a:rPr>
-              <a:t>Next Steps</a:t>
+              <a:t>Pricing Plans</a:t>
             </a:r>
           </a:p>
         </p:txBody>
@@ -15804,6 +18791,196 @@
           <a:xfrm>
             <a:off x="960120" y="5394960"/>
             <a:ext cx="2834640" cy="411480"/>
+          </a:xfrm>
+          <a:prstGeom prst="rect">
+            <a:avLst/>
+          </a:prstGeom>
+          <a:noFill/>
+        </p:spPr>
+        <p:txBody>
+          <a:bodyPr wrap="square">
+            <a:spAutoFit/>
+          </a:bodyPr>
+          <a:lstStyle/>
+          <a:p>
+            <a:pPr algn="l"/>
+            <a:r>
+              <a:rPr sz="1000" b="0" i="0">
+                <a:solidFill>
+                  <a:srgbClr val="888888"/>
+                </a:solidFill>
+              </a:rPr>
+              <a:t>Flexible plans for every lab size</a:t>
+            </a:r>
+          </a:p>
+        </p:txBody>
+      </p:sp>
+      <p:sp>
+        <p:nvSpPr>
+          <p:cNvPr id="40" name="Rectangle 39"/>
+          <p:cNvSpPr/>
+          <p:nvPr/>
+        </p:nvSpPr>
+        <p:spPr>
+          <a:xfrm>
+            <a:off x="6126480" y="4892040"/>
+            <a:ext cx="5760720" cy="1005840"/>
+          </a:xfrm>
+          <a:prstGeom prst="rect">
+            <a:avLst/>
+          </a:prstGeom>
+          <a:solidFill>
+            <a:srgbClr val="FFFFFF"/>
+          </a:solidFill>
+          <a:ln w="6350">
+            <a:solidFill>
+              <a:srgbClr val="E2E8F0"/>
+            </a:solidFill>
+          </a:ln>
+        </p:spPr>
+        <p:style>
+          <a:lnRef idx="1">
+            <a:schemeClr val="accent1"/>
+          </a:lnRef>
+          <a:fillRef idx="3">
+            <a:schemeClr val="accent1"/>
+          </a:fillRef>
+          <a:effectRef idx="2">
+            <a:schemeClr val="accent1"/>
+          </a:effectRef>
+          <a:fontRef idx="minor">
+            <a:schemeClr val="lt1"/>
+          </a:fontRef>
+        </p:style>
+        <p:txBody>
+          <a:bodyPr rtlCol="0" anchor="ctr"/>
+          <a:lstStyle/>
+          <a:p>
+            <a:pPr algn="ctr"/>
+          </a:p>
+        </p:txBody>
+      </p:sp>
+      <p:sp>
+        <p:nvSpPr>
+          <p:cNvPr id="41" name="Rectangle 40"/>
+          <p:cNvSpPr/>
+          <p:nvPr/>
+        </p:nvSpPr>
+        <p:spPr>
+          <a:xfrm>
+            <a:off x="6126480" y="4892040"/>
+            <a:ext cx="73152" cy="1005840"/>
+          </a:xfrm>
+          <a:prstGeom prst="rect">
+            <a:avLst/>
+          </a:prstGeom>
+          <a:solidFill>
+            <a:srgbClr val="E94560"/>
+          </a:solidFill>
+          <a:ln>
+            <a:noFill/>
+          </a:ln>
+        </p:spPr>
+        <p:style>
+          <a:lnRef idx="1">
+            <a:schemeClr val="accent1"/>
+          </a:lnRef>
+          <a:fillRef idx="3">
+            <a:schemeClr val="accent1"/>
+          </a:fillRef>
+          <a:effectRef idx="2">
+            <a:schemeClr val="accent1"/>
+          </a:effectRef>
+          <a:fontRef idx="minor">
+            <a:schemeClr val="lt1"/>
+          </a:fontRef>
+        </p:style>
+        <p:txBody>
+          <a:bodyPr rtlCol="0" anchor="ctr"/>
+          <a:lstStyle/>
+          <a:p>
+            <a:pPr algn="ctr"/>
+          </a:p>
+        </p:txBody>
+      </p:sp>
+      <p:sp>
+        <p:nvSpPr>
+          <p:cNvPr id="42" name="TextBox 41"/>
+          <p:cNvSpPr txBox="1"/>
+          <p:nvPr/>
+        </p:nvSpPr>
+        <p:spPr>
+          <a:xfrm>
+            <a:off x="6263640" y="4965192"/>
+            <a:ext cx="640080" cy="502920"/>
+          </a:xfrm>
+          <a:prstGeom prst="rect">
+            <a:avLst/>
+          </a:prstGeom>
+          <a:noFill/>
+        </p:spPr>
+        <p:txBody>
+          <a:bodyPr wrap="square">
+            <a:spAutoFit/>
+          </a:bodyPr>
+          <a:lstStyle/>
+          <a:p>
+            <a:pPr algn="l"/>
+            <a:r>
+              <a:rPr sz="2200" b="1" i="0">
+                <a:solidFill>
+                  <a:srgbClr val="E94560"/>
+                </a:solidFill>
+              </a:rPr>
+              <a:t>08</a:t>
+            </a:r>
+          </a:p>
+        </p:txBody>
+      </p:sp>
+      <p:sp>
+        <p:nvSpPr>
+          <p:cNvPr id="43" name="TextBox 42"/>
+          <p:cNvSpPr txBox="1"/>
+          <p:nvPr/>
+        </p:nvSpPr>
+        <p:spPr>
+          <a:xfrm>
+            <a:off x="6812280" y="4965192"/>
+            <a:ext cx="4937759" cy="411480"/>
+          </a:xfrm>
+          <a:prstGeom prst="rect">
+            <a:avLst/>
+          </a:prstGeom>
+          <a:noFill/>
+        </p:spPr>
+        <p:txBody>
+          <a:bodyPr wrap="square">
+            <a:spAutoFit/>
+          </a:bodyPr>
+          <a:lstStyle/>
+          <a:p>
+            <a:pPr algn="l"/>
+            <a:r>
+              <a:rPr sz="1300" b="1" i="0">
+                <a:solidFill>
+                  <a:srgbClr val="0F3460"/>
+                </a:solidFill>
+              </a:rPr>
+              <a:t>Next Steps</a:t>
+            </a:r>
+          </a:p>
+        </p:txBody>
+      </p:sp>
+      <p:sp>
+        <p:nvSpPr>
+          <p:cNvPr id="44" name="TextBox 43"/>
+          <p:cNvSpPr txBox="1"/>
+          <p:nvPr/>
+        </p:nvSpPr>
+        <p:spPr>
+          <a:xfrm>
+            <a:off x="6812280" y="5394960"/>
+            <a:ext cx="4937759" cy="411480"/>
           </a:xfrm>
           <a:prstGeom prst="rect">
             <a:avLst/>
@@ -15969,7 +19146,7 @@
                   <a:srgbClr val="FFFFFF"/>
                 </a:solidFill>
               </a:rPr>
-              <a:t>About Cortex AI Technologies</a:t>
+              <a:t>About Cortex Technologies</a:t>
             </a:r>
           </a:p>
         </p:txBody>
@@ -16003,7 +19180,7 @@
                   <a:srgbClr val="B0C4DE"/>
                 </a:solidFill>
               </a:rPr>
-              <a:t>Powering the next generation of laboratory intelligence</a:t>
+              <a:t>Powering the next generation of calibration laboratory management</a:t>
             </a:r>
           </a:p>
         </p:txBody>
@@ -16116,7 +19293,7 @@
                   <a:srgbClr val="333333"/>
                 </a:solidFill>
               </a:rPr>
-              <a:t>To digitize and automate calibration laboratory operations across India and beyond — delivering AI-powered tools that save time, ensure compliance, and grow revenue.</a:t>
+              <a:t>To digitize and automate calibration laboratory operations across India and beyond — delivering purpose-built software that saves time, ensures NABL compliance, and grows lab revenue.</a:t>
             </a:r>
           </a:p>
         </p:txBody>
@@ -16229,7 +19406,7 @@
                   <a:srgbClr val="333333"/>
                 </a:solidFill>
               </a:rPr>
-              <a:t>To become the #1 LIMS/CLMS platform for accredited calibration labs in South Asia by 2028 — with a suite of intelligent, cloud-native products that set the industry benchmark.</a:t>
+              <a:t>To become the #1 CLMS platform for accredited calibration labs in South Asia by 2028 — with a suite of cloud-native products that set the industry benchmark for quality and compliance.</a:t>
             </a:r>
           </a:p>
         </p:txBody>
@@ -16351,7 +19528,7 @@
                   <a:srgbClr val="FFFFFF"/>
                 </a:solidFill>
               </a:rPr>
-              <a:t>🤖</a:t>
+              <a:t>🔬</a:t>
             </a:r>
           </a:p>
         </p:txBody>
@@ -16385,7 +19562,7 @@
                   <a:srgbClr val="0F3460"/>
                 </a:solidFill>
               </a:rPr>
-              <a:t>AI-First</a:t>
+              <a:t>Calibration-First</a:t>
             </a:r>
           </a:p>
         </p:txBody>
@@ -16419,7 +19596,7 @@
                   <a:srgbClr val="888888"/>
                 </a:solidFill>
               </a:rPr>
-              <a:t>Machine learning at every layer</a:t>
+              <a:t>Built specifically for calibration labs</a:t>
             </a:r>
           </a:p>
         </p:txBody>
@@ -17650,7 +20827,7 @@
                   <a:srgbClr val="F5A623"/>
                 </a:solidFill>
               </a:rPr>
-              <a:t>4.9★</a:t>
+              <a:t>NABL</a:t>
             </a:r>
           </a:p>
         </p:txBody>
@@ -17684,7 +20861,7 @@
                   <a:srgbClr val="B0C4DE"/>
                 </a:solidFill>
               </a:rPr>
-              <a:t>Avg. User Rating</a:t>
+              <a:t>Accreditation Ready</a:t>
             </a:r>
           </a:p>
         </p:txBody>
@@ -22499,14 +25676,57 @@
       </p:sp>
       <p:sp>
         <p:nvSpPr>
-          <p:cNvPr id="3" name="TextBox 2"/>
+          <p:cNvPr id="3" name="Rectangle 2"/>
+          <p:cNvSpPr/>
+          <p:nvPr/>
+        </p:nvSpPr>
+        <p:spPr>
+          <a:xfrm>
+            <a:off x="0" y="1051560"/>
+            <a:ext cx="109728" cy="5806440"/>
+          </a:xfrm>
+          <a:prstGeom prst="rect">
+            <a:avLst/>
+          </a:prstGeom>
+          <a:solidFill>
+            <a:srgbClr val="E94560"/>
+          </a:solidFill>
+          <a:ln>
+            <a:noFill/>
+          </a:ln>
+        </p:spPr>
+        <p:style>
+          <a:lnRef idx="1">
+            <a:schemeClr val="accent1"/>
+          </a:lnRef>
+          <a:fillRef idx="3">
+            <a:schemeClr val="accent1"/>
+          </a:fillRef>
+          <a:effectRef idx="2">
+            <a:schemeClr val="accent1"/>
+          </a:effectRef>
+          <a:fontRef idx="minor">
+            <a:schemeClr val="lt1"/>
+          </a:fontRef>
+        </p:style>
+        <p:txBody>
+          <a:bodyPr rtlCol="0" anchor="ctr"/>
+          <a:lstStyle/>
+          <a:p>
+            <a:pPr algn="ctr"/>
+          </a:p>
+        </p:txBody>
+      </p:sp>
+      <p:sp>
+        <p:nvSpPr>
+          <p:cNvPr id="4" name="TextBox 3"/>
           <p:cNvSpPr txBox="1"/>
           <p:nvPr/>
         </p:nvSpPr>
         <p:spPr>
           <a:xfrm>
             <a:off x="365760" y="137160"/>
-            <a:ext cx="9144000" cy="685800"/>
+            <a:ext cx="10058400" cy="685800"/>
           </a:xfrm>
           <a:prstGeom prst="rect">
             <a:avLst/>
@@ -22526,21 +25746,21 @@
                   <a:srgbClr val="FFFFFF"/>
                 </a:solidFill>
               </a:rPr>
-              <a:t>Key Benefits of CortexCLMS</a:t>
-            </a:r>
-          </a:p>
-        </p:txBody>
-      </p:sp>
-      <p:sp>
-        <p:nvSpPr>
-          <p:cNvPr id="4" name="TextBox 3"/>
+              <a:t>Built-In Uncertainty Calculations</a:t>
+            </a:r>
+          </a:p>
+        </p:txBody>
+      </p:sp>
+      <p:sp>
+        <p:nvSpPr>
+          <p:cNvPr id="5" name="TextBox 4"/>
           <p:cNvSpPr txBox="1"/>
           <p:nvPr/>
         </p:nvSpPr>
         <p:spPr>
           <a:xfrm>
             <a:off x="365760" y="594360"/>
-            <a:ext cx="7315200" cy="411480"/>
+            <a:ext cx="10972800" cy="411480"/>
           </a:xfrm>
           <a:prstGeom prst="rect">
             <a:avLst/>
@@ -22560,21 +25780,324 @@
                   <a:srgbClr val="B0C4DE"/>
                 </a:solidFill>
               </a:rPr>
-              <a:t>Measurable impact from day one</a:t>
-            </a:r>
-          </a:p>
-        </p:txBody>
-      </p:sp>
-      <p:sp>
-        <p:nvSpPr>
-          <p:cNvPr id="5" name="Rectangle 4"/>
+              <a:t>GUM-compliant measurement uncertainty engine built directly into datasheets and certificates</a:t>
+            </a:r>
+          </a:p>
+        </p:txBody>
+      </p:sp>
+      <p:sp>
+        <p:nvSpPr>
+          <p:cNvPr id="6" name="Rectangle 5"/>
           <p:cNvSpPr/>
           <p:nvPr/>
         </p:nvSpPr>
         <p:spPr>
           <a:xfrm>
             <a:off x="274320" y="1188720"/>
-            <a:ext cx="3749039" cy="2423160"/>
+            <a:ext cx="5394960" cy="1874519"/>
+          </a:xfrm>
+          <a:prstGeom prst="rect">
+            <a:avLst/>
+          </a:prstGeom>
+          <a:solidFill>
+            <a:srgbClr val="F5F7FA"/>
+          </a:solidFill>
+          <a:ln w="6350">
+            <a:solidFill>
+              <a:srgbClr val="E2E8F0"/>
+            </a:solidFill>
+          </a:ln>
+        </p:spPr>
+        <p:style>
+          <a:lnRef idx="1">
+            <a:schemeClr val="accent1"/>
+          </a:lnRef>
+          <a:fillRef idx="3">
+            <a:schemeClr val="accent1"/>
+          </a:fillRef>
+          <a:effectRef idx="2">
+            <a:schemeClr val="accent1"/>
+          </a:effectRef>
+          <a:fontRef idx="minor">
+            <a:schemeClr val="lt1"/>
+          </a:fontRef>
+        </p:style>
+        <p:txBody>
+          <a:bodyPr rtlCol="0" anchor="ctr"/>
+          <a:lstStyle/>
+          <a:p>
+            <a:pPr algn="ctr"/>
+          </a:p>
+        </p:txBody>
+      </p:sp>
+      <p:sp>
+        <p:nvSpPr>
+          <p:cNvPr id="7" name="TextBox 6"/>
+          <p:cNvSpPr txBox="1"/>
+          <p:nvPr/>
+        </p:nvSpPr>
+        <p:spPr>
+          <a:xfrm>
+            <a:off x="457200" y="1261872"/>
+            <a:ext cx="5120640" cy="411480"/>
+          </a:xfrm>
+          <a:prstGeom prst="rect">
+            <a:avLst/>
+          </a:prstGeom>
+          <a:noFill/>
+        </p:spPr>
+        <p:txBody>
+          <a:bodyPr wrap="square">
+            <a:spAutoFit/>
+          </a:bodyPr>
+          <a:lstStyle/>
+          <a:p>
+            <a:pPr algn="l"/>
+            <a:r>
+              <a:rPr sz="1200" b="1" i="0">
+                <a:solidFill>
+                  <a:srgbClr val="0F3460"/>
+                </a:solidFill>
+              </a:rPr>
+              <a:t>📐  What is Measurement Uncertainty?</a:t>
+            </a:r>
+          </a:p>
+        </p:txBody>
+      </p:sp>
+      <p:sp>
+        <p:nvSpPr>
+          <p:cNvPr id="8" name="TextBox 7"/>
+          <p:cNvSpPr txBox="1"/>
+          <p:nvPr/>
+        </p:nvSpPr>
+        <p:spPr>
+          <a:xfrm>
+            <a:off x="457200" y="1664208"/>
+            <a:ext cx="5120640" cy="1234440"/>
+          </a:xfrm>
+          <a:prstGeom prst="rect">
+            <a:avLst/>
+          </a:prstGeom>
+          <a:noFill/>
+        </p:spPr>
+        <p:txBody>
+          <a:bodyPr wrap="square">
+            <a:spAutoFit/>
+          </a:bodyPr>
+          <a:lstStyle/>
+          <a:p>
+            <a:pPr algn="l"/>
+            <a:r>
+              <a:rPr sz="1000" b="0" i="0">
+                <a:solidFill>
+                  <a:srgbClr val="333333"/>
+                </a:solidFill>
+              </a:rPr>
+              <a:t>Measurement Uncertainty (MU) is a quantified doubt about the result of a measurement. As per ISO/IEC 17025:2017, every calibration certificate MUST state the uncertainty of measurement to demonstrate metrological traceability.</a:t>
+            </a:r>
+          </a:p>
+        </p:txBody>
+      </p:sp>
+      <p:sp>
+        <p:nvSpPr>
+          <p:cNvPr id="9" name="Rectangle 8"/>
+          <p:cNvSpPr/>
+          <p:nvPr/>
+        </p:nvSpPr>
+        <p:spPr>
+          <a:xfrm>
+            <a:off x="5806440" y="1188720"/>
+            <a:ext cx="6080760" cy="1874519"/>
+          </a:xfrm>
+          <a:prstGeom prst="rect">
+            <a:avLst/>
+          </a:prstGeom>
+          <a:solidFill>
+            <a:srgbClr val="E6F4FF"/>
+          </a:solidFill>
+          <a:ln w="6350">
+            <a:solidFill>
+              <a:srgbClr val="E2E8F0"/>
+            </a:solidFill>
+          </a:ln>
+        </p:spPr>
+        <p:style>
+          <a:lnRef idx="1">
+            <a:schemeClr val="accent1"/>
+          </a:lnRef>
+          <a:fillRef idx="3">
+            <a:schemeClr val="accent1"/>
+          </a:fillRef>
+          <a:effectRef idx="2">
+            <a:schemeClr val="accent1"/>
+          </a:effectRef>
+          <a:fontRef idx="minor">
+            <a:schemeClr val="lt1"/>
+          </a:fontRef>
+        </p:style>
+        <p:txBody>
+          <a:bodyPr rtlCol="0" anchor="ctr"/>
+          <a:lstStyle/>
+          <a:p>
+            <a:pPr algn="ctr"/>
+          </a:p>
+        </p:txBody>
+      </p:sp>
+      <p:sp>
+        <p:nvSpPr>
+          <p:cNvPr id="10" name="TextBox 9"/>
+          <p:cNvSpPr txBox="1"/>
+          <p:nvPr/>
+        </p:nvSpPr>
+        <p:spPr>
+          <a:xfrm>
+            <a:off x="5989320" y="1261872"/>
+            <a:ext cx="5760720" cy="411480"/>
+          </a:xfrm>
+          <a:prstGeom prst="rect">
+            <a:avLst/>
+          </a:prstGeom>
+          <a:noFill/>
+        </p:spPr>
+        <p:txBody>
+          <a:bodyPr wrap="square">
+            <a:spAutoFit/>
+          </a:bodyPr>
+          <a:lstStyle/>
+          <a:p>
+            <a:pPr algn="l"/>
+            <a:r>
+              <a:rPr sz="1200" b="1" i="0">
+                <a:solidFill>
+                  <a:srgbClr val="0F3460"/>
+                </a:solidFill>
+              </a:rPr>
+              <a:t>📋  GUM Standard (JCGM 100:2008)</a:t>
+            </a:r>
+          </a:p>
+        </p:txBody>
+      </p:sp>
+      <p:sp>
+        <p:nvSpPr>
+          <p:cNvPr id="11" name="TextBox 10"/>
+          <p:cNvSpPr txBox="1"/>
+          <p:nvPr/>
+        </p:nvSpPr>
+        <p:spPr>
+          <a:xfrm>
+            <a:off x="5989320" y="1664208"/>
+            <a:ext cx="5760720" cy="1234440"/>
+          </a:xfrm>
+          <a:prstGeom prst="rect">
+            <a:avLst/>
+          </a:prstGeom>
+          <a:noFill/>
+        </p:spPr>
+        <p:txBody>
+          <a:bodyPr wrap="square">
+            <a:spAutoFit/>
+          </a:bodyPr>
+          <a:lstStyle/>
+          <a:p>
+            <a:pPr algn="l"/>
+            <a:r>
+              <a:rPr sz="1000" b="0" i="0">
+                <a:solidFill>
+                  <a:srgbClr val="333333"/>
+                </a:solidFill>
+              </a:rPr>
+              <a:t>CortexCLMS follows the Guide to the Expression of Uncertainty in Measurement (GUM). All uncertainty components are classified as Type A (statistical) or Type B (non-statistical) and combined using the law of propagation of uncertainties.</a:t>
+            </a:r>
+          </a:p>
+        </p:txBody>
+      </p:sp>
+      <p:sp>
+        <p:nvSpPr>
+          <p:cNvPr id="12" name="TextBox 11"/>
+          <p:cNvSpPr txBox="1"/>
+          <p:nvPr/>
+        </p:nvSpPr>
+        <p:spPr>
+          <a:xfrm>
+            <a:off x="274320" y="3200400"/>
+            <a:ext cx="11612880" cy="365760"/>
+          </a:xfrm>
+          <a:prstGeom prst="rect">
+            <a:avLst/>
+          </a:prstGeom>
+          <a:noFill/>
+        </p:spPr>
+        <p:txBody>
+          <a:bodyPr wrap="square">
+            <a:spAutoFit/>
+          </a:bodyPr>
+          <a:lstStyle/>
+          <a:p>
+            <a:pPr algn="l"/>
+            <a:r>
+              <a:rPr sz="1200" b="1" i="0">
+                <a:solidFill>
+                  <a:srgbClr val="0F3460"/>
+                </a:solidFill>
+              </a:rPr>
+              <a:t>Uncertainty Budget Components — Automatically Computed by CortexCLMS</a:t>
+            </a:r>
+          </a:p>
+        </p:txBody>
+      </p:sp>
+      <p:sp>
+        <p:nvSpPr>
+          <p:cNvPr id="13" name="Rectangle 12"/>
+          <p:cNvSpPr/>
+          <p:nvPr/>
+        </p:nvSpPr>
+        <p:spPr>
+          <a:xfrm>
+            <a:off x="274320" y="3584448"/>
+            <a:ext cx="11612880" cy="36576"/>
+          </a:xfrm>
+          <a:prstGeom prst="rect">
+            <a:avLst/>
+          </a:prstGeom>
+          <a:solidFill>
+            <a:srgbClr val="E94560"/>
+          </a:solidFill>
+          <a:ln>
+            <a:noFill/>
+          </a:ln>
+        </p:spPr>
+        <p:style>
+          <a:lnRef idx="1">
+            <a:schemeClr val="accent1"/>
+          </a:lnRef>
+          <a:fillRef idx="3">
+            <a:schemeClr val="accent1"/>
+          </a:fillRef>
+          <a:effectRef idx="2">
+            <a:schemeClr val="accent1"/>
+          </a:effectRef>
+          <a:fontRef idx="minor">
+            <a:schemeClr val="lt1"/>
+          </a:fontRef>
+        </p:style>
+        <p:txBody>
+          <a:bodyPr rtlCol="0" anchor="ctr"/>
+          <a:lstStyle/>
+          <a:p>
+            <a:pPr algn="ctr"/>
+          </a:p>
+        </p:txBody>
+      </p:sp>
+      <p:sp>
+        <p:nvSpPr>
+          <p:cNvPr id="14" name="Rectangle 13"/>
+          <p:cNvSpPr/>
+          <p:nvPr/>
+        </p:nvSpPr>
+        <p:spPr>
+          <a:xfrm>
+            <a:off x="274320" y="3703320"/>
+            <a:ext cx="2788920" cy="1920240"/>
           </a:xfrm>
           <a:prstGeom prst="rect">
             <a:avLst/>
@@ -22612,20 +26135,20 @@
       </p:sp>
       <p:sp>
         <p:nvSpPr>
-          <p:cNvPr id="6" name="Rectangle 5"/>
+          <p:cNvPr id="15" name="Rectangle 14"/>
           <p:cNvSpPr/>
           <p:nvPr/>
         </p:nvSpPr>
         <p:spPr>
           <a:xfrm>
-            <a:off x="274320" y="1188720"/>
-            <a:ext cx="3749039" cy="73152"/>
+            <a:off x="274320" y="3703320"/>
+            <a:ext cx="2788920" cy="54864"/>
           </a:xfrm>
           <a:prstGeom prst="rect">
             <a:avLst/>
           </a:prstGeom>
           <a:solidFill>
-            <a:srgbClr val="E94560"/>
+            <a:srgbClr val="0F3460"/>
           </a:solidFill>
           <a:ln>
             <a:noFill/>
@@ -22655,20 +26178,20 @@
       </p:sp>
       <p:sp>
         <p:nvSpPr>
-          <p:cNvPr id="7" name="Oval 6"/>
+          <p:cNvPr id="16" name="Rectangle 15"/>
           <p:cNvSpPr/>
           <p:nvPr/>
         </p:nvSpPr>
         <p:spPr>
           <a:xfrm>
-            <a:off x="457200" y="1417320"/>
-            <a:ext cx="640080" cy="640080"/>
-          </a:xfrm>
-          <a:prstGeom prst="ellipse">
+            <a:off x="411479" y="3794760"/>
+            <a:ext cx="685800" cy="411480"/>
+          </a:xfrm>
+          <a:prstGeom prst="rect">
             <a:avLst/>
           </a:prstGeom>
           <a:solidFill>
-            <a:srgbClr val="E94560"/>
+            <a:srgbClr val="0F3460"/>
           </a:solidFill>
           <a:ln>
             <a:noFill/>
@@ -22698,48 +26221,48 @@
       </p:sp>
       <p:sp>
         <p:nvSpPr>
-          <p:cNvPr id="8" name="TextBox 7"/>
-          <p:cNvSpPr txBox="1"/>
-          <p:nvPr/>
-        </p:nvSpPr>
-        <p:spPr>
-          <a:xfrm>
-            <a:off x="475488" y="1444752"/>
-            <a:ext cx="603504" cy="457200"/>
-          </a:xfrm>
-          <a:prstGeom prst="rect">
-            <a:avLst/>
-          </a:prstGeom>
-          <a:noFill/>
-        </p:spPr>
-        <p:txBody>
-          <a:bodyPr wrap="square">
-            <a:spAutoFit/>
-          </a:bodyPr>
-          <a:lstStyle/>
-          <a:p>
-            <a:pPr algn="ctr"/>
-            <a:r>
-              <a:rPr sz="1600" b="0" i="0">
+          <p:cNvPr id="17" name="TextBox 16"/>
+          <p:cNvSpPr txBox="1"/>
+          <p:nvPr/>
+        </p:nvSpPr>
+        <p:spPr>
+          <a:xfrm>
+            <a:off x="429768" y="3822191"/>
+            <a:ext cx="649224" cy="347472"/>
+          </a:xfrm>
+          <a:prstGeom prst="rect">
+            <a:avLst/>
+          </a:prstGeom>
+          <a:noFill/>
+        </p:spPr>
+        <p:txBody>
+          <a:bodyPr wrap="square">
+            <a:spAutoFit/>
+          </a:bodyPr>
+          <a:lstStyle/>
+          <a:p>
+            <a:pPr algn="ctr"/>
+            <a:r>
+              <a:rPr sz="900" b="1" i="0">
                 <a:solidFill>
                   <a:srgbClr val="FFFFFF"/>
                 </a:solidFill>
               </a:rPr>
-              <a:t>⚡</a:t>
-            </a:r>
-          </a:p>
-        </p:txBody>
-      </p:sp>
-      <p:sp>
-        <p:nvSpPr>
-          <p:cNvPr id="9" name="TextBox 8"/>
-          <p:cNvSpPr txBox="1"/>
-          <p:nvPr/>
-        </p:nvSpPr>
-        <p:spPr>
-          <a:xfrm>
-            <a:off x="1234440" y="1444752"/>
-            <a:ext cx="2651760" cy="548640"/>
+              <a:t>uRef</a:t>
+            </a:r>
+          </a:p>
+        </p:txBody>
+      </p:sp>
+      <p:sp>
+        <p:nvSpPr>
+          <p:cNvPr id="18" name="TextBox 17"/>
+          <p:cNvSpPr txBox="1"/>
+          <p:nvPr/>
+        </p:nvSpPr>
+        <p:spPr>
+          <a:xfrm>
+            <a:off x="1188720" y="3803904"/>
+            <a:ext cx="1737360" cy="502920"/>
           </a:xfrm>
           <a:prstGeom prst="rect">
             <a:avLst/>
@@ -22754,26 +26277,27 @@
           <a:p>
             <a:pPr algn="l"/>
             <a:r>
-              <a:rPr sz="1100" b="1" i="0">
+              <a:rPr sz="950" b="1" i="0">
                 <a:solidFill>
                   <a:srgbClr val="0F3460"/>
                 </a:solidFill>
               </a:rPr>
-              <a:t>60% Faster Certificate Issuance</a:t>
-            </a:r>
-          </a:p>
-        </p:txBody>
-      </p:sp>
-      <p:sp>
-        <p:nvSpPr>
-          <p:cNvPr id="10" name="TextBox 9"/>
-          <p:cNvSpPr txBox="1"/>
-          <p:nvPr/>
-        </p:nvSpPr>
-        <p:spPr>
-          <a:xfrm>
-            <a:off x="457200" y="2194560"/>
-            <a:ext cx="3383280" cy="1280160"/>
+              <a:t>Reference Standard
+Uncertainty</a:t>
+            </a:r>
+          </a:p>
+        </p:txBody>
+      </p:sp>
+      <p:sp>
+        <p:nvSpPr>
+          <p:cNvPr id="19" name="TextBox 18"/>
+          <p:cNvSpPr txBox="1"/>
+          <p:nvPr/>
+        </p:nvSpPr>
+        <p:spPr>
+          <a:xfrm>
+            <a:off x="411479" y="4315968"/>
+            <a:ext cx="2542032" cy="1143000"/>
           </a:xfrm>
           <a:prstGeom prst="rect">
             <a:avLst/>
@@ -22788,26 +26312,26 @@
           <a:p>
             <a:pPr algn="l"/>
             <a:r>
-              <a:rPr sz="1000" b="0" i="0">
+              <a:rPr sz="900" b="0" i="0">
                 <a:solidFill>
                   <a:srgbClr val="333333"/>
                 </a:solidFill>
               </a:rPr>
-              <a:t>Automated datasheet-to-certificate pipeline eliminates manual re-entry. What took 2 days now takes 2 hours.</a:t>
-            </a:r>
-          </a:p>
-        </p:txBody>
-      </p:sp>
-      <p:sp>
-        <p:nvSpPr>
-          <p:cNvPr id="11" name="Rectangle 10"/>
+              <a:t>Type B — Certificate uncertainty of the reference standard used, divided by coverage factor k.</a:t>
+            </a:r>
+          </a:p>
+        </p:txBody>
+      </p:sp>
+      <p:sp>
+        <p:nvSpPr>
+          <p:cNvPr id="20" name="Rectangle 19"/>
           <p:cNvSpPr/>
           <p:nvPr/>
         </p:nvSpPr>
         <p:spPr>
           <a:xfrm>
-            <a:off x="4251959" y="1188720"/>
-            <a:ext cx="3749039" cy="2423160"/>
+            <a:off x="3264408" y="3703320"/>
+            <a:ext cx="2788920" cy="1920240"/>
           </a:xfrm>
           <a:prstGeom prst="rect">
             <a:avLst/>
@@ -22845,20 +26369,20 @@
       </p:sp>
       <p:sp>
         <p:nvSpPr>
-          <p:cNvPr id="12" name="Rectangle 11"/>
+          <p:cNvPr id="21" name="Rectangle 20"/>
           <p:cNvSpPr/>
           <p:nvPr/>
         </p:nvSpPr>
         <p:spPr>
           <a:xfrm>
-            <a:off x="4251959" y="1188720"/>
-            <a:ext cx="3749039" cy="73152"/>
+            <a:off x="3264408" y="3703320"/>
+            <a:ext cx="2788920" cy="54864"/>
           </a:xfrm>
           <a:prstGeom prst="rect">
             <a:avLst/>
           </a:prstGeom>
           <a:solidFill>
-            <a:srgbClr val="0F3460"/>
+            <a:srgbClr val="0A5C2A"/>
           </a:solidFill>
           <a:ln>
             <a:noFill/>
@@ -22888,20 +26412,20 @@
       </p:sp>
       <p:sp>
         <p:nvSpPr>
-          <p:cNvPr id="13" name="Oval 12"/>
+          <p:cNvPr id="22" name="Rectangle 21"/>
           <p:cNvSpPr/>
           <p:nvPr/>
         </p:nvSpPr>
         <p:spPr>
           <a:xfrm>
-            <a:off x="4434840" y="1417320"/>
-            <a:ext cx="640080" cy="640080"/>
-          </a:xfrm>
-          <a:prstGeom prst="ellipse">
+            <a:off x="3401568" y="3794760"/>
+            <a:ext cx="685800" cy="411480"/>
+          </a:xfrm>
+          <a:prstGeom prst="rect">
             <a:avLst/>
           </a:prstGeom>
           <a:solidFill>
-            <a:srgbClr val="0F3460"/>
+            <a:srgbClr val="0A5C2A"/>
           </a:solidFill>
           <a:ln>
             <a:noFill/>
@@ -22931,48 +26455,48 @@
       </p:sp>
       <p:sp>
         <p:nvSpPr>
-          <p:cNvPr id="14" name="TextBox 13"/>
-          <p:cNvSpPr txBox="1"/>
-          <p:nvPr/>
-        </p:nvSpPr>
-        <p:spPr>
-          <a:xfrm>
-            <a:off x="4453127" y="1444752"/>
-            <a:ext cx="603504" cy="457200"/>
-          </a:xfrm>
-          <a:prstGeom prst="rect">
-            <a:avLst/>
-          </a:prstGeom>
-          <a:noFill/>
-        </p:spPr>
-        <p:txBody>
-          <a:bodyPr wrap="square">
-            <a:spAutoFit/>
-          </a:bodyPr>
-          <a:lstStyle/>
-          <a:p>
-            <a:pPr algn="ctr"/>
-            <a:r>
-              <a:rPr sz="1600" b="0" i="0">
+          <p:cNvPr id="23" name="TextBox 22"/>
+          <p:cNvSpPr txBox="1"/>
+          <p:nvPr/>
+        </p:nvSpPr>
+        <p:spPr>
+          <a:xfrm>
+            <a:off x="3419856" y="3822191"/>
+            <a:ext cx="649224" cy="347472"/>
+          </a:xfrm>
+          <a:prstGeom prst="rect">
+            <a:avLst/>
+          </a:prstGeom>
+          <a:noFill/>
+        </p:spPr>
+        <p:txBody>
+          <a:bodyPr wrap="square">
+            <a:spAutoFit/>
+          </a:bodyPr>
+          <a:lstStyle/>
+          <a:p>
+            <a:pPr algn="ctr"/>
+            <a:r>
+              <a:rPr sz="900" b="1" i="0">
                 <a:solidFill>
                   <a:srgbClr val="FFFFFF"/>
                 </a:solidFill>
               </a:rPr>
-              <a:t>📋</a:t>
-            </a:r>
-          </a:p>
-        </p:txBody>
-      </p:sp>
-      <p:sp>
-        <p:nvSpPr>
-          <p:cNvPr id="15" name="TextBox 14"/>
-          <p:cNvSpPr txBox="1"/>
-          <p:nvPr/>
-        </p:nvSpPr>
-        <p:spPr>
-          <a:xfrm>
-            <a:off x="5212079" y="1444752"/>
-            <a:ext cx="2651760" cy="548640"/>
+              <a:t>uRes</a:t>
+            </a:r>
+          </a:p>
+        </p:txBody>
+      </p:sp>
+      <p:sp>
+        <p:nvSpPr>
+          <p:cNvPr id="24" name="TextBox 23"/>
+          <p:cNvSpPr txBox="1"/>
+          <p:nvPr/>
+        </p:nvSpPr>
+        <p:spPr>
+          <a:xfrm>
+            <a:off x="4178808" y="3803904"/>
+            <a:ext cx="1737360" cy="502920"/>
           </a:xfrm>
           <a:prstGeom prst="rect">
             <a:avLst/>
@@ -22987,26 +26511,27 @@
           <a:p>
             <a:pPr algn="l"/>
             <a:r>
-              <a:rPr sz="1100" b="1" i="0">
-                <a:solidFill>
-                  <a:srgbClr val="0F3460"/>
-                </a:solidFill>
-              </a:rPr>
-              <a:t>100% NABL Compliance</a:t>
-            </a:r>
-          </a:p>
-        </p:txBody>
-      </p:sp>
-      <p:sp>
-        <p:nvSpPr>
-          <p:cNvPr id="16" name="TextBox 15"/>
-          <p:cNvSpPr txBox="1"/>
-          <p:nvPr/>
-        </p:nvSpPr>
-        <p:spPr>
-          <a:xfrm>
-            <a:off x="4434840" y="2194560"/>
-            <a:ext cx="3383280" cy="1280160"/>
+              <a:rPr sz="950" b="1" i="0">
+                <a:solidFill>
+                  <a:srgbClr val="0A5C2A"/>
+                </a:solidFill>
+              </a:rPr>
+              <a:t>Resolution
+Uncertainty</a:t>
+            </a:r>
+          </a:p>
+        </p:txBody>
+      </p:sp>
+      <p:sp>
+        <p:nvSpPr>
+          <p:cNvPr id="25" name="TextBox 24"/>
+          <p:cNvSpPr txBox="1"/>
+          <p:nvPr/>
+        </p:nvSpPr>
+        <p:spPr>
+          <a:xfrm>
+            <a:off x="3401568" y="4315968"/>
+            <a:ext cx="2542032" cy="1143000"/>
           </a:xfrm>
           <a:prstGeom prst="rect">
             <a:avLst/>
@@ -23021,26 +26546,26 @@
           <a:p>
             <a:pPr algn="l"/>
             <a:r>
-              <a:rPr sz="1000" b="0" i="0">
+              <a:rPr sz="900" b="0" i="0">
                 <a:solidFill>
                   <a:srgbClr val="333333"/>
                 </a:solidFill>
               </a:rPr>
-              <a:t>Built-in workflows enforce ISO/IEC 17025 requirements. Environmental logs, reference standard tracking, and document control are automatic.</a:t>
-            </a:r>
-          </a:p>
-        </p:txBody>
-      </p:sp>
-      <p:sp>
-        <p:nvSpPr>
-          <p:cNvPr id="17" name="Rectangle 16"/>
+              <a:t>Type B — Half the least significant digit (LSD) of the instrument under test, divided by √3.</a:t>
+            </a:r>
+          </a:p>
+        </p:txBody>
+      </p:sp>
+      <p:sp>
+        <p:nvSpPr>
+          <p:cNvPr id="26" name="Rectangle 25"/>
           <p:cNvSpPr/>
           <p:nvPr/>
         </p:nvSpPr>
         <p:spPr>
           <a:xfrm>
-            <a:off x="8229600" y="1188720"/>
-            <a:ext cx="3749039" cy="2423160"/>
+            <a:off x="6254496" y="3703320"/>
+            <a:ext cx="2788920" cy="1920240"/>
           </a:xfrm>
           <a:prstGeom prst="rect">
             <a:avLst/>
@@ -23078,20 +26603,20 @@
       </p:sp>
       <p:sp>
         <p:nvSpPr>
-          <p:cNvPr id="18" name="Rectangle 17"/>
+          <p:cNvPr id="27" name="Rectangle 26"/>
           <p:cNvSpPr/>
           <p:nvPr/>
         </p:nvSpPr>
         <p:spPr>
           <a:xfrm>
-            <a:off x="8229600" y="1188720"/>
-            <a:ext cx="3749039" cy="73152"/>
+            <a:off x="6254496" y="3703320"/>
+            <a:ext cx="2788920" cy="54864"/>
           </a:xfrm>
           <a:prstGeom prst="rect">
             <a:avLst/>
           </a:prstGeom>
           <a:solidFill>
-            <a:srgbClr val="52C41A"/>
+            <a:srgbClr val="6B210E"/>
           </a:solidFill>
           <a:ln>
             <a:noFill/>
@@ -23121,20 +26646,20 @@
       </p:sp>
       <p:sp>
         <p:nvSpPr>
-          <p:cNvPr id="19" name="Oval 18"/>
+          <p:cNvPr id="28" name="Rectangle 27"/>
           <p:cNvSpPr/>
           <p:nvPr/>
         </p:nvSpPr>
         <p:spPr>
           <a:xfrm>
-            <a:off x="8412480" y="1417320"/>
-            <a:ext cx="640080" cy="640080"/>
-          </a:xfrm>
-          <a:prstGeom prst="ellipse">
+            <a:off x="6391656" y="3794760"/>
+            <a:ext cx="685800" cy="411480"/>
+          </a:xfrm>
+          <a:prstGeom prst="rect">
             <a:avLst/>
           </a:prstGeom>
           <a:solidFill>
-            <a:srgbClr val="52C41A"/>
+            <a:srgbClr val="6B210E"/>
           </a:solidFill>
           <a:ln>
             <a:noFill/>
@@ -23164,48 +26689,48 @@
       </p:sp>
       <p:sp>
         <p:nvSpPr>
-          <p:cNvPr id="20" name="TextBox 19"/>
-          <p:cNvSpPr txBox="1"/>
-          <p:nvPr/>
-        </p:nvSpPr>
-        <p:spPr>
-          <a:xfrm>
-            <a:off x="8430768" y="1444752"/>
-            <a:ext cx="603504" cy="457200"/>
-          </a:xfrm>
-          <a:prstGeom prst="rect">
-            <a:avLst/>
-          </a:prstGeom>
-          <a:noFill/>
-        </p:spPr>
-        <p:txBody>
-          <a:bodyPr wrap="square">
-            <a:spAutoFit/>
-          </a:bodyPr>
-          <a:lstStyle/>
-          <a:p>
-            <a:pPr algn="ctr"/>
-            <a:r>
-              <a:rPr sz="1600" b="0" i="0">
+          <p:cNvPr id="29" name="TextBox 28"/>
+          <p:cNvSpPr txBox="1"/>
+          <p:nvPr/>
+        </p:nvSpPr>
+        <p:spPr>
+          <a:xfrm>
+            <a:off x="6409944" y="3822191"/>
+            <a:ext cx="649224" cy="347472"/>
+          </a:xfrm>
+          <a:prstGeom prst="rect">
+            <a:avLst/>
+          </a:prstGeom>
+          <a:noFill/>
+        </p:spPr>
+        <p:txBody>
+          <a:bodyPr wrap="square">
+            <a:spAutoFit/>
+          </a:bodyPr>
+          <a:lstStyle/>
+          <a:p>
+            <a:pPr algn="ctr"/>
+            <a:r>
+              <a:rPr sz="900" b="1" i="0">
                 <a:solidFill>
                   <a:srgbClr val="FFFFFF"/>
                 </a:solidFill>
               </a:rPr>
-              <a:t>💰</a:t>
-            </a:r>
-          </a:p>
-        </p:txBody>
-      </p:sp>
-      <p:sp>
-        <p:nvSpPr>
-          <p:cNvPr id="21" name="TextBox 20"/>
-          <p:cNvSpPr txBox="1"/>
-          <p:nvPr/>
-        </p:nvSpPr>
-        <p:spPr>
-          <a:xfrm>
-            <a:off x="9189720" y="1444752"/>
-            <a:ext cx="2651760" cy="548640"/>
+              <a:t>uRep</a:t>
+            </a:r>
+          </a:p>
+        </p:txBody>
+      </p:sp>
+      <p:sp>
+        <p:nvSpPr>
+          <p:cNvPr id="30" name="TextBox 29"/>
+          <p:cNvSpPr txBox="1"/>
+          <p:nvPr/>
+        </p:nvSpPr>
+        <p:spPr>
+          <a:xfrm>
+            <a:off x="7168896" y="3803904"/>
+            <a:ext cx="1737360" cy="502920"/>
           </a:xfrm>
           <a:prstGeom prst="rect">
             <a:avLst/>
@@ -23220,26 +26745,27 @@
           <a:p>
             <a:pPr algn="l"/>
             <a:r>
-              <a:rPr sz="1100" b="1" i="0">
-                <a:solidFill>
-                  <a:srgbClr val="0F3460"/>
-                </a:solidFill>
-              </a:rPr>
-              <a:t>Zero Revenue Leakage</a:t>
-            </a:r>
-          </a:p>
-        </p:txBody>
-      </p:sp>
-      <p:sp>
-        <p:nvSpPr>
-          <p:cNvPr id="22" name="TextBox 21"/>
-          <p:cNvSpPr txBox="1"/>
-          <p:nvPr/>
-        </p:nvSpPr>
-        <p:spPr>
-          <a:xfrm>
-            <a:off x="8412480" y="2194560"/>
-            <a:ext cx="3383280" cy="1280160"/>
+              <a:rPr sz="950" b="1" i="0">
+                <a:solidFill>
+                  <a:srgbClr val="6B210E"/>
+                </a:solidFill>
+              </a:rPr>
+              <a:t>Repeatability
+Uncertainty</a:t>
+            </a:r>
+          </a:p>
+        </p:txBody>
+      </p:sp>
+      <p:sp>
+        <p:nvSpPr>
+          <p:cNvPr id="31" name="TextBox 30"/>
+          <p:cNvSpPr txBox="1"/>
+          <p:nvPr/>
+        </p:nvSpPr>
+        <p:spPr>
+          <a:xfrm>
+            <a:off x="6391656" y="4315968"/>
+            <a:ext cx="2542032" cy="1143000"/>
           </a:xfrm>
           <a:prstGeom prst="rect">
             <a:avLst/>
@@ -23254,26 +26780,26 @@
           <a:p>
             <a:pPr algn="l"/>
             <a:r>
-              <a:rPr sz="1000" b="0" i="0">
+              <a:rPr sz="900" b="0" i="0">
                 <a:solidFill>
                   <a:srgbClr val="333333"/>
                 </a:solidFill>
               </a:rPr>
-              <a:t>Every completed job auto-generates a billing prompt. Pending invoices dashboard prevents forgotten billings. Average recovery: ₹2L/month.</a:t>
-            </a:r>
-          </a:p>
-        </p:txBody>
-      </p:sp>
-      <p:sp>
-        <p:nvSpPr>
-          <p:cNvPr id="23" name="Rectangle 22"/>
+              <a:t>Type A — Standard deviation of repeated readings divided by √n (minimum 3 readings).</a:t>
+            </a:r>
+          </a:p>
+        </p:txBody>
+      </p:sp>
+      <p:sp>
+        <p:nvSpPr>
+          <p:cNvPr id="32" name="Rectangle 31"/>
           <p:cNvSpPr/>
           <p:nvPr/>
         </p:nvSpPr>
         <p:spPr>
           <a:xfrm>
-            <a:off x="274320" y="3794760"/>
-            <a:ext cx="3749039" cy="2423160"/>
+            <a:off x="9244584" y="3703320"/>
+            <a:ext cx="2788920" cy="1920240"/>
           </a:xfrm>
           <a:prstGeom prst="rect">
             <a:avLst/>
@@ -23311,20 +26837,20 @@
       </p:sp>
       <p:sp>
         <p:nvSpPr>
-          <p:cNvPr id="24" name="Rectangle 23"/>
+          <p:cNvPr id="33" name="Rectangle 32"/>
           <p:cNvSpPr/>
           <p:nvPr/>
         </p:nvSpPr>
         <p:spPr>
           <a:xfrm>
-            <a:off x="274320" y="3794760"/>
-            <a:ext cx="3749039" cy="73152"/>
+            <a:off x="9244584" y="3703320"/>
+            <a:ext cx="2788920" cy="54864"/>
           </a:xfrm>
           <a:prstGeom prst="rect">
             <a:avLst/>
           </a:prstGeom>
           <a:solidFill>
-            <a:srgbClr val="1677FF"/>
+            <a:srgbClr val="4A1F6B"/>
           </a:solidFill>
           <a:ln>
             <a:noFill/>
@@ -23354,20 +26880,20 @@
       </p:sp>
       <p:sp>
         <p:nvSpPr>
-          <p:cNvPr id="25" name="Oval 24"/>
+          <p:cNvPr id="34" name="Rectangle 33"/>
           <p:cNvSpPr/>
           <p:nvPr/>
         </p:nvSpPr>
         <p:spPr>
           <a:xfrm>
-            <a:off x="457200" y="4023360"/>
-            <a:ext cx="640080" cy="640080"/>
-          </a:xfrm>
-          <a:prstGeom prst="ellipse">
+            <a:off x="9381744" y="3794760"/>
+            <a:ext cx="685800" cy="411480"/>
+          </a:xfrm>
+          <a:prstGeom prst="rect">
             <a:avLst/>
           </a:prstGeom>
           <a:solidFill>
-            <a:srgbClr val="1677FF"/>
+            <a:srgbClr val="4A1F6B"/>
           </a:solidFill>
           <a:ln>
             <a:noFill/>
@@ -23397,48 +26923,48 @@
       </p:sp>
       <p:sp>
         <p:nvSpPr>
-          <p:cNvPr id="26" name="TextBox 25"/>
-          <p:cNvSpPr txBox="1"/>
-          <p:nvPr/>
-        </p:nvSpPr>
-        <p:spPr>
-          <a:xfrm>
-            <a:off x="475488" y="4050792"/>
-            <a:ext cx="603504" cy="457200"/>
-          </a:xfrm>
-          <a:prstGeom prst="rect">
-            <a:avLst/>
-          </a:prstGeom>
-          <a:noFill/>
-        </p:spPr>
-        <p:txBody>
-          <a:bodyPr wrap="square">
-            <a:spAutoFit/>
-          </a:bodyPr>
-          <a:lstStyle/>
-          <a:p>
-            <a:pPr algn="ctr"/>
-            <a:r>
-              <a:rPr sz="1600" b="0" i="0">
+          <p:cNvPr id="35" name="TextBox 34"/>
+          <p:cNvSpPr txBox="1"/>
+          <p:nvPr/>
+        </p:nvSpPr>
+        <p:spPr>
+          <a:xfrm>
+            <a:off x="9400032" y="3822191"/>
+            <a:ext cx="649224" cy="347472"/>
+          </a:xfrm>
+          <a:prstGeom prst="rect">
+            <a:avLst/>
+          </a:prstGeom>
+          <a:noFill/>
+        </p:spPr>
+        <p:txBody>
+          <a:bodyPr wrap="square">
+            <a:spAutoFit/>
+          </a:bodyPr>
+          <a:lstStyle/>
+          <a:p>
+            <a:pPr algn="ctr"/>
+            <a:r>
+              <a:rPr sz="900" b="1" i="0">
                 <a:solidFill>
                   <a:srgbClr val="FFFFFF"/>
                 </a:solidFill>
               </a:rPr>
-              <a:t>🌐</a:t>
-            </a:r>
-          </a:p>
-        </p:txBody>
-      </p:sp>
-      <p:sp>
-        <p:nvSpPr>
-          <p:cNvPr id="27" name="TextBox 26"/>
-          <p:cNvSpPr txBox="1"/>
-          <p:nvPr/>
-        </p:nvSpPr>
-        <p:spPr>
-          <a:xfrm>
-            <a:off x="1234440" y="4050792"/>
-            <a:ext cx="2651760" cy="548640"/>
+              <a:t>uDrift</a:t>
+            </a:r>
+          </a:p>
+        </p:txBody>
+      </p:sp>
+      <p:sp>
+        <p:nvSpPr>
+          <p:cNvPr id="36" name="TextBox 35"/>
+          <p:cNvSpPr txBox="1"/>
+          <p:nvPr/>
+        </p:nvSpPr>
+        <p:spPr>
+          <a:xfrm>
+            <a:off x="10158984" y="3803904"/>
+            <a:ext cx="1737360" cy="502920"/>
           </a:xfrm>
           <a:prstGeom prst="rect">
             <a:avLst/>
@@ -23453,26 +26979,27 @@
           <a:p>
             <a:pPr algn="l"/>
             <a:r>
-              <a:rPr sz="1100" b="1" i="0">
-                <a:solidFill>
-                  <a:srgbClr val="0F3460"/>
-                </a:solidFill>
-              </a:rPr>
-              <a:t>Customer Self-Service Portal</a:t>
-            </a:r>
-          </a:p>
-        </p:txBody>
-      </p:sp>
-      <p:sp>
-        <p:nvSpPr>
-          <p:cNvPr id="28" name="TextBox 27"/>
-          <p:cNvSpPr txBox="1"/>
-          <p:nvPr/>
-        </p:nvSpPr>
-        <p:spPr>
-          <a:xfrm>
-            <a:off x="457200" y="4800600"/>
-            <a:ext cx="3383280" cy="1280160"/>
+              <a:rPr sz="950" b="1" i="0">
+                <a:solidFill>
+                  <a:srgbClr val="4A1F6B"/>
+                </a:solidFill>
+              </a:rPr>
+              <a:t>Drift / Stability
+Uncertainty</a:t>
+            </a:r>
+          </a:p>
+        </p:txBody>
+      </p:sp>
+      <p:sp>
+        <p:nvSpPr>
+          <p:cNvPr id="37" name="TextBox 36"/>
+          <p:cNvSpPr txBox="1"/>
+          <p:nvPr/>
+        </p:nvSpPr>
+        <p:spPr>
+          <a:xfrm>
+            <a:off x="9381744" y="4315968"/>
+            <a:ext cx="2542032" cy="1143000"/>
           </a:xfrm>
           <a:prstGeom prst="rect">
             <a:avLst/>
@@ -23487,37 +27014,35 @@
           <a:p>
             <a:pPr algn="l"/>
             <a:r>
-              <a:rPr sz="1000" b="0" i="0">
+              <a:rPr sz="900" b="0" i="0">
                 <a:solidFill>
                   <a:srgbClr val="333333"/>
                 </a:solidFill>
               </a:rPr>
-              <a:t>Customers check job status and download certificates 24/7. Lab support calls reduced by 70%. Customer satisfaction scores up 40%.</a:t>
-            </a:r>
-          </a:p>
-        </p:txBody>
-      </p:sp>
-      <p:sp>
-        <p:nvSpPr>
-          <p:cNvPr id="29" name="Rectangle 28"/>
+              <a:t>Type B — Estimated from historical calibration data of the reference instrument.</a:t>
+            </a:r>
+          </a:p>
+        </p:txBody>
+      </p:sp>
+      <p:sp>
+        <p:nvSpPr>
+          <p:cNvPr id="38" name="Rectangle 37"/>
           <p:cNvSpPr/>
           <p:nvPr/>
         </p:nvSpPr>
         <p:spPr>
           <a:xfrm>
-            <a:off x="4251959" y="3794760"/>
-            <a:ext cx="3749039" cy="2423160"/>
+            <a:off x="274320" y="5760720"/>
+            <a:ext cx="11612880" cy="868680"/>
           </a:xfrm>
           <a:prstGeom prst="rect">
             <a:avLst/>
           </a:prstGeom>
           <a:solidFill>
-            <a:srgbClr val="FFFFFF"/>
+            <a:srgbClr val="0F3460"/>
           </a:solidFill>
-          <a:ln w="6350">
-            <a:solidFill>
-              <a:srgbClr val="E2E8F0"/>
-            </a:solidFill>
+          <a:ln>
+            <a:noFill/>
           </a:ln>
         </p:spPr>
         <p:style>
@@ -23544,421 +27069,68 @@
       </p:sp>
       <p:sp>
         <p:nvSpPr>
-          <p:cNvPr id="30" name="Rectangle 29"/>
-          <p:cNvSpPr/>
-          <p:nvPr/>
-        </p:nvSpPr>
-        <p:spPr>
-          <a:xfrm>
-            <a:off x="4251959" y="3794760"/>
-            <a:ext cx="3749039" cy="73152"/>
-          </a:xfrm>
-          <a:prstGeom prst="rect">
-            <a:avLst/>
-          </a:prstGeom>
-          <a:solidFill>
-            <a:srgbClr val="7C3AED"/>
-          </a:solidFill>
-          <a:ln>
-            <a:noFill/>
-          </a:ln>
-        </p:spPr>
-        <p:style>
-          <a:lnRef idx="1">
-            <a:schemeClr val="accent1"/>
-          </a:lnRef>
-          <a:fillRef idx="3">
-            <a:schemeClr val="accent1"/>
-          </a:fillRef>
-          <a:effectRef idx="2">
-            <a:schemeClr val="accent1"/>
-          </a:effectRef>
-          <a:fontRef idx="minor">
-            <a:schemeClr val="lt1"/>
-          </a:fontRef>
-        </p:style>
-        <p:txBody>
-          <a:bodyPr rtlCol="0" anchor="ctr"/>
-          <a:lstStyle/>
-          <a:p>
-            <a:pPr algn="ctr"/>
-          </a:p>
-        </p:txBody>
-      </p:sp>
-      <p:sp>
-        <p:nvSpPr>
-          <p:cNvPr id="31" name="Oval 30"/>
-          <p:cNvSpPr/>
-          <p:nvPr/>
-        </p:nvSpPr>
-        <p:spPr>
-          <a:xfrm>
-            <a:off x="4434840" y="4023360"/>
-            <a:ext cx="640080" cy="640080"/>
-          </a:xfrm>
-          <a:prstGeom prst="ellipse">
-            <a:avLst/>
-          </a:prstGeom>
-          <a:solidFill>
-            <a:srgbClr val="7C3AED"/>
-          </a:solidFill>
-          <a:ln>
-            <a:noFill/>
-          </a:ln>
-        </p:spPr>
-        <p:style>
-          <a:lnRef idx="1">
-            <a:schemeClr val="accent1"/>
-          </a:lnRef>
-          <a:fillRef idx="3">
-            <a:schemeClr val="accent1"/>
-          </a:fillRef>
-          <a:effectRef idx="2">
-            <a:schemeClr val="accent1"/>
-          </a:effectRef>
-          <a:fontRef idx="minor">
-            <a:schemeClr val="lt1"/>
-          </a:fontRef>
-        </p:style>
-        <p:txBody>
-          <a:bodyPr rtlCol="0" anchor="ctr"/>
-          <a:lstStyle/>
-          <a:p>
-            <a:pPr algn="ctr"/>
-          </a:p>
-        </p:txBody>
-      </p:sp>
-      <p:sp>
-        <p:nvSpPr>
-          <p:cNvPr id="32" name="TextBox 31"/>
-          <p:cNvSpPr txBox="1"/>
-          <p:nvPr/>
-        </p:nvSpPr>
-        <p:spPr>
-          <a:xfrm>
-            <a:off x="4453127" y="4050792"/>
-            <a:ext cx="603504" cy="457200"/>
-          </a:xfrm>
-          <a:prstGeom prst="rect">
-            <a:avLst/>
-          </a:prstGeom>
-          <a:noFill/>
-        </p:spPr>
-        <p:txBody>
-          <a:bodyPr wrap="square">
-            <a:spAutoFit/>
-          </a:bodyPr>
-          <a:lstStyle/>
-          <a:p>
-            <a:pPr algn="ctr"/>
-            <a:r>
-              <a:rPr sz="1600" b="0" i="0">
+          <p:cNvPr id="39" name="TextBox 38"/>
+          <p:cNvSpPr txBox="1"/>
+          <p:nvPr/>
+        </p:nvSpPr>
+        <p:spPr>
+          <a:xfrm>
+            <a:off x="457200" y="5833872"/>
+            <a:ext cx="3200400" cy="365760"/>
+          </a:xfrm>
+          <a:prstGeom prst="rect">
+            <a:avLst/>
+          </a:prstGeom>
+          <a:noFill/>
+        </p:spPr>
+        <p:txBody>
+          <a:bodyPr wrap="square">
+            <a:spAutoFit/>
+          </a:bodyPr>
+          <a:lstStyle/>
+          <a:p>
+            <a:pPr algn="l"/>
+            <a:r>
+              <a:rPr sz="1000" b="1" i="0">
+                <a:solidFill>
+                  <a:srgbClr val="F5A623"/>
+                </a:solidFill>
+              </a:rPr>
+              <a:t>Combined Standard Uncertainty:</a:t>
+            </a:r>
+          </a:p>
+        </p:txBody>
+      </p:sp>
+      <p:sp>
+        <p:nvSpPr>
+          <p:cNvPr id="40" name="TextBox 39"/>
+          <p:cNvSpPr txBox="1"/>
+          <p:nvPr/>
+        </p:nvSpPr>
+        <p:spPr>
+          <a:xfrm>
+            <a:off x="3657600" y="5833872"/>
+            <a:ext cx="8229600" cy="685800"/>
+          </a:xfrm>
+          <a:prstGeom prst="rect">
+            <a:avLst/>
+          </a:prstGeom>
+          <a:noFill/>
+        </p:spPr>
+        <p:txBody>
+          <a:bodyPr wrap="square">
+            <a:spAutoFit/>
+          </a:bodyPr>
+          <a:lstStyle/>
+          <a:p>
+            <a:pPr algn="l"/>
+            <a:r>
+              <a:rPr sz="1050" b="1" i="0">
                 <a:solidFill>
                   <a:srgbClr val="FFFFFF"/>
                 </a:solidFill>
               </a:rPr>
-              <a:t>📊</a:t>
-            </a:r>
-          </a:p>
-        </p:txBody>
-      </p:sp>
-      <p:sp>
-        <p:nvSpPr>
-          <p:cNvPr id="33" name="TextBox 32"/>
-          <p:cNvSpPr txBox="1"/>
-          <p:nvPr/>
-        </p:nvSpPr>
-        <p:spPr>
-          <a:xfrm>
-            <a:off x="5212079" y="4050792"/>
-            <a:ext cx="2651760" cy="548640"/>
-          </a:xfrm>
-          <a:prstGeom prst="rect">
-            <a:avLst/>
-          </a:prstGeom>
-          <a:noFill/>
-        </p:spPr>
-        <p:txBody>
-          <a:bodyPr wrap="square">
-            <a:spAutoFit/>
-          </a:bodyPr>
-          <a:lstStyle/>
-          <a:p>
-            <a:pPr algn="l"/>
-            <a:r>
-              <a:rPr sz="1100" b="1" i="0">
-                <a:solidFill>
-                  <a:srgbClr val="0F3460"/>
-                </a:solidFill>
-              </a:rPr>
-              <a:t>Real-Time Analytics</a:t>
-            </a:r>
-          </a:p>
-        </p:txBody>
-      </p:sp>
-      <p:sp>
-        <p:nvSpPr>
-          <p:cNvPr id="34" name="TextBox 33"/>
-          <p:cNvSpPr txBox="1"/>
-          <p:nvPr/>
-        </p:nvSpPr>
-        <p:spPr>
-          <a:xfrm>
-            <a:off x="4434840" y="4800600"/>
-            <a:ext cx="3383280" cy="1280160"/>
-          </a:xfrm>
-          <a:prstGeom prst="rect">
-            <a:avLst/>
-          </a:prstGeom>
-          <a:noFill/>
-        </p:spPr>
-        <p:txBody>
-          <a:bodyPr wrap="square">
-            <a:spAutoFit/>
-          </a:bodyPr>
-          <a:lstStyle/>
-          <a:p>
-            <a:pPr algn="l"/>
-            <a:r>
-              <a:rPr sz="1000" b="0" i="0">
-                <a:solidFill>
-                  <a:srgbClr val="333333"/>
-                </a:solidFill>
-              </a:rPr>
-              <a:t>Engineer productivity, revenue trends, NCR patterns — all in one dashboard. Data-driven decisions replace guesswork.</a:t>
-            </a:r>
-          </a:p>
-        </p:txBody>
-      </p:sp>
-      <p:sp>
-        <p:nvSpPr>
-          <p:cNvPr id="35" name="Rectangle 34"/>
-          <p:cNvSpPr/>
-          <p:nvPr/>
-        </p:nvSpPr>
-        <p:spPr>
-          <a:xfrm>
-            <a:off x="8229600" y="3794760"/>
-            <a:ext cx="3749039" cy="2423160"/>
-          </a:xfrm>
-          <a:prstGeom prst="rect">
-            <a:avLst/>
-          </a:prstGeom>
-          <a:solidFill>
-            <a:srgbClr val="FFFFFF"/>
-          </a:solidFill>
-          <a:ln w="6350">
-            <a:solidFill>
-              <a:srgbClr val="E2E8F0"/>
-            </a:solidFill>
-          </a:ln>
-        </p:spPr>
-        <p:style>
-          <a:lnRef idx="1">
-            <a:schemeClr val="accent1"/>
-          </a:lnRef>
-          <a:fillRef idx="3">
-            <a:schemeClr val="accent1"/>
-          </a:fillRef>
-          <a:effectRef idx="2">
-            <a:schemeClr val="accent1"/>
-          </a:effectRef>
-          <a:fontRef idx="minor">
-            <a:schemeClr val="lt1"/>
-          </a:fontRef>
-        </p:style>
-        <p:txBody>
-          <a:bodyPr rtlCol="0" anchor="ctr"/>
-          <a:lstStyle/>
-          <a:p>
-            <a:pPr algn="ctr"/>
-          </a:p>
-        </p:txBody>
-      </p:sp>
-      <p:sp>
-        <p:nvSpPr>
-          <p:cNvPr id="36" name="Rectangle 35"/>
-          <p:cNvSpPr/>
-          <p:nvPr/>
-        </p:nvSpPr>
-        <p:spPr>
-          <a:xfrm>
-            <a:off x="8229600" y="3794760"/>
-            <a:ext cx="3749039" cy="73152"/>
-          </a:xfrm>
-          <a:prstGeom prst="rect">
-            <a:avLst/>
-          </a:prstGeom>
-          <a:solidFill>
-            <a:srgbClr val="F5A623"/>
-          </a:solidFill>
-          <a:ln>
-            <a:noFill/>
-          </a:ln>
-        </p:spPr>
-        <p:style>
-          <a:lnRef idx="1">
-            <a:schemeClr val="accent1"/>
-          </a:lnRef>
-          <a:fillRef idx="3">
-            <a:schemeClr val="accent1"/>
-          </a:fillRef>
-          <a:effectRef idx="2">
-            <a:schemeClr val="accent1"/>
-          </a:effectRef>
-          <a:fontRef idx="minor">
-            <a:schemeClr val="lt1"/>
-          </a:fontRef>
-        </p:style>
-        <p:txBody>
-          <a:bodyPr rtlCol="0" anchor="ctr"/>
-          <a:lstStyle/>
-          <a:p>
-            <a:pPr algn="ctr"/>
-          </a:p>
-        </p:txBody>
-      </p:sp>
-      <p:sp>
-        <p:nvSpPr>
-          <p:cNvPr id="37" name="Oval 36"/>
-          <p:cNvSpPr/>
-          <p:nvPr/>
-        </p:nvSpPr>
-        <p:spPr>
-          <a:xfrm>
-            <a:off x="8412480" y="4023360"/>
-            <a:ext cx="640080" cy="640080"/>
-          </a:xfrm>
-          <a:prstGeom prst="ellipse">
-            <a:avLst/>
-          </a:prstGeom>
-          <a:solidFill>
-            <a:srgbClr val="F5A623"/>
-          </a:solidFill>
-          <a:ln>
-            <a:noFill/>
-          </a:ln>
-        </p:spPr>
-        <p:style>
-          <a:lnRef idx="1">
-            <a:schemeClr val="accent1"/>
-          </a:lnRef>
-          <a:fillRef idx="3">
-            <a:schemeClr val="accent1"/>
-          </a:fillRef>
-          <a:effectRef idx="2">
-            <a:schemeClr val="accent1"/>
-          </a:effectRef>
-          <a:fontRef idx="minor">
-            <a:schemeClr val="lt1"/>
-          </a:fontRef>
-        </p:style>
-        <p:txBody>
-          <a:bodyPr rtlCol="0" anchor="ctr"/>
-          <a:lstStyle/>
-          <a:p>
-            <a:pPr algn="ctr"/>
-          </a:p>
-        </p:txBody>
-      </p:sp>
-      <p:sp>
-        <p:nvSpPr>
-          <p:cNvPr id="38" name="TextBox 37"/>
-          <p:cNvSpPr txBox="1"/>
-          <p:nvPr/>
-        </p:nvSpPr>
-        <p:spPr>
-          <a:xfrm>
-            <a:off x="8430768" y="4050792"/>
-            <a:ext cx="603504" cy="457200"/>
-          </a:xfrm>
-          <a:prstGeom prst="rect">
-            <a:avLst/>
-          </a:prstGeom>
-          <a:noFill/>
-        </p:spPr>
-        <p:txBody>
-          <a:bodyPr wrap="square">
-            <a:spAutoFit/>
-          </a:bodyPr>
-          <a:lstStyle/>
-          <a:p>
-            <a:pPr algn="ctr"/>
-            <a:r>
-              <a:rPr sz="1600" b="0" i="0">
-                <a:solidFill>
-                  <a:srgbClr val="FFFFFF"/>
-                </a:solidFill>
-              </a:rPr>
-              <a:t>🔐</a:t>
-            </a:r>
-          </a:p>
-        </p:txBody>
-      </p:sp>
-      <p:sp>
-        <p:nvSpPr>
-          <p:cNvPr id="39" name="TextBox 38"/>
-          <p:cNvSpPr txBox="1"/>
-          <p:nvPr/>
-        </p:nvSpPr>
-        <p:spPr>
-          <a:xfrm>
-            <a:off x="9189720" y="4050792"/>
-            <a:ext cx="2651760" cy="548640"/>
-          </a:xfrm>
-          <a:prstGeom prst="rect">
-            <a:avLst/>
-          </a:prstGeom>
-          <a:noFill/>
-        </p:spPr>
-        <p:txBody>
-          <a:bodyPr wrap="square">
-            <a:spAutoFit/>
-          </a:bodyPr>
-          <a:lstStyle/>
-          <a:p>
-            <a:pPr algn="l"/>
-            <a:r>
-              <a:rPr sz="1100" b="1" i="0">
-                <a:solidFill>
-                  <a:srgbClr val="0F3460"/>
-                </a:solidFill>
-              </a:rPr>
-              <a:t>Role-Based Security</a:t>
-            </a:r>
-          </a:p>
-        </p:txBody>
-      </p:sp>
-      <p:sp>
-        <p:nvSpPr>
-          <p:cNvPr id="40" name="TextBox 39"/>
-          <p:cNvSpPr txBox="1"/>
-          <p:nvPr/>
-        </p:nvSpPr>
-        <p:spPr>
-          <a:xfrm>
-            <a:off x="8412480" y="4800600"/>
-            <a:ext cx="3383280" cy="1280160"/>
-          </a:xfrm>
-          <a:prstGeom prst="rect">
-            <a:avLst/>
-          </a:prstGeom>
-          <a:noFill/>
-        </p:spPr>
-        <p:txBody>
-          <a:bodyPr wrap="square">
-            <a:spAutoFit/>
-          </a:bodyPr>
-          <a:lstStyle/>
-          <a:p>
-            <a:pPr algn="l"/>
-            <a:r>
-              <a:rPr sz="1000" b="0" i="0">
-                <a:solidFill>
-                  <a:srgbClr val="333333"/>
-                </a:solidFill>
-              </a:rPr>
-              <a:t>Fine-grained access control ensures junior staff cannot modify approved records. Full audit trail on every change.</a:t>
+              <a:t>uc = √(uRef² + uRes² + uRep² + uDrift²)     →     Expanded Uncertainty: U = uc × k   (k=2 for 95% confidence level, normal distribution)</a:t>
             </a:r>
           </a:p>
         </p:txBody>
@@ -23972,6 +27144,1541 @@
 </file>
 
 <file path=ppt/slides/slide7.xml><?xml version="1.0" encoding="utf-8"?>
+<p:sld xmlns:a="http://schemas.openxmlformats.org/drawingml/2006/main" xmlns:p="http://schemas.openxmlformats.org/presentationml/2006/main" xmlns:r="http://schemas.openxmlformats.org/officeDocument/2006/relationships">
+  <p:cSld>
+    <p:bg>
+      <p:bgPr>
+        <a:solidFill>
+          <a:srgbClr val="FFFFFF"/>
+        </a:solidFill>
+        <a:effectLst/>
+      </p:bgPr>
+    </p:bg>
+    <p:spTree>
+      <p:nvGrpSpPr>
+        <p:cNvPr id="1" name=""/>
+        <p:cNvGrpSpPr/>
+        <p:nvPr/>
+      </p:nvGrpSpPr>
+      <p:grpSpPr/>
+      <p:sp>
+        <p:nvSpPr>
+          <p:cNvPr id="2" name="Rectangle 1"/>
+          <p:cNvSpPr/>
+          <p:nvPr/>
+        </p:nvSpPr>
+        <p:spPr>
+          <a:xfrm>
+            <a:off x="0" y="0"/>
+            <a:ext cx="12188952" cy="1051560"/>
+          </a:xfrm>
+          <a:prstGeom prst="rect">
+            <a:avLst/>
+          </a:prstGeom>
+          <a:solidFill>
+            <a:srgbClr val="0F3460"/>
+          </a:solidFill>
+          <a:ln>
+            <a:noFill/>
+          </a:ln>
+        </p:spPr>
+        <p:style>
+          <a:lnRef idx="1">
+            <a:schemeClr val="accent1"/>
+          </a:lnRef>
+          <a:fillRef idx="3">
+            <a:schemeClr val="accent1"/>
+          </a:fillRef>
+          <a:effectRef idx="2">
+            <a:schemeClr val="accent1"/>
+          </a:effectRef>
+          <a:fontRef idx="minor">
+            <a:schemeClr val="lt1"/>
+          </a:fontRef>
+        </p:style>
+        <p:txBody>
+          <a:bodyPr rtlCol="0" anchor="ctr"/>
+          <a:lstStyle/>
+          <a:p>
+            <a:pPr algn="ctr"/>
+          </a:p>
+        </p:txBody>
+      </p:sp>
+      <p:sp>
+        <p:nvSpPr>
+          <p:cNvPr id="3" name="TextBox 2"/>
+          <p:cNvSpPr txBox="1"/>
+          <p:nvPr/>
+        </p:nvSpPr>
+        <p:spPr>
+          <a:xfrm>
+            <a:off x="365760" y="137160"/>
+            <a:ext cx="9144000" cy="685800"/>
+          </a:xfrm>
+          <a:prstGeom prst="rect">
+            <a:avLst/>
+          </a:prstGeom>
+          <a:noFill/>
+        </p:spPr>
+        <p:txBody>
+          <a:bodyPr wrap="square">
+            <a:spAutoFit/>
+          </a:bodyPr>
+          <a:lstStyle/>
+          <a:p>
+            <a:pPr algn="l"/>
+            <a:r>
+              <a:rPr sz="2400" b="1" i="0">
+                <a:solidFill>
+                  <a:srgbClr val="FFFFFF"/>
+                </a:solidFill>
+              </a:rPr>
+              <a:t>Key Benefits of CortexCLMS</a:t>
+            </a:r>
+          </a:p>
+        </p:txBody>
+      </p:sp>
+      <p:sp>
+        <p:nvSpPr>
+          <p:cNvPr id="4" name="TextBox 3"/>
+          <p:cNvSpPr txBox="1"/>
+          <p:nvPr/>
+        </p:nvSpPr>
+        <p:spPr>
+          <a:xfrm>
+            <a:off x="365760" y="594360"/>
+            <a:ext cx="7315200" cy="411480"/>
+          </a:xfrm>
+          <a:prstGeom prst="rect">
+            <a:avLst/>
+          </a:prstGeom>
+          <a:noFill/>
+        </p:spPr>
+        <p:txBody>
+          <a:bodyPr wrap="square">
+            <a:spAutoFit/>
+          </a:bodyPr>
+          <a:lstStyle/>
+          <a:p>
+            <a:pPr algn="l"/>
+            <a:r>
+              <a:rPr sz="1100" b="0" i="0">
+                <a:solidFill>
+                  <a:srgbClr val="B0C4DE"/>
+                </a:solidFill>
+              </a:rPr>
+              <a:t>Measurable impact from day one</a:t>
+            </a:r>
+          </a:p>
+        </p:txBody>
+      </p:sp>
+      <p:sp>
+        <p:nvSpPr>
+          <p:cNvPr id="5" name="Rectangle 4"/>
+          <p:cNvSpPr/>
+          <p:nvPr/>
+        </p:nvSpPr>
+        <p:spPr>
+          <a:xfrm>
+            <a:off x="274320" y="1188720"/>
+            <a:ext cx="3749039" cy="2423160"/>
+          </a:xfrm>
+          <a:prstGeom prst="rect">
+            <a:avLst/>
+          </a:prstGeom>
+          <a:solidFill>
+            <a:srgbClr val="FFFFFF"/>
+          </a:solidFill>
+          <a:ln w="6350">
+            <a:solidFill>
+              <a:srgbClr val="E2E8F0"/>
+            </a:solidFill>
+          </a:ln>
+        </p:spPr>
+        <p:style>
+          <a:lnRef idx="1">
+            <a:schemeClr val="accent1"/>
+          </a:lnRef>
+          <a:fillRef idx="3">
+            <a:schemeClr val="accent1"/>
+          </a:fillRef>
+          <a:effectRef idx="2">
+            <a:schemeClr val="accent1"/>
+          </a:effectRef>
+          <a:fontRef idx="minor">
+            <a:schemeClr val="lt1"/>
+          </a:fontRef>
+        </p:style>
+        <p:txBody>
+          <a:bodyPr rtlCol="0" anchor="ctr"/>
+          <a:lstStyle/>
+          <a:p>
+            <a:pPr algn="ctr"/>
+          </a:p>
+        </p:txBody>
+      </p:sp>
+      <p:sp>
+        <p:nvSpPr>
+          <p:cNvPr id="6" name="Rectangle 5"/>
+          <p:cNvSpPr/>
+          <p:nvPr/>
+        </p:nvSpPr>
+        <p:spPr>
+          <a:xfrm>
+            <a:off x="274320" y="1188720"/>
+            <a:ext cx="3749039" cy="73152"/>
+          </a:xfrm>
+          <a:prstGeom prst="rect">
+            <a:avLst/>
+          </a:prstGeom>
+          <a:solidFill>
+            <a:srgbClr val="E94560"/>
+          </a:solidFill>
+          <a:ln>
+            <a:noFill/>
+          </a:ln>
+        </p:spPr>
+        <p:style>
+          <a:lnRef idx="1">
+            <a:schemeClr val="accent1"/>
+          </a:lnRef>
+          <a:fillRef idx="3">
+            <a:schemeClr val="accent1"/>
+          </a:fillRef>
+          <a:effectRef idx="2">
+            <a:schemeClr val="accent1"/>
+          </a:effectRef>
+          <a:fontRef idx="minor">
+            <a:schemeClr val="lt1"/>
+          </a:fontRef>
+        </p:style>
+        <p:txBody>
+          <a:bodyPr rtlCol="0" anchor="ctr"/>
+          <a:lstStyle/>
+          <a:p>
+            <a:pPr algn="ctr"/>
+          </a:p>
+        </p:txBody>
+      </p:sp>
+      <p:sp>
+        <p:nvSpPr>
+          <p:cNvPr id="7" name="Oval 6"/>
+          <p:cNvSpPr/>
+          <p:nvPr/>
+        </p:nvSpPr>
+        <p:spPr>
+          <a:xfrm>
+            <a:off x="457200" y="1417320"/>
+            <a:ext cx="640080" cy="640080"/>
+          </a:xfrm>
+          <a:prstGeom prst="ellipse">
+            <a:avLst/>
+          </a:prstGeom>
+          <a:solidFill>
+            <a:srgbClr val="E94560"/>
+          </a:solidFill>
+          <a:ln>
+            <a:noFill/>
+          </a:ln>
+        </p:spPr>
+        <p:style>
+          <a:lnRef idx="1">
+            <a:schemeClr val="accent1"/>
+          </a:lnRef>
+          <a:fillRef idx="3">
+            <a:schemeClr val="accent1"/>
+          </a:fillRef>
+          <a:effectRef idx="2">
+            <a:schemeClr val="accent1"/>
+          </a:effectRef>
+          <a:fontRef idx="minor">
+            <a:schemeClr val="lt1"/>
+          </a:fontRef>
+        </p:style>
+        <p:txBody>
+          <a:bodyPr rtlCol="0" anchor="ctr"/>
+          <a:lstStyle/>
+          <a:p>
+            <a:pPr algn="ctr"/>
+          </a:p>
+        </p:txBody>
+      </p:sp>
+      <p:sp>
+        <p:nvSpPr>
+          <p:cNvPr id="8" name="TextBox 7"/>
+          <p:cNvSpPr txBox="1"/>
+          <p:nvPr/>
+        </p:nvSpPr>
+        <p:spPr>
+          <a:xfrm>
+            <a:off x="475488" y="1444752"/>
+            <a:ext cx="603504" cy="457200"/>
+          </a:xfrm>
+          <a:prstGeom prst="rect">
+            <a:avLst/>
+          </a:prstGeom>
+          <a:noFill/>
+        </p:spPr>
+        <p:txBody>
+          <a:bodyPr wrap="square">
+            <a:spAutoFit/>
+          </a:bodyPr>
+          <a:lstStyle/>
+          <a:p>
+            <a:pPr algn="ctr"/>
+            <a:r>
+              <a:rPr sz="1600" b="0" i="0">
+                <a:solidFill>
+                  <a:srgbClr val="FFFFFF"/>
+                </a:solidFill>
+              </a:rPr>
+              <a:t>⚡</a:t>
+            </a:r>
+          </a:p>
+        </p:txBody>
+      </p:sp>
+      <p:sp>
+        <p:nvSpPr>
+          <p:cNvPr id="9" name="TextBox 8"/>
+          <p:cNvSpPr txBox="1"/>
+          <p:nvPr/>
+        </p:nvSpPr>
+        <p:spPr>
+          <a:xfrm>
+            <a:off x="1234440" y="1444752"/>
+            <a:ext cx="2651760" cy="548640"/>
+          </a:xfrm>
+          <a:prstGeom prst="rect">
+            <a:avLst/>
+          </a:prstGeom>
+          <a:noFill/>
+        </p:spPr>
+        <p:txBody>
+          <a:bodyPr wrap="square">
+            <a:spAutoFit/>
+          </a:bodyPr>
+          <a:lstStyle/>
+          <a:p>
+            <a:pPr algn="l"/>
+            <a:r>
+              <a:rPr sz="1100" b="1" i="0">
+                <a:solidFill>
+                  <a:srgbClr val="0F3460"/>
+                </a:solidFill>
+              </a:rPr>
+              <a:t>60% Faster Certificate Issuance</a:t>
+            </a:r>
+          </a:p>
+        </p:txBody>
+      </p:sp>
+      <p:sp>
+        <p:nvSpPr>
+          <p:cNvPr id="10" name="TextBox 9"/>
+          <p:cNvSpPr txBox="1"/>
+          <p:nvPr/>
+        </p:nvSpPr>
+        <p:spPr>
+          <a:xfrm>
+            <a:off x="457200" y="2194560"/>
+            <a:ext cx="3383280" cy="1280160"/>
+          </a:xfrm>
+          <a:prstGeom prst="rect">
+            <a:avLst/>
+          </a:prstGeom>
+          <a:noFill/>
+        </p:spPr>
+        <p:txBody>
+          <a:bodyPr wrap="square">
+            <a:spAutoFit/>
+          </a:bodyPr>
+          <a:lstStyle/>
+          <a:p>
+            <a:pPr algn="l"/>
+            <a:r>
+              <a:rPr sz="1000" b="0" i="0">
+                <a:solidFill>
+                  <a:srgbClr val="333333"/>
+                </a:solidFill>
+              </a:rPr>
+              <a:t>Automated datasheet-to-certificate pipeline eliminates manual re-entry. What took 2 days now takes 2 hours.</a:t>
+            </a:r>
+          </a:p>
+        </p:txBody>
+      </p:sp>
+      <p:sp>
+        <p:nvSpPr>
+          <p:cNvPr id="11" name="Rectangle 10"/>
+          <p:cNvSpPr/>
+          <p:nvPr/>
+        </p:nvSpPr>
+        <p:spPr>
+          <a:xfrm>
+            <a:off x="4251959" y="1188720"/>
+            <a:ext cx="3749039" cy="2423160"/>
+          </a:xfrm>
+          <a:prstGeom prst="rect">
+            <a:avLst/>
+          </a:prstGeom>
+          <a:solidFill>
+            <a:srgbClr val="FFFFFF"/>
+          </a:solidFill>
+          <a:ln w="6350">
+            <a:solidFill>
+              <a:srgbClr val="E2E8F0"/>
+            </a:solidFill>
+          </a:ln>
+        </p:spPr>
+        <p:style>
+          <a:lnRef idx="1">
+            <a:schemeClr val="accent1"/>
+          </a:lnRef>
+          <a:fillRef idx="3">
+            <a:schemeClr val="accent1"/>
+          </a:fillRef>
+          <a:effectRef idx="2">
+            <a:schemeClr val="accent1"/>
+          </a:effectRef>
+          <a:fontRef idx="minor">
+            <a:schemeClr val="lt1"/>
+          </a:fontRef>
+        </p:style>
+        <p:txBody>
+          <a:bodyPr rtlCol="0" anchor="ctr"/>
+          <a:lstStyle/>
+          <a:p>
+            <a:pPr algn="ctr"/>
+          </a:p>
+        </p:txBody>
+      </p:sp>
+      <p:sp>
+        <p:nvSpPr>
+          <p:cNvPr id="12" name="Rectangle 11"/>
+          <p:cNvSpPr/>
+          <p:nvPr/>
+        </p:nvSpPr>
+        <p:spPr>
+          <a:xfrm>
+            <a:off x="4251959" y="1188720"/>
+            <a:ext cx="3749039" cy="73152"/>
+          </a:xfrm>
+          <a:prstGeom prst="rect">
+            <a:avLst/>
+          </a:prstGeom>
+          <a:solidFill>
+            <a:srgbClr val="0F3460"/>
+          </a:solidFill>
+          <a:ln>
+            <a:noFill/>
+          </a:ln>
+        </p:spPr>
+        <p:style>
+          <a:lnRef idx="1">
+            <a:schemeClr val="accent1"/>
+          </a:lnRef>
+          <a:fillRef idx="3">
+            <a:schemeClr val="accent1"/>
+          </a:fillRef>
+          <a:effectRef idx="2">
+            <a:schemeClr val="accent1"/>
+          </a:effectRef>
+          <a:fontRef idx="minor">
+            <a:schemeClr val="lt1"/>
+          </a:fontRef>
+        </p:style>
+        <p:txBody>
+          <a:bodyPr rtlCol="0" anchor="ctr"/>
+          <a:lstStyle/>
+          <a:p>
+            <a:pPr algn="ctr"/>
+          </a:p>
+        </p:txBody>
+      </p:sp>
+      <p:sp>
+        <p:nvSpPr>
+          <p:cNvPr id="13" name="Oval 12"/>
+          <p:cNvSpPr/>
+          <p:nvPr/>
+        </p:nvSpPr>
+        <p:spPr>
+          <a:xfrm>
+            <a:off x="4434840" y="1417320"/>
+            <a:ext cx="640080" cy="640080"/>
+          </a:xfrm>
+          <a:prstGeom prst="ellipse">
+            <a:avLst/>
+          </a:prstGeom>
+          <a:solidFill>
+            <a:srgbClr val="0F3460"/>
+          </a:solidFill>
+          <a:ln>
+            <a:noFill/>
+          </a:ln>
+        </p:spPr>
+        <p:style>
+          <a:lnRef idx="1">
+            <a:schemeClr val="accent1"/>
+          </a:lnRef>
+          <a:fillRef idx="3">
+            <a:schemeClr val="accent1"/>
+          </a:fillRef>
+          <a:effectRef idx="2">
+            <a:schemeClr val="accent1"/>
+          </a:effectRef>
+          <a:fontRef idx="minor">
+            <a:schemeClr val="lt1"/>
+          </a:fontRef>
+        </p:style>
+        <p:txBody>
+          <a:bodyPr rtlCol="0" anchor="ctr"/>
+          <a:lstStyle/>
+          <a:p>
+            <a:pPr algn="ctr"/>
+          </a:p>
+        </p:txBody>
+      </p:sp>
+      <p:sp>
+        <p:nvSpPr>
+          <p:cNvPr id="14" name="TextBox 13"/>
+          <p:cNvSpPr txBox="1"/>
+          <p:nvPr/>
+        </p:nvSpPr>
+        <p:spPr>
+          <a:xfrm>
+            <a:off x="4453127" y="1444752"/>
+            <a:ext cx="603504" cy="457200"/>
+          </a:xfrm>
+          <a:prstGeom prst="rect">
+            <a:avLst/>
+          </a:prstGeom>
+          <a:noFill/>
+        </p:spPr>
+        <p:txBody>
+          <a:bodyPr wrap="square">
+            <a:spAutoFit/>
+          </a:bodyPr>
+          <a:lstStyle/>
+          <a:p>
+            <a:pPr algn="ctr"/>
+            <a:r>
+              <a:rPr sz="1600" b="0" i="0">
+                <a:solidFill>
+                  <a:srgbClr val="FFFFFF"/>
+                </a:solidFill>
+              </a:rPr>
+              <a:t>📋</a:t>
+            </a:r>
+          </a:p>
+        </p:txBody>
+      </p:sp>
+      <p:sp>
+        <p:nvSpPr>
+          <p:cNvPr id="15" name="TextBox 14"/>
+          <p:cNvSpPr txBox="1"/>
+          <p:nvPr/>
+        </p:nvSpPr>
+        <p:spPr>
+          <a:xfrm>
+            <a:off x="5212079" y="1444752"/>
+            <a:ext cx="2651760" cy="548640"/>
+          </a:xfrm>
+          <a:prstGeom prst="rect">
+            <a:avLst/>
+          </a:prstGeom>
+          <a:noFill/>
+        </p:spPr>
+        <p:txBody>
+          <a:bodyPr wrap="square">
+            <a:spAutoFit/>
+          </a:bodyPr>
+          <a:lstStyle/>
+          <a:p>
+            <a:pPr algn="l"/>
+            <a:r>
+              <a:rPr sz="1100" b="1" i="0">
+                <a:solidFill>
+                  <a:srgbClr val="0F3460"/>
+                </a:solidFill>
+              </a:rPr>
+              <a:t>100% NABL Compliance</a:t>
+            </a:r>
+          </a:p>
+        </p:txBody>
+      </p:sp>
+      <p:sp>
+        <p:nvSpPr>
+          <p:cNvPr id="16" name="TextBox 15"/>
+          <p:cNvSpPr txBox="1"/>
+          <p:nvPr/>
+        </p:nvSpPr>
+        <p:spPr>
+          <a:xfrm>
+            <a:off x="4434840" y="2194560"/>
+            <a:ext cx="3383280" cy="1280160"/>
+          </a:xfrm>
+          <a:prstGeom prst="rect">
+            <a:avLst/>
+          </a:prstGeom>
+          <a:noFill/>
+        </p:spPr>
+        <p:txBody>
+          <a:bodyPr wrap="square">
+            <a:spAutoFit/>
+          </a:bodyPr>
+          <a:lstStyle/>
+          <a:p>
+            <a:pPr algn="l"/>
+            <a:r>
+              <a:rPr sz="1000" b="0" i="0">
+                <a:solidFill>
+                  <a:srgbClr val="333333"/>
+                </a:solidFill>
+              </a:rPr>
+              <a:t>Built-in workflows enforce ISO/IEC 17025 requirements. Environmental logs, reference standard tracking, and document control are automatic.</a:t>
+            </a:r>
+          </a:p>
+        </p:txBody>
+      </p:sp>
+      <p:sp>
+        <p:nvSpPr>
+          <p:cNvPr id="17" name="Rectangle 16"/>
+          <p:cNvSpPr/>
+          <p:nvPr/>
+        </p:nvSpPr>
+        <p:spPr>
+          <a:xfrm>
+            <a:off x="8229600" y="1188720"/>
+            <a:ext cx="3749039" cy="2423160"/>
+          </a:xfrm>
+          <a:prstGeom prst="rect">
+            <a:avLst/>
+          </a:prstGeom>
+          <a:solidFill>
+            <a:srgbClr val="FFFFFF"/>
+          </a:solidFill>
+          <a:ln w="6350">
+            <a:solidFill>
+              <a:srgbClr val="E2E8F0"/>
+            </a:solidFill>
+          </a:ln>
+        </p:spPr>
+        <p:style>
+          <a:lnRef idx="1">
+            <a:schemeClr val="accent1"/>
+          </a:lnRef>
+          <a:fillRef idx="3">
+            <a:schemeClr val="accent1"/>
+          </a:fillRef>
+          <a:effectRef idx="2">
+            <a:schemeClr val="accent1"/>
+          </a:effectRef>
+          <a:fontRef idx="minor">
+            <a:schemeClr val="lt1"/>
+          </a:fontRef>
+        </p:style>
+        <p:txBody>
+          <a:bodyPr rtlCol="0" anchor="ctr"/>
+          <a:lstStyle/>
+          <a:p>
+            <a:pPr algn="ctr"/>
+          </a:p>
+        </p:txBody>
+      </p:sp>
+      <p:sp>
+        <p:nvSpPr>
+          <p:cNvPr id="18" name="Rectangle 17"/>
+          <p:cNvSpPr/>
+          <p:nvPr/>
+        </p:nvSpPr>
+        <p:spPr>
+          <a:xfrm>
+            <a:off x="8229600" y="1188720"/>
+            <a:ext cx="3749039" cy="73152"/>
+          </a:xfrm>
+          <a:prstGeom prst="rect">
+            <a:avLst/>
+          </a:prstGeom>
+          <a:solidFill>
+            <a:srgbClr val="52C41A"/>
+          </a:solidFill>
+          <a:ln>
+            <a:noFill/>
+          </a:ln>
+        </p:spPr>
+        <p:style>
+          <a:lnRef idx="1">
+            <a:schemeClr val="accent1"/>
+          </a:lnRef>
+          <a:fillRef idx="3">
+            <a:schemeClr val="accent1"/>
+          </a:fillRef>
+          <a:effectRef idx="2">
+            <a:schemeClr val="accent1"/>
+          </a:effectRef>
+          <a:fontRef idx="minor">
+            <a:schemeClr val="lt1"/>
+          </a:fontRef>
+        </p:style>
+        <p:txBody>
+          <a:bodyPr rtlCol="0" anchor="ctr"/>
+          <a:lstStyle/>
+          <a:p>
+            <a:pPr algn="ctr"/>
+          </a:p>
+        </p:txBody>
+      </p:sp>
+      <p:sp>
+        <p:nvSpPr>
+          <p:cNvPr id="19" name="Oval 18"/>
+          <p:cNvSpPr/>
+          <p:nvPr/>
+        </p:nvSpPr>
+        <p:spPr>
+          <a:xfrm>
+            <a:off x="8412480" y="1417320"/>
+            <a:ext cx="640080" cy="640080"/>
+          </a:xfrm>
+          <a:prstGeom prst="ellipse">
+            <a:avLst/>
+          </a:prstGeom>
+          <a:solidFill>
+            <a:srgbClr val="52C41A"/>
+          </a:solidFill>
+          <a:ln>
+            <a:noFill/>
+          </a:ln>
+        </p:spPr>
+        <p:style>
+          <a:lnRef idx="1">
+            <a:schemeClr val="accent1"/>
+          </a:lnRef>
+          <a:fillRef idx="3">
+            <a:schemeClr val="accent1"/>
+          </a:fillRef>
+          <a:effectRef idx="2">
+            <a:schemeClr val="accent1"/>
+          </a:effectRef>
+          <a:fontRef idx="minor">
+            <a:schemeClr val="lt1"/>
+          </a:fontRef>
+        </p:style>
+        <p:txBody>
+          <a:bodyPr rtlCol="0" anchor="ctr"/>
+          <a:lstStyle/>
+          <a:p>
+            <a:pPr algn="ctr"/>
+          </a:p>
+        </p:txBody>
+      </p:sp>
+      <p:sp>
+        <p:nvSpPr>
+          <p:cNvPr id="20" name="TextBox 19"/>
+          <p:cNvSpPr txBox="1"/>
+          <p:nvPr/>
+        </p:nvSpPr>
+        <p:spPr>
+          <a:xfrm>
+            <a:off x="8430768" y="1444752"/>
+            <a:ext cx="603504" cy="457200"/>
+          </a:xfrm>
+          <a:prstGeom prst="rect">
+            <a:avLst/>
+          </a:prstGeom>
+          <a:noFill/>
+        </p:spPr>
+        <p:txBody>
+          <a:bodyPr wrap="square">
+            <a:spAutoFit/>
+          </a:bodyPr>
+          <a:lstStyle/>
+          <a:p>
+            <a:pPr algn="ctr"/>
+            <a:r>
+              <a:rPr sz="1600" b="0" i="0">
+                <a:solidFill>
+                  <a:srgbClr val="FFFFFF"/>
+                </a:solidFill>
+              </a:rPr>
+              <a:t>💰</a:t>
+            </a:r>
+          </a:p>
+        </p:txBody>
+      </p:sp>
+      <p:sp>
+        <p:nvSpPr>
+          <p:cNvPr id="21" name="TextBox 20"/>
+          <p:cNvSpPr txBox="1"/>
+          <p:nvPr/>
+        </p:nvSpPr>
+        <p:spPr>
+          <a:xfrm>
+            <a:off x="9189720" y="1444752"/>
+            <a:ext cx="2651760" cy="548640"/>
+          </a:xfrm>
+          <a:prstGeom prst="rect">
+            <a:avLst/>
+          </a:prstGeom>
+          <a:noFill/>
+        </p:spPr>
+        <p:txBody>
+          <a:bodyPr wrap="square">
+            <a:spAutoFit/>
+          </a:bodyPr>
+          <a:lstStyle/>
+          <a:p>
+            <a:pPr algn="l"/>
+            <a:r>
+              <a:rPr sz="1100" b="1" i="0">
+                <a:solidFill>
+                  <a:srgbClr val="0F3460"/>
+                </a:solidFill>
+              </a:rPr>
+              <a:t>Zero Revenue Leakage</a:t>
+            </a:r>
+          </a:p>
+        </p:txBody>
+      </p:sp>
+      <p:sp>
+        <p:nvSpPr>
+          <p:cNvPr id="22" name="TextBox 21"/>
+          <p:cNvSpPr txBox="1"/>
+          <p:nvPr/>
+        </p:nvSpPr>
+        <p:spPr>
+          <a:xfrm>
+            <a:off x="8412480" y="2194560"/>
+            <a:ext cx="3383280" cy="1280160"/>
+          </a:xfrm>
+          <a:prstGeom prst="rect">
+            <a:avLst/>
+          </a:prstGeom>
+          <a:noFill/>
+        </p:spPr>
+        <p:txBody>
+          <a:bodyPr wrap="square">
+            <a:spAutoFit/>
+          </a:bodyPr>
+          <a:lstStyle/>
+          <a:p>
+            <a:pPr algn="l"/>
+            <a:r>
+              <a:rPr sz="1000" b="0" i="0">
+                <a:solidFill>
+                  <a:srgbClr val="333333"/>
+                </a:solidFill>
+              </a:rPr>
+              <a:t>Every completed job auto-generates a billing prompt. Pending invoices dashboard prevents forgotten billings. Average recovery: ₹2L/month.</a:t>
+            </a:r>
+          </a:p>
+        </p:txBody>
+      </p:sp>
+      <p:sp>
+        <p:nvSpPr>
+          <p:cNvPr id="23" name="Rectangle 22"/>
+          <p:cNvSpPr/>
+          <p:nvPr/>
+        </p:nvSpPr>
+        <p:spPr>
+          <a:xfrm>
+            <a:off x="274320" y="3794760"/>
+            <a:ext cx="3749039" cy="2423160"/>
+          </a:xfrm>
+          <a:prstGeom prst="rect">
+            <a:avLst/>
+          </a:prstGeom>
+          <a:solidFill>
+            <a:srgbClr val="FFFFFF"/>
+          </a:solidFill>
+          <a:ln w="6350">
+            <a:solidFill>
+              <a:srgbClr val="E2E8F0"/>
+            </a:solidFill>
+          </a:ln>
+        </p:spPr>
+        <p:style>
+          <a:lnRef idx="1">
+            <a:schemeClr val="accent1"/>
+          </a:lnRef>
+          <a:fillRef idx="3">
+            <a:schemeClr val="accent1"/>
+          </a:fillRef>
+          <a:effectRef idx="2">
+            <a:schemeClr val="accent1"/>
+          </a:effectRef>
+          <a:fontRef idx="minor">
+            <a:schemeClr val="lt1"/>
+          </a:fontRef>
+        </p:style>
+        <p:txBody>
+          <a:bodyPr rtlCol="0" anchor="ctr"/>
+          <a:lstStyle/>
+          <a:p>
+            <a:pPr algn="ctr"/>
+          </a:p>
+        </p:txBody>
+      </p:sp>
+      <p:sp>
+        <p:nvSpPr>
+          <p:cNvPr id="24" name="Rectangle 23"/>
+          <p:cNvSpPr/>
+          <p:nvPr/>
+        </p:nvSpPr>
+        <p:spPr>
+          <a:xfrm>
+            <a:off x="274320" y="3794760"/>
+            <a:ext cx="3749039" cy="73152"/>
+          </a:xfrm>
+          <a:prstGeom prst="rect">
+            <a:avLst/>
+          </a:prstGeom>
+          <a:solidFill>
+            <a:srgbClr val="1677FF"/>
+          </a:solidFill>
+          <a:ln>
+            <a:noFill/>
+          </a:ln>
+        </p:spPr>
+        <p:style>
+          <a:lnRef idx="1">
+            <a:schemeClr val="accent1"/>
+          </a:lnRef>
+          <a:fillRef idx="3">
+            <a:schemeClr val="accent1"/>
+          </a:fillRef>
+          <a:effectRef idx="2">
+            <a:schemeClr val="accent1"/>
+          </a:effectRef>
+          <a:fontRef idx="minor">
+            <a:schemeClr val="lt1"/>
+          </a:fontRef>
+        </p:style>
+        <p:txBody>
+          <a:bodyPr rtlCol="0" anchor="ctr"/>
+          <a:lstStyle/>
+          <a:p>
+            <a:pPr algn="ctr"/>
+          </a:p>
+        </p:txBody>
+      </p:sp>
+      <p:sp>
+        <p:nvSpPr>
+          <p:cNvPr id="25" name="Oval 24"/>
+          <p:cNvSpPr/>
+          <p:nvPr/>
+        </p:nvSpPr>
+        <p:spPr>
+          <a:xfrm>
+            <a:off x="457200" y="4023360"/>
+            <a:ext cx="640080" cy="640080"/>
+          </a:xfrm>
+          <a:prstGeom prst="ellipse">
+            <a:avLst/>
+          </a:prstGeom>
+          <a:solidFill>
+            <a:srgbClr val="1677FF"/>
+          </a:solidFill>
+          <a:ln>
+            <a:noFill/>
+          </a:ln>
+        </p:spPr>
+        <p:style>
+          <a:lnRef idx="1">
+            <a:schemeClr val="accent1"/>
+          </a:lnRef>
+          <a:fillRef idx="3">
+            <a:schemeClr val="accent1"/>
+          </a:fillRef>
+          <a:effectRef idx="2">
+            <a:schemeClr val="accent1"/>
+          </a:effectRef>
+          <a:fontRef idx="minor">
+            <a:schemeClr val="lt1"/>
+          </a:fontRef>
+        </p:style>
+        <p:txBody>
+          <a:bodyPr rtlCol="0" anchor="ctr"/>
+          <a:lstStyle/>
+          <a:p>
+            <a:pPr algn="ctr"/>
+          </a:p>
+        </p:txBody>
+      </p:sp>
+      <p:sp>
+        <p:nvSpPr>
+          <p:cNvPr id="26" name="TextBox 25"/>
+          <p:cNvSpPr txBox="1"/>
+          <p:nvPr/>
+        </p:nvSpPr>
+        <p:spPr>
+          <a:xfrm>
+            <a:off x="475488" y="4050792"/>
+            <a:ext cx="603504" cy="457200"/>
+          </a:xfrm>
+          <a:prstGeom prst="rect">
+            <a:avLst/>
+          </a:prstGeom>
+          <a:noFill/>
+        </p:spPr>
+        <p:txBody>
+          <a:bodyPr wrap="square">
+            <a:spAutoFit/>
+          </a:bodyPr>
+          <a:lstStyle/>
+          <a:p>
+            <a:pPr algn="ctr"/>
+            <a:r>
+              <a:rPr sz="1600" b="0" i="0">
+                <a:solidFill>
+                  <a:srgbClr val="FFFFFF"/>
+                </a:solidFill>
+              </a:rPr>
+              <a:t>🌐</a:t>
+            </a:r>
+          </a:p>
+        </p:txBody>
+      </p:sp>
+      <p:sp>
+        <p:nvSpPr>
+          <p:cNvPr id="27" name="TextBox 26"/>
+          <p:cNvSpPr txBox="1"/>
+          <p:nvPr/>
+        </p:nvSpPr>
+        <p:spPr>
+          <a:xfrm>
+            <a:off x="1234440" y="4050792"/>
+            <a:ext cx="2651760" cy="548640"/>
+          </a:xfrm>
+          <a:prstGeom prst="rect">
+            <a:avLst/>
+          </a:prstGeom>
+          <a:noFill/>
+        </p:spPr>
+        <p:txBody>
+          <a:bodyPr wrap="square">
+            <a:spAutoFit/>
+          </a:bodyPr>
+          <a:lstStyle/>
+          <a:p>
+            <a:pPr algn="l"/>
+            <a:r>
+              <a:rPr sz="1100" b="1" i="0">
+                <a:solidFill>
+                  <a:srgbClr val="0F3460"/>
+                </a:solidFill>
+              </a:rPr>
+              <a:t>Customer Self-Service Portal</a:t>
+            </a:r>
+          </a:p>
+        </p:txBody>
+      </p:sp>
+      <p:sp>
+        <p:nvSpPr>
+          <p:cNvPr id="28" name="TextBox 27"/>
+          <p:cNvSpPr txBox="1"/>
+          <p:nvPr/>
+        </p:nvSpPr>
+        <p:spPr>
+          <a:xfrm>
+            <a:off x="457200" y="4800600"/>
+            <a:ext cx="3383280" cy="1280160"/>
+          </a:xfrm>
+          <a:prstGeom prst="rect">
+            <a:avLst/>
+          </a:prstGeom>
+          <a:noFill/>
+        </p:spPr>
+        <p:txBody>
+          <a:bodyPr wrap="square">
+            <a:spAutoFit/>
+          </a:bodyPr>
+          <a:lstStyle/>
+          <a:p>
+            <a:pPr algn="l"/>
+            <a:r>
+              <a:rPr sz="1000" b="0" i="0">
+                <a:solidFill>
+                  <a:srgbClr val="333333"/>
+                </a:solidFill>
+              </a:rPr>
+              <a:t>Customers check job status and download certificates 24/7. Lab support calls reduced by 70%. Customer satisfaction scores up 40%.</a:t>
+            </a:r>
+          </a:p>
+        </p:txBody>
+      </p:sp>
+      <p:sp>
+        <p:nvSpPr>
+          <p:cNvPr id="29" name="Rectangle 28"/>
+          <p:cNvSpPr/>
+          <p:nvPr/>
+        </p:nvSpPr>
+        <p:spPr>
+          <a:xfrm>
+            <a:off x="4251959" y="3794760"/>
+            <a:ext cx="3749039" cy="2423160"/>
+          </a:xfrm>
+          <a:prstGeom prst="rect">
+            <a:avLst/>
+          </a:prstGeom>
+          <a:solidFill>
+            <a:srgbClr val="FFFFFF"/>
+          </a:solidFill>
+          <a:ln w="6350">
+            <a:solidFill>
+              <a:srgbClr val="E2E8F0"/>
+            </a:solidFill>
+          </a:ln>
+        </p:spPr>
+        <p:style>
+          <a:lnRef idx="1">
+            <a:schemeClr val="accent1"/>
+          </a:lnRef>
+          <a:fillRef idx="3">
+            <a:schemeClr val="accent1"/>
+          </a:fillRef>
+          <a:effectRef idx="2">
+            <a:schemeClr val="accent1"/>
+          </a:effectRef>
+          <a:fontRef idx="minor">
+            <a:schemeClr val="lt1"/>
+          </a:fontRef>
+        </p:style>
+        <p:txBody>
+          <a:bodyPr rtlCol="0" anchor="ctr"/>
+          <a:lstStyle/>
+          <a:p>
+            <a:pPr algn="ctr"/>
+          </a:p>
+        </p:txBody>
+      </p:sp>
+      <p:sp>
+        <p:nvSpPr>
+          <p:cNvPr id="30" name="Rectangle 29"/>
+          <p:cNvSpPr/>
+          <p:nvPr/>
+        </p:nvSpPr>
+        <p:spPr>
+          <a:xfrm>
+            <a:off x="4251959" y="3794760"/>
+            <a:ext cx="3749039" cy="73152"/>
+          </a:xfrm>
+          <a:prstGeom prst="rect">
+            <a:avLst/>
+          </a:prstGeom>
+          <a:solidFill>
+            <a:srgbClr val="7C3AED"/>
+          </a:solidFill>
+          <a:ln>
+            <a:noFill/>
+          </a:ln>
+        </p:spPr>
+        <p:style>
+          <a:lnRef idx="1">
+            <a:schemeClr val="accent1"/>
+          </a:lnRef>
+          <a:fillRef idx="3">
+            <a:schemeClr val="accent1"/>
+          </a:fillRef>
+          <a:effectRef idx="2">
+            <a:schemeClr val="accent1"/>
+          </a:effectRef>
+          <a:fontRef idx="minor">
+            <a:schemeClr val="lt1"/>
+          </a:fontRef>
+        </p:style>
+        <p:txBody>
+          <a:bodyPr rtlCol="0" anchor="ctr"/>
+          <a:lstStyle/>
+          <a:p>
+            <a:pPr algn="ctr"/>
+          </a:p>
+        </p:txBody>
+      </p:sp>
+      <p:sp>
+        <p:nvSpPr>
+          <p:cNvPr id="31" name="Oval 30"/>
+          <p:cNvSpPr/>
+          <p:nvPr/>
+        </p:nvSpPr>
+        <p:spPr>
+          <a:xfrm>
+            <a:off x="4434840" y="4023360"/>
+            <a:ext cx="640080" cy="640080"/>
+          </a:xfrm>
+          <a:prstGeom prst="ellipse">
+            <a:avLst/>
+          </a:prstGeom>
+          <a:solidFill>
+            <a:srgbClr val="7C3AED"/>
+          </a:solidFill>
+          <a:ln>
+            <a:noFill/>
+          </a:ln>
+        </p:spPr>
+        <p:style>
+          <a:lnRef idx="1">
+            <a:schemeClr val="accent1"/>
+          </a:lnRef>
+          <a:fillRef idx="3">
+            <a:schemeClr val="accent1"/>
+          </a:fillRef>
+          <a:effectRef idx="2">
+            <a:schemeClr val="accent1"/>
+          </a:effectRef>
+          <a:fontRef idx="minor">
+            <a:schemeClr val="lt1"/>
+          </a:fontRef>
+        </p:style>
+        <p:txBody>
+          <a:bodyPr rtlCol="0" anchor="ctr"/>
+          <a:lstStyle/>
+          <a:p>
+            <a:pPr algn="ctr"/>
+          </a:p>
+        </p:txBody>
+      </p:sp>
+      <p:sp>
+        <p:nvSpPr>
+          <p:cNvPr id="32" name="TextBox 31"/>
+          <p:cNvSpPr txBox="1"/>
+          <p:nvPr/>
+        </p:nvSpPr>
+        <p:spPr>
+          <a:xfrm>
+            <a:off x="4453127" y="4050792"/>
+            <a:ext cx="603504" cy="457200"/>
+          </a:xfrm>
+          <a:prstGeom prst="rect">
+            <a:avLst/>
+          </a:prstGeom>
+          <a:noFill/>
+        </p:spPr>
+        <p:txBody>
+          <a:bodyPr wrap="square">
+            <a:spAutoFit/>
+          </a:bodyPr>
+          <a:lstStyle/>
+          <a:p>
+            <a:pPr algn="ctr"/>
+            <a:r>
+              <a:rPr sz="1600" b="0" i="0">
+                <a:solidFill>
+                  <a:srgbClr val="FFFFFF"/>
+                </a:solidFill>
+              </a:rPr>
+              <a:t>📊</a:t>
+            </a:r>
+          </a:p>
+        </p:txBody>
+      </p:sp>
+      <p:sp>
+        <p:nvSpPr>
+          <p:cNvPr id="33" name="TextBox 32"/>
+          <p:cNvSpPr txBox="1"/>
+          <p:nvPr/>
+        </p:nvSpPr>
+        <p:spPr>
+          <a:xfrm>
+            <a:off x="5212079" y="4050792"/>
+            <a:ext cx="2651760" cy="548640"/>
+          </a:xfrm>
+          <a:prstGeom prst="rect">
+            <a:avLst/>
+          </a:prstGeom>
+          <a:noFill/>
+        </p:spPr>
+        <p:txBody>
+          <a:bodyPr wrap="square">
+            <a:spAutoFit/>
+          </a:bodyPr>
+          <a:lstStyle/>
+          <a:p>
+            <a:pPr algn="l"/>
+            <a:r>
+              <a:rPr sz="1100" b="1" i="0">
+                <a:solidFill>
+                  <a:srgbClr val="0F3460"/>
+                </a:solidFill>
+              </a:rPr>
+              <a:t>Real-Time Analytics</a:t>
+            </a:r>
+          </a:p>
+        </p:txBody>
+      </p:sp>
+      <p:sp>
+        <p:nvSpPr>
+          <p:cNvPr id="34" name="TextBox 33"/>
+          <p:cNvSpPr txBox="1"/>
+          <p:nvPr/>
+        </p:nvSpPr>
+        <p:spPr>
+          <a:xfrm>
+            <a:off x="4434840" y="4800600"/>
+            <a:ext cx="3383280" cy="1280160"/>
+          </a:xfrm>
+          <a:prstGeom prst="rect">
+            <a:avLst/>
+          </a:prstGeom>
+          <a:noFill/>
+        </p:spPr>
+        <p:txBody>
+          <a:bodyPr wrap="square">
+            <a:spAutoFit/>
+          </a:bodyPr>
+          <a:lstStyle/>
+          <a:p>
+            <a:pPr algn="l"/>
+            <a:r>
+              <a:rPr sz="1000" b="0" i="0">
+                <a:solidFill>
+                  <a:srgbClr val="333333"/>
+                </a:solidFill>
+              </a:rPr>
+              <a:t>Engineer productivity, revenue trends, NCR patterns, uncertainty budgets — all in one dashboard. Data-driven decisions replace guesswork.</a:t>
+            </a:r>
+          </a:p>
+        </p:txBody>
+      </p:sp>
+      <p:sp>
+        <p:nvSpPr>
+          <p:cNvPr id="35" name="Rectangle 34"/>
+          <p:cNvSpPr/>
+          <p:nvPr/>
+        </p:nvSpPr>
+        <p:spPr>
+          <a:xfrm>
+            <a:off x="8229600" y="3794760"/>
+            <a:ext cx="3749039" cy="2423160"/>
+          </a:xfrm>
+          <a:prstGeom prst="rect">
+            <a:avLst/>
+          </a:prstGeom>
+          <a:solidFill>
+            <a:srgbClr val="FFFFFF"/>
+          </a:solidFill>
+          <a:ln w="6350">
+            <a:solidFill>
+              <a:srgbClr val="E2E8F0"/>
+            </a:solidFill>
+          </a:ln>
+        </p:spPr>
+        <p:style>
+          <a:lnRef idx="1">
+            <a:schemeClr val="accent1"/>
+          </a:lnRef>
+          <a:fillRef idx="3">
+            <a:schemeClr val="accent1"/>
+          </a:fillRef>
+          <a:effectRef idx="2">
+            <a:schemeClr val="accent1"/>
+          </a:effectRef>
+          <a:fontRef idx="minor">
+            <a:schemeClr val="lt1"/>
+          </a:fontRef>
+        </p:style>
+        <p:txBody>
+          <a:bodyPr rtlCol="0" anchor="ctr"/>
+          <a:lstStyle/>
+          <a:p>
+            <a:pPr algn="ctr"/>
+          </a:p>
+        </p:txBody>
+      </p:sp>
+      <p:sp>
+        <p:nvSpPr>
+          <p:cNvPr id="36" name="Rectangle 35"/>
+          <p:cNvSpPr/>
+          <p:nvPr/>
+        </p:nvSpPr>
+        <p:spPr>
+          <a:xfrm>
+            <a:off x="8229600" y="3794760"/>
+            <a:ext cx="3749039" cy="73152"/>
+          </a:xfrm>
+          <a:prstGeom prst="rect">
+            <a:avLst/>
+          </a:prstGeom>
+          <a:solidFill>
+            <a:srgbClr val="F5A623"/>
+          </a:solidFill>
+          <a:ln>
+            <a:noFill/>
+          </a:ln>
+        </p:spPr>
+        <p:style>
+          <a:lnRef idx="1">
+            <a:schemeClr val="accent1"/>
+          </a:lnRef>
+          <a:fillRef idx="3">
+            <a:schemeClr val="accent1"/>
+          </a:fillRef>
+          <a:effectRef idx="2">
+            <a:schemeClr val="accent1"/>
+          </a:effectRef>
+          <a:fontRef idx="minor">
+            <a:schemeClr val="lt1"/>
+          </a:fontRef>
+        </p:style>
+        <p:txBody>
+          <a:bodyPr rtlCol="0" anchor="ctr"/>
+          <a:lstStyle/>
+          <a:p>
+            <a:pPr algn="ctr"/>
+          </a:p>
+        </p:txBody>
+      </p:sp>
+      <p:sp>
+        <p:nvSpPr>
+          <p:cNvPr id="37" name="Oval 36"/>
+          <p:cNvSpPr/>
+          <p:nvPr/>
+        </p:nvSpPr>
+        <p:spPr>
+          <a:xfrm>
+            <a:off x="8412480" y="4023360"/>
+            <a:ext cx="640080" cy="640080"/>
+          </a:xfrm>
+          <a:prstGeom prst="ellipse">
+            <a:avLst/>
+          </a:prstGeom>
+          <a:solidFill>
+            <a:srgbClr val="F5A623"/>
+          </a:solidFill>
+          <a:ln>
+            <a:noFill/>
+          </a:ln>
+        </p:spPr>
+        <p:style>
+          <a:lnRef idx="1">
+            <a:schemeClr val="accent1"/>
+          </a:lnRef>
+          <a:fillRef idx="3">
+            <a:schemeClr val="accent1"/>
+          </a:fillRef>
+          <a:effectRef idx="2">
+            <a:schemeClr val="accent1"/>
+          </a:effectRef>
+          <a:fontRef idx="minor">
+            <a:schemeClr val="lt1"/>
+          </a:fontRef>
+        </p:style>
+        <p:txBody>
+          <a:bodyPr rtlCol="0" anchor="ctr"/>
+          <a:lstStyle/>
+          <a:p>
+            <a:pPr algn="ctr"/>
+          </a:p>
+        </p:txBody>
+      </p:sp>
+      <p:sp>
+        <p:nvSpPr>
+          <p:cNvPr id="38" name="TextBox 37"/>
+          <p:cNvSpPr txBox="1"/>
+          <p:nvPr/>
+        </p:nvSpPr>
+        <p:spPr>
+          <a:xfrm>
+            <a:off x="8430768" y="4050792"/>
+            <a:ext cx="603504" cy="457200"/>
+          </a:xfrm>
+          <a:prstGeom prst="rect">
+            <a:avLst/>
+          </a:prstGeom>
+          <a:noFill/>
+        </p:spPr>
+        <p:txBody>
+          <a:bodyPr wrap="square">
+            <a:spAutoFit/>
+          </a:bodyPr>
+          <a:lstStyle/>
+          <a:p>
+            <a:pPr algn="ctr"/>
+            <a:r>
+              <a:rPr sz="1600" b="0" i="0">
+                <a:solidFill>
+                  <a:srgbClr val="FFFFFF"/>
+                </a:solidFill>
+              </a:rPr>
+              <a:t>🔐</a:t>
+            </a:r>
+          </a:p>
+        </p:txBody>
+      </p:sp>
+      <p:sp>
+        <p:nvSpPr>
+          <p:cNvPr id="39" name="TextBox 38"/>
+          <p:cNvSpPr txBox="1"/>
+          <p:nvPr/>
+        </p:nvSpPr>
+        <p:spPr>
+          <a:xfrm>
+            <a:off x="9189720" y="4050792"/>
+            <a:ext cx="2651760" cy="548640"/>
+          </a:xfrm>
+          <a:prstGeom prst="rect">
+            <a:avLst/>
+          </a:prstGeom>
+          <a:noFill/>
+        </p:spPr>
+        <p:txBody>
+          <a:bodyPr wrap="square">
+            <a:spAutoFit/>
+          </a:bodyPr>
+          <a:lstStyle/>
+          <a:p>
+            <a:pPr algn="l"/>
+            <a:r>
+              <a:rPr sz="1100" b="1" i="0">
+                <a:solidFill>
+                  <a:srgbClr val="0F3460"/>
+                </a:solidFill>
+              </a:rPr>
+              <a:t>Role-Based Security</a:t>
+            </a:r>
+          </a:p>
+        </p:txBody>
+      </p:sp>
+      <p:sp>
+        <p:nvSpPr>
+          <p:cNvPr id="40" name="TextBox 39"/>
+          <p:cNvSpPr txBox="1"/>
+          <p:nvPr/>
+        </p:nvSpPr>
+        <p:spPr>
+          <a:xfrm>
+            <a:off x="8412480" y="4800600"/>
+            <a:ext cx="3383280" cy="1280160"/>
+          </a:xfrm>
+          <a:prstGeom prst="rect">
+            <a:avLst/>
+          </a:prstGeom>
+          <a:noFill/>
+        </p:spPr>
+        <p:txBody>
+          <a:bodyPr wrap="square">
+            <a:spAutoFit/>
+          </a:bodyPr>
+          <a:lstStyle/>
+          <a:p>
+            <a:pPr algn="l"/>
+            <a:r>
+              <a:rPr sz="1000" b="0" i="0">
+                <a:solidFill>
+                  <a:srgbClr val="333333"/>
+                </a:solidFill>
+              </a:rPr>
+              <a:t>Fine-grained access control ensures junior staff cannot modify approved records. Full audit trail on every change.</a:t>
+            </a:r>
+          </a:p>
+        </p:txBody>
+      </p:sp>
+    </p:spTree>
+  </p:cSld>
+  <p:clrMapOvr>
+    <a:masterClrMapping/>
+  </p:clrMapOvr>
+</p:sld>
+</file>
+
+<file path=ppt/slides/slide8.xml><?xml version="1.0" encoding="utf-8"?>
 <p:sld xmlns:a="http://schemas.openxmlformats.org/drawingml/2006/main" xmlns:p="http://schemas.openxmlformats.org/presentationml/2006/main" xmlns:r="http://schemas.openxmlformats.org/officeDocument/2006/relationships">
   <p:cSld>
     <p:bg>
@@ -26944,7 +31651,7 @@
 </p:sld>
 </file>
 
-<file path=ppt/slides/slide8.xml><?xml version="1.0" encoding="utf-8"?>
+<file path=ppt/slides/slide9.xml><?xml version="1.0" encoding="utf-8"?>
 <p:sld xmlns:a="http://schemas.openxmlformats.org/drawingml/2006/main" xmlns:p="http://schemas.openxmlformats.org/presentationml/2006/main" xmlns:r="http://schemas.openxmlformats.org/officeDocument/2006/relationships">
   <p:cSld>
     <p:bg>
@@ -27474,2992 +32181,6 @@
                 </a:solidFill>
               </a:rPr>
               <a:t>Call Reduction</a:t>
-            </a:r>
-          </a:p>
-        </p:txBody>
-      </p:sp>
-    </p:spTree>
-  </p:cSld>
-  <p:clrMapOvr>
-    <a:masterClrMapping/>
-  </p:clrMapOvr>
-</p:sld>
-</file>
-
-<file path=ppt/slides/slide9.xml><?xml version="1.0" encoding="utf-8"?>
-<p:sld xmlns:a="http://schemas.openxmlformats.org/drawingml/2006/main" xmlns:p="http://schemas.openxmlformats.org/presentationml/2006/main" xmlns:r="http://schemas.openxmlformats.org/officeDocument/2006/relationships">
-  <p:cSld>
-    <p:bg>
-      <p:bgPr>
-        <a:solidFill>
-          <a:srgbClr val="F5F7FA"/>
-        </a:solidFill>
-        <a:effectLst/>
-      </p:bgPr>
-    </p:bg>
-    <p:spTree>
-      <p:nvGrpSpPr>
-        <p:cNvPr id="1" name=""/>
-        <p:cNvGrpSpPr/>
-        <p:nvPr/>
-      </p:nvGrpSpPr>
-      <p:grpSpPr/>
-      <p:sp>
-        <p:nvSpPr>
-          <p:cNvPr id="2" name="Rectangle 1"/>
-          <p:cNvSpPr/>
-          <p:nvPr/>
-        </p:nvSpPr>
-        <p:spPr>
-          <a:xfrm>
-            <a:off x="0" y="0"/>
-            <a:ext cx="12188952" cy="1051560"/>
-          </a:xfrm>
-          <a:prstGeom prst="rect">
-            <a:avLst/>
-          </a:prstGeom>
-          <a:solidFill>
-            <a:srgbClr val="0F3460"/>
-          </a:solidFill>
-          <a:ln>
-            <a:noFill/>
-          </a:ln>
-        </p:spPr>
-        <p:style>
-          <a:lnRef idx="1">
-            <a:schemeClr val="accent1"/>
-          </a:lnRef>
-          <a:fillRef idx="3">
-            <a:schemeClr val="accent1"/>
-          </a:fillRef>
-          <a:effectRef idx="2">
-            <a:schemeClr val="accent1"/>
-          </a:effectRef>
-          <a:fontRef idx="minor">
-            <a:schemeClr val="lt1"/>
-          </a:fontRef>
-        </p:style>
-        <p:txBody>
-          <a:bodyPr rtlCol="0" anchor="ctr"/>
-          <a:lstStyle/>
-          <a:p>
-            <a:pPr algn="ctr"/>
-          </a:p>
-        </p:txBody>
-      </p:sp>
-      <p:sp>
-        <p:nvSpPr>
-          <p:cNvPr id="3" name="TextBox 2"/>
-          <p:cNvSpPr txBox="1"/>
-          <p:nvPr/>
-        </p:nvSpPr>
-        <p:spPr>
-          <a:xfrm>
-            <a:off x="365760" y="137160"/>
-            <a:ext cx="9144000" cy="685800"/>
-          </a:xfrm>
-          <a:prstGeom prst="rect">
-            <a:avLst/>
-          </a:prstGeom>
-          <a:noFill/>
-        </p:spPr>
-        <p:txBody>
-          <a:bodyPr wrap="square">
-            <a:spAutoFit/>
-          </a:bodyPr>
-          <a:lstStyle/>
-          <a:p>
-            <a:pPr algn="l"/>
-            <a:r>
-              <a:rPr sz="2600" b="1" i="0">
-                <a:solidFill>
-                  <a:srgbClr val="FFFFFF"/>
-                </a:solidFill>
-              </a:rPr>
-              <a:t>CortexCLMS Pricing Plans</a:t>
-            </a:r>
-          </a:p>
-        </p:txBody>
-      </p:sp>
-      <p:sp>
-        <p:nvSpPr>
-          <p:cNvPr id="4" name="TextBox 3"/>
-          <p:cNvSpPr txBox="1"/>
-          <p:nvPr/>
-        </p:nvSpPr>
-        <p:spPr>
-          <a:xfrm>
-            <a:off x="365760" y="594360"/>
-            <a:ext cx="9144000" cy="411480"/>
-          </a:xfrm>
-          <a:prstGeom prst="rect">
-            <a:avLst/>
-          </a:prstGeom>
-          <a:noFill/>
-        </p:spPr>
-        <p:txBody>
-          <a:bodyPr wrap="square">
-            <a:spAutoFit/>
-          </a:bodyPr>
-          <a:lstStyle/>
-          <a:p>
-            <a:pPr algn="l"/>
-            <a:r>
-              <a:rPr sz="1100" b="0" i="0">
-                <a:solidFill>
-                  <a:srgbClr val="B0C4DE"/>
-                </a:solidFill>
-              </a:rPr>
-              <a:t>Transparent, all-inclusive pricing — no hidden charges</a:t>
-            </a:r>
-          </a:p>
-        </p:txBody>
-      </p:sp>
-      <p:sp>
-        <p:nvSpPr>
-          <p:cNvPr id="5" name="Rectangle 4"/>
-          <p:cNvSpPr/>
-          <p:nvPr/>
-        </p:nvSpPr>
-        <p:spPr>
-          <a:xfrm>
-            <a:off x="283464" y="1197864"/>
-            <a:ext cx="2788920" cy="5394960"/>
-          </a:xfrm>
-          <a:prstGeom prst="rect">
-            <a:avLst/>
-          </a:prstGeom>
-          <a:solidFill>
-            <a:srgbClr val="CCCCCC"/>
-          </a:solidFill>
-          <a:ln>
-            <a:noFill/>
-          </a:ln>
-        </p:spPr>
-        <p:style>
-          <a:lnRef idx="1">
-            <a:schemeClr val="accent1"/>
-          </a:lnRef>
-          <a:fillRef idx="3">
-            <a:schemeClr val="accent1"/>
-          </a:fillRef>
-          <a:effectRef idx="2">
-            <a:schemeClr val="accent1"/>
-          </a:effectRef>
-          <a:fontRef idx="minor">
-            <a:schemeClr val="lt1"/>
-          </a:fontRef>
-        </p:style>
-        <p:txBody>
-          <a:bodyPr rtlCol="0" anchor="ctr"/>
-          <a:lstStyle/>
-          <a:p>
-            <a:pPr algn="ctr"/>
-          </a:p>
-        </p:txBody>
-      </p:sp>
-      <p:sp>
-        <p:nvSpPr>
-          <p:cNvPr id="6" name="Rectangle 5"/>
-          <p:cNvSpPr/>
-          <p:nvPr/>
-        </p:nvSpPr>
-        <p:spPr>
-          <a:xfrm>
-            <a:off x="228600" y="1143000"/>
-            <a:ext cx="2788920" cy="5394960"/>
-          </a:xfrm>
-          <a:prstGeom prst="rect">
-            <a:avLst/>
-          </a:prstGeom>
-          <a:solidFill>
-            <a:srgbClr val="FFFFFF"/>
-          </a:solidFill>
-          <a:ln w="6350">
-            <a:solidFill>
-              <a:srgbClr val="E2E8F0"/>
-            </a:solidFill>
-          </a:ln>
-        </p:spPr>
-        <p:style>
-          <a:lnRef idx="1">
-            <a:schemeClr val="accent1"/>
-          </a:lnRef>
-          <a:fillRef idx="3">
-            <a:schemeClr val="accent1"/>
-          </a:fillRef>
-          <a:effectRef idx="2">
-            <a:schemeClr val="accent1"/>
-          </a:effectRef>
-          <a:fontRef idx="minor">
-            <a:schemeClr val="lt1"/>
-          </a:fontRef>
-        </p:style>
-        <p:txBody>
-          <a:bodyPr rtlCol="0" anchor="ctr"/>
-          <a:lstStyle/>
-          <a:p>
-            <a:pPr algn="ctr"/>
-          </a:p>
-        </p:txBody>
-      </p:sp>
-      <p:sp>
-        <p:nvSpPr>
-          <p:cNvPr id="7" name="Rectangle 6"/>
-          <p:cNvSpPr/>
-          <p:nvPr/>
-        </p:nvSpPr>
-        <p:spPr>
-          <a:xfrm>
-            <a:off x="228600" y="1143000"/>
-            <a:ext cx="2788920" cy="1188720"/>
-          </a:xfrm>
-          <a:prstGeom prst="rect">
-            <a:avLst/>
-          </a:prstGeom>
-          <a:solidFill>
-            <a:srgbClr val="0F3460"/>
-          </a:solidFill>
-          <a:ln>
-            <a:noFill/>
-          </a:ln>
-        </p:spPr>
-        <p:style>
-          <a:lnRef idx="1">
-            <a:schemeClr val="accent1"/>
-          </a:lnRef>
-          <a:fillRef idx="3">
-            <a:schemeClr val="accent1"/>
-          </a:fillRef>
-          <a:effectRef idx="2">
-            <a:schemeClr val="accent1"/>
-          </a:effectRef>
-          <a:fontRef idx="minor">
-            <a:schemeClr val="lt1"/>
-          </a:fontRef>
-        </p:style>
-        <p:txBody>
-          <a:bodyPr rtlCol="0" anchor="ctr"/>
-          <a:lstStyle/>
-          <a:p>
-            <a:pPr algn="ctr"/>
-          </a:p>
-        </p:txBody>
-      </p:sp>
-      <p:sp>
-        <p:nvSpPr>
-          <p:cNvPr id="8" name="TextBox 7"/>
-          <p:cNvSpPr txBox="1"/>
-          <p:nvPr/>
-        </p:nvSpPr>
-        <p:spPr>
-          <a:xfrm>
-            <a:off x="228600" y="1234440"/>
-            <a:ext cx="2788920" cy="411480"/>
-          </a:xfrm>
-          <a:prstGeom prst="rect">
-            <a:avLst/>
-          </a:prstGeom>
-          <a:noFill/>
-        </p:spPr>
-        <p:txBody>
-          <a:bodyPr wrap="square">
-            <a:spAutoFit/>
-          </a:bodyPr>
-          <a:lstStyle/>
-          <a:p>
-            <a:pPr algn="ctr"/>
-            <a:r>
-              <a:rPr sz="1800" b="0" i="0">
-                <a:solidFill>
-                  <a:srgbClr val="FFFFFF"/>
-                </a:solidFill>
-              </a:rPr>
-              <a:t>🚀</a:t>
-            </a:r>
-          </a:p>
-        </p:txBody>
-      </p:sp>
-      <p:sp>
-        <p:nvSpPr>
-          <p:cNvPr id="9" name="TextBox 8"/>
-          <p:cNvSpPr txBox="1"/>
-          <p:nvPr/>
-        </p:nvSpPr>
-        <p:spPr>
-          <a:xfrm>
-            <a:off x="228600" y="1618488"/>
-            <a:ext cx="2788920" cy="365760"/>
-          </a:xfrm>
-          <a:prstGeom prst="rect">
-            <a:avLst/>
-          </a:prstGeom>
-          <a:noFill/>
-        </p:spPr>
-        <p:txBody>
-          <a:bodyPr wrap="square">
-            <a:spAutoFit/>
-          </a:bodyPr>
-          <a:lstStyle/>
-          <a:p>
-            <a:pPr algn="ctr"/>
-            <a:r>
-              <a:rPr sz="1400" b="1" i="0">
-                <a:solidFill>
-                  <a:srgbClr val="FFFFFF"/>
-                </a:solidFill>
-              </a:rPr>
-              <a:t>Starter</a:t>
-            </a:r>
-          </a:p>
-        </p:txBody>
-      </p:sp>
-      <p:sp>
-        <p:nvSpPr>
-          <p:cNvPr id="10" name="TextBox 9"/>
-          <p:cNvSpPr txBox="1"/>
-          <p:nvPr/>
-        </p:nvSpPr>
-        <p:spPr>
-          <a:xfrm>
-            <a:off x="228600" y="1965960"/>
-            <a:ext cx="2788920" cy="274320"/>
-          </a:xfrm>
-          <a:prstGeom prst="rect">
-            <a:avLst/>
-          </a:prstGeom>
-          <a:noFill/>
-        </p:spPr>
-        <p:txBody>
-          <a:bodyPr wrap="square">
-            <a:spAutoFit/>
-          </a:bodyPr>
-          <a:lstStyle/>
-          <a:p>
-            <a:pPr algn="ctr"/>
-            <a:r>
-              <a:rPr sz="850" b="0" i="0">
-                <a:solidFill>
-                  <a:srgbClr val="CCDDFF"/>
-                </a:solidFill>
-              </a:rPr>
-              <a:t>Up to 25 Users</a:t>
-            </a:r>
-          </a:p>
-        </p:txBody>
-      </p:sp>
-      <p:sp>
-        <p:nvSpPr>
-          <p:cNvPr id="11" name="Rectangle 10"/>
-          <p:cNvSpPr/>
-          <p:nvPr/>
-        </p:nvSpPr>
-        <p:spPr>
-          <a:xfrm>
-            <a:off x="228600" y="2331720"/>
-            <a:ext cx="2788920" cy="502920"/>
-          </a:xfrm>
-          <a:prstGeom prst="rect">
-            <a:avLst/>
-          </a:prstGeom>
-          <a:solidFill>
-            <a:srgbClr val="F5F7FA"/>
-          </a:solidFill>
-          <a:ln>
-            <a:noFill/>
-          </a:ln>
-        </p:spPr>
-        <p:style>
-          <a:lnRef idx="1">
-            <a:schemeClr val="accent1"/>
-          </a:lnRef>
-          <a:fillRef idx="3">
-            <a:schemeClr val="accent1"/>
-          </a:fillRef>
-          <a:effectRef idx="2">
-            <a:schemeClr val="accent1"/>
-          </a:effectRef>
-          <a:fontRef idx="minor">
-            <a:schemeClr val="lt1"/>
-          </a:fontRef>
-        </p:style>
-        <p:txBody>
-          <a:bodyPr rtlCol="0" anchor="ctr"/>
-          <a:lstStyle/>
-          <a:p>
-            <a:pPr algn="ctr"/>
-          </a:p>
-        </p:txBody>
-      </p:sp>
-      <p:sp>
-        <p:nvSpPr>
-          <p:cNvPr id="12" name="TextBox 11"/>
-          <p:cNvSpPr txBox="1"/>
-          <p:nvPr/>
-        </p:nvSpPr>
-        <p:spPr>
-          <a:xfrm>
-            <a:off x="320040" y="2350008"/>
-            <a:ext cx="2606039" cy="228600"/>
-          </a:xfrm>
-          <a:prstGeom prst="rect">
-            <a:avLst/>
-          </a:prstGeom>
-          <a:noFill/>
-        </p:spPr>
-        <p:txBody>
-          <a:bodyPr wrap="square">
-            <a:spAutoFit/>
-          </a:bodyPr>
-          <a:lstStyle/>
-          <a:p>
-            <a:pPr algn="l"/>
-            <a:r>
-              <a:rPr sz="750" b="0" i="0">
-                <a:solidFill>
-                  <a:srgbClr val="888888"/>
-                </a:solidFill>
-              </a:rPr>
-              <a:t>Implementation &amp; Onboarding</a:t>
-            </a:r>
-          </a:p>
-        </p:txBody>
-      </p:sp>
-      <p:sp>
-        <p:nvSpPr>
-          <p:cNvPr id="13" name="TextBox 12"/>
-          <p:cNvSpPr txBox="1"/>
-          <p:nvPr/>
-        </p:nvSpPr>
-        <p:spPr>
-          <a:xfrm>
-            <a:off x="320040" y="2560320"/>
-            <a:ext cx="2606039" cy="228600"/>
-          </a:xfrm>
-          <a:prstGeom prst="rect">
-            <a:avLst/>
-          </a:prstGeom>
-          <a:noFill/>
-        </p:spPr>
-        <p:txBody>
-          <a:bodyPr wrap="square">
-            <a:spAutoFit/>
-          </a:bodyPr>
-          <a:lstStyle/>
-          <a:p>
-            <a:pPr algn="l"/>
-            <a:r>
-              <a:rPr sz="1100" b="1" i="0">
-                <a:solidFill>
-                  <a:srgbClr val="0F3460"/>
-                </a:solidFill>
-              </a:rPr>
-              <a:t>₹99,999</a:t>
-            </a:r>
-          </a:p>
-        </p:txBody>
-      </p:sp>
-      <p:sp>
-        <p:nvSpPr>
-          <p:cNvPr id="14" name="Rectangle 13"/>
-          <p:cNvSpPr/>
-          <p:nvPr/>
-        </p:nvSpPr>
-        <p:spPr>
-          <a:xfrm>
-            <a:off x="228600" y="2834640"/>
-            <a:ext cx="2788920" cy="640080"/>
-          </a:xfrm>
-          <a:prstGeom prst="rect">
-            <a:avLst/>
-          </a:prstGeom>
-          <a:solidFill>
-            <a:srgbClr val="0F3460"/>
-          </a:solidFill>
-          <a:ln>
-            <a:noFill/>
-          </a:ln>
-        </p:spPr>
-        <p:style>
-          <a:lnRef idx="1">
-            <a:schemeClr val="accent1"/>
-          </a:lnRef>
-          <a:fillRef idx="3">
-            <a:schemeClr val="accent1"/>
-          </a:fillRef>
-          <a:effectRef idx="2">
-            <a:schemeClr val="accent1"/>
-          </a:effectRef>
-          <a:fontRef idx="minor">
-            <a:schemeClr val="lt1"/>
-          </a:fontRef>
-        </p:style>
-        <p:txBody>
-          <a:bodyPr rtlCol="0" anchor="ctr"/>
-          <a:lstStyle/>
-          <a:p>
-            <a:pPr algn="ctr"/>
-          </a:p>
-        </p:txBody>
-      </p:sp>
-      <p:sp>
-        <p:nvSpPr>
-          <p:cNvPr id="15" name="TextBox 14"/>
-          <p:cNvSpPr txBox="1"/>
-          <p:nvPr/>
-        </p:nvSpPr>
-        <p:spPr>
-          <a:xfrm>
-            <a:off x="228600" y="2880360"/>
-            <a:ext cx="2788920" cy="347472"/>
-          </a:xfrm>
-          <a:prstGeom prst="rect">
-            <a:avLst/>
-          </a:prstGeom>
-          <a:noFill/>
-        </p:spPr>
-        <p:txBody>
-          <a:bodyPr wrap="square">
-            <a:spAutoFit/>
-          </a:bodyPr>
-          <a:lstStyle/>
-          <a:p>
-            <a:pPr algn="ctr"/>
-            <a:r>
-              <a:rPr sz="1600" b="1" i="0">
-                <a:solidFill>
-                  <a:srgbClr val="FFFFFF"/>
-                </a:solidFill>
-              </a:rPr>
-              <a:t>₹15,000/month</a:t>
-            </a:r>
-          </a:p>
-        </p:txBody>
-      </p:sp>
-      <p:sp>
-        <p:nvSpPr>
-          <p:cNvPr id="16" name="TextBox 15"/>
-          <p:cNvSpPr txBox="1"/>
-          <p:nvPr/>
-        </p:nvSpPr>
-        <p:spPr>
-          <a:xfrm>
-            <a:off x="228600" y="3227832"/>
-            <a:ext cx="2788920" cy="201168"/>
-          </a:xfrm>
-          <a:prstGeom prst="rect">
-            <a:avLst/>
-          </a:prstGeom>
-          <a:noFill/>
-        </p:spPr>
-        <p:txBody>
-          <a:bodyPr wrap="square">
-            <a:spAutoFit/>
-          </a:bodyPr>
-          <a:lstStyle/>
-          <a:p>
-            <a:pPr algn="ctr"/>
-            <a:r>
-              <a:rPr sz="750" b="0" i="0">
-                <a:solidFill>
-                  <a:srgbClr val="CCDDFF"/>
-                </a:solidFill>
-              </a:rPr>
-              <a:t>Monthly Subscription</a:t>
-            </a:r>
-          </a:p>
-        </p:txBody>
-      </p:sp>
-      <p:sp>
-        <p:nvSpPr>
-          <p:cNvPr id="17" name="TextBox 16"/>
-          <p:cNvSpPr txBox="1"/>
-          <p:nvPr/>
-        </p:nvSpPr>
-        <p:spPr>
-          <a:xfrm>
-            <a:off x="365760" y="3611880"/>
-            <a:ext cx="2560320" cy="347472"/>
-          </a:xfrm>
-          <a:prstGeom prst="rect">
-            <a:avLst/>
-          </a:prstGeom>
-          <a:noFill/>
-        </p:spPr>
-        <p:txBody>
-          <a:bodyPr wrap="square">
-            <a:spAutoFit/>
-          </a:bodyPr>
-          <a:lstStyle/>
-          <a:p>
-            <a:pPr algn="l"/>
-            <a:r>
-              <a:rPr sz="900" b="0" i="0">
-                <a:solidFill>
-                  <a:srgbClr val="333333"/>
-                </a:solidFill>
-              </a:rPr>
-              <a:t>✓  All Core Modules</a:t>
-            </a:r>
-          </a:p>
-        </p:txBody>
-      </p:sp>
-      <p:sp>
-        <p:nvSpPr>
-          <p:cNvPr id="18" name="TextBox 17"/>
-          <p:cNvSpPr txBox="1"/>
-          <p:nvPr/>
-        </p:nvSpPr>
-        <p:spPr>
-          <a:xfrm>
-            <a:off x="365760" y="3995928"/>
-            <a:ext cx="2560320" cy="347472"/>
-          </a:xfrm>
-          <a:prstGeom prst="rect">
-            <a:avLst/>
-          </a:prstGeom>
-          <a:noFill/>
-        </p:spPr>
-        <p:txBody>
-          <a:bodyPr wrap="square">
-            <a:spAutoFit/>
-          </a:bodyPr>
-          <a:lstStyle/>
-          <a:p>
-            <a:pPr algn="l"/>
-            <a:r>
-              <a:rPr sz="900" b="0" i="0">
-                <a:solidFill>
-                  <a:srgbClr val="333333"/>
-                </a:solidFill>
-              </a:rPr>
-              <a:t>✓  5 Engineer Accounts</a:t>
-            </a:r>
-          </a:p>
-        </p:txBody>
-      </p:sp>
-      <p:sp>
-        <p:nvSpPr>
-          <p:cNvPr id="19" name="TextBox 18"/>
-          <p:cNvSpPr txBox="1"/>
-          <p:nvPr/>
-        </p:nvSpPr>
-        <p:spPr>
-          <a:xfrm>
-            <a:off x="365760" y="4379976"/>
-            <a:ext cx="2560320" cy="347472"/>
-          </a:xfrm>
-          <a:prstGeom prst="rect">
-            <a:avLst/>
-          </a:prstGeom>
-          <a:noFill/>
-        </p:spPr>
-        <p:txBody>
-          <a:bodyPr wrap="square">
-            <a:spAutoFit/>
-          </a:bodyPr>
-          <a:lstStyle/>
-          <a:p>
-            <a:pPr algn="l"/>
-            <a:r>
-              <a:rPr sz="900" b="0" i="0">
-                <a:solidFill>
-                  <a:srgbClr val="333333"/>
-                </a:solidFill>
-              </a:rPr>
-              <a:t>✓  Email Support</a:t>
-            </a:r>
-          </a:p>
-        </p:txBody>
-      </p:sp>
-      <p:sp>
-        <p:nvSpPr>
-          <p:cNvPr id="20" name="TextBox 19"/>
-          <p:cNvSpPr txBox="1"/>
-          <p:nvPr/>
-        </p:nvSpPr>
-        <p:spPr>
-          <a:xfrm>
-            <a:off x="365760" y="4764024"/>
-            <a:ext cx="2560320" cy="347472"/>
-          </a:xfrm>
-          <a:prstGeom prst="rect">
-            <a:avLst/>
-          </a:prstGeom>
-          <a:noFill/>
-        </p:spPr>
-        <p:txBody>
-          <a:bodyPr wrap="square">
-            <a:spAutoFit/>
-          </a:bodyPr>
-          <a:lstStyle/>
-          <a:p>
-            <a:pPr algn="l"/>
-            <a:r>
-              <a:rPr sz="900" b="0" i="0">
-                <a:solidFill>
-                  <a:srgbClr val="333333"/>
-                </a:solidFill>
-              </a:rPr>
-              <a:t>✓  1 Lab Location</a:t>
-            </a:r>
-          </a:p>
-        </p:txBody>
-      </p:sp>
-      <p:sp>
-        <p:nvSpPr>
-          <p:cNvPr id="21" name="TextBox 20"/>
-          <p:cNvSpPr txBox="1"/>
-          <p:nvPr/>
-        </p:nvSpPr>
-        <p:spPr>
-          <a:xfrm>
-            <a:off x="365760" y="5148072"/>
-            <a:ext cx="2560320" cy="347472"/>
-          </a:xfrm>
-          <a:prstGeom prst="rect">
-            <a:avLst/>
-          </a:prstGeom>
-          <a:noFill/>
-        </p:spPr>
-        <p:txBody>
-          <a:bodyPr wrap="square">
-            <a:spAutoFit/>
-          </a:bodyPr>
-          <a:lstStyle/>
-          <a:p>
-            <a:pPr algn="l"/>
-            <a:r>
-              <a:rPr sz="900" b="0" i="0">
-                <a:solidFill>
-                  <a:srgbClr val="333333"/>
-                </a:solidFill>
-              </a:rPr>
-              <a:t>✓  Basic Reports</a:t>
-            </a:r>
-          </a:p>
-        </p:txBody>
-      </p:sp>
-      <p:sp>
-        <p:nvSpPr>
-          <p:cNvPr id="22" name="TextBox 21"/>
-          <p:cNvSpPr txBox="1"/>
-          <p:nvPr/>
-        </p:nvSpPr>
-        <p:spPr>
-          <a:xfrm>
-            <a:off x="365760" y="5532120"/>
-            <a:ext cx="2560320" cy="347472"/>
-          </a:xfrm>
-          <a:prstGeom prst="rect">
-            <a:avLst/>
-          </a:prstGeom>
-          <a:noFill/>
-        </p:spPr>
-        <p:txBody>
-          <a:bodyPr wrap="square">
-            <a:spAutoFit/>
-          </a:bodyPr>
-          <a:lstStyle/>
-          <a:p>
-            <a:pPr algn="l"/>
-            <a:r>
-              <a:rPr sz="900" b="0" i="0">
-                <a:solidFill>
-                  <a:srgbClr val="333333"/>
-                </a:solidFill>
-              </a:rPr>
-              <a:t>✓  Customer Portal</a:t>
-            </a:r>
-          </a:p>
-        </p:txBody>
-      </p:sp>
-      <p:sp>
-        <p:nvSpPr>
-          <p:cNvPr id="23" name="Rectangle 22"/>
-          <p:cNvSpPr/>
-          <p:nvPr/>
-        </p:nvSpPr>
-        <p:spPr>
-          <a:xfrm>
-            <a:off x="3273552" y="1197864"/>
-            <a:ext cx="2788920" cy="5394960"/>
-          </a:xfrm>
-          <a:prstGeom prst="rect">
-            <a:avLst/>
-          </a:prstGeom>
-          <a:solidFill>
-            <a:srgbClr val="CCCCCC"/>
-          </a:solidFill>
-          <a:ln>
-            <a:noFill/>
-          </a:ln>
-        </p:spPr>
-        <p:style>
-          <a:lnRef idx="1">
-            <a:schemeClr val="accent1"/>
-          </a:lnRef>
-          <a:fillRef idx="3">
-            <a:schemeClr val="accent1"/>
-          </a:fillRef>
-          <a:effectRef idx="2">
-            <a:schemeClr val="accent1"/>
-          </a:effectRef>
-          <a:fontRef idx="minor">
-            <a:schemeClr val="lt1"/>
-          </a:fontRef>
-        </p:style>
-        <p:txBody>
-          <a:bodyPr rtlCol="0" anchor="ctr"/>
-          <a:lstStyle/>
-          <a:p>
-            <a:pPr algn="ctr"/>
-          </a:p>
-        </p:txBody>
-      </p:sp>
-      <p:sp>
-        <p:nvSpPr>
-          <p:cNvPr id="24" name="Rectangle 23"/>
-          <p:cNvSpPr/>
-          <p:nvPr/>
-        </p:nvSpPr>
-        <p:spPr>
-          <a:xfrm>
-            <a:off x="3218688" y="1143000"/>
-            <a:ext cx="2788920" cy="5394960"/>
-          </a:xfrm>
-          <a:prstGeom prst="rect">
-            <a:avLst/>
-          </a:prstGeom>
-          <a:solidFill>
-            <a:srgbClr val="FFFFFF"/>
-          </a:solidFill>
-          <a:ln w="6350">
-            <a:solidFill>
-              <a:srgbClr val="E2E8F0"/>
-            </a:solidFill>
-          </a:ln>
-        </p:spPr>
-        <p:style>
-          <a:lnRef idx="1">
-            <a:schemeClr val="accent1"/>
-          </a:lnRef>
-          <a:fillRef idx="3">
-            <a:schemeClr val="accent1"/>
-          </a:fillRef>
-          <a:effectRef idx="2">
-            <a:schemeClr val="accent1"/>
-          </a:effectRef>
-          <a:fontRef idx="minor">
-            <a:schemeClr val="lt1"/>
-          </a:fontRef>
-        </p:style>
-        <p:txBody>
-          <a:bodyPr rtlCol="0" anchor="ctr"/>
-          <a:lstStyle/>
-          <a:p>
-            <a:pPr algn="ctr"/>
-          </a:p>
-        </p:txBody>
-      </p:sp>
-      <p:sp>
-        <p:nvSpPr>
-          <p:cNvPr id="25" name="Rectangle 24"/>
-          <p:cNvSpPr/>
-          <p:nvPr/>
-        </p:nvSpPr>
-        <p:spPr>
-          <a:xfrm>
-            <a:off x="3218688" y="1143000"/>
-            <a:ext cx="2788920" cy="1188720"/>
-          </a:xfrm>
-          <a:prstGeom prst="rect">
-            <a:avLst/>
-          </a:prstGeom>
-          <a:solidFill>
-            <a:srgbClr val="E94560"/>
-          </a:solidFill>
-          <a:ln>
-            <a:noFill/>
-          </a:ln>
-        </p:spPr>
-        <p:style>
-          <a:lnRef idx="1">
-            <a:schemeClr val="accent1"/>
-          </a:lnRef>
-          <a:fillRef idx="3">
-            <a:schemeClr val="accent1"/>
-          </a:fillRef>
-          <a:effectRef idx="2">
-            <a:schemeClr val="accent1"/>
-          </a:effectRef>
-          <a:fontRef idx="minor">
-            <a:schemeClr val="lt1"/>
-          </a:fontRef>
-        </p:style>
-        <p:txBody>
-          <a:bodyPr rtlCol="0" anchor="ctr"/>
-          <a:lstStyle/>
-          <a:p>
-            <a:pPr algn="ctr"/>
-          </a:p>
-        </p:txBody>
-      </p:sp>
-      <p:sp>
-        <p:nvSpPr>
-          <p:cNvPr id="26" name="Rectangle 25"/>
-          <p:cNvSpPr/>
-          <p:nvPr/>
-        </p:nvSpPr>
-        <p:spPr>
-          <a:xfrm>
-            <a:off x="3218688" y="1143000"/>
-            <a:ext cx="2788920" cy="274320"/>
-          </a:xfrm>
-          <a:prstGeom prst="rect">
-            <a:avLst/>
-          </a:prstGeom>
-          <a:solidFill>
-            <a:srgbClr val="F5A623"/>
-          </a:solidFill>
-          <a:ln>
-            <a:noFill/>
-          </a:ln>
-        </p:spPr>
-        <p:style>
-          <a:lnRef idx="1">
-            <a:schemeClr val="accent1"/>
-          </a:lnRef>
-          <a:fillRef idx="3">
-            <a:schemeClr val="accent1"/>
-          </a:fillRef>
-          <a:effectRef idx="2">
-            <a:schemeClr val="accent1"/>
-          </a:effectRef>
-          <a:fontRef idx="minor">
-            <a:schemeClr val="lt1"/>
-          </a:fontRef>
-        </p:style>
-        <p:txBody>
-          <a:bodyPr rtlCol="0" anchor="ctr"/>
-          <a:lstStyle/>
-          <a:p>
-            <a:pPr algn="ctr"/>
-          </a:p>
-        </p:txBody>
-      </p:sp>
-      <p:sp>
-        <p:nvSpPr>
-          <p:cNvPr id="27" name="TextBox 26"/>
-          <p:cNvSpPr txBox="1"/>
-          <p:nvPr/>
-        </p:nvSpPr>
-        <p:spPr>
-          <a:xfrm>
-            <a:off x="3218688" y="1161288"/>
-            <a:ext cx="2788920" cy="237744"/>
-          </a:xfrm>
-          <a:prstGeom prst="rect">
-            <a:avLst/>
-          </a:prstGeom>
-          <a:noFill/>
-        </p:spPr>
-        <p:txBody>
-          <a:bodyPr wrap="square">
-            <a:spAutoFit/>
-          </a:bodyPr>
-          <a:lstStyle/>
-          <a:p>
-            <a:pPr algn="ctr"/>
-            <a:r>
-              <a:rPr sz="800" b="1" i="0">
-                <a:solidFill>
-                  <a:srgbClr val="0F3460"/>
-                </a:solidFill>
-              </a:rPr>
-              <a:t>⭐ MOST POPULAR</a:t>
-            </a:r>
-          </a:p>
-        </p:txBody>
-      </p:sp>
-      <p:sp>
-        <p:nvSpPr>
-          <p:cNvPr id="28" name="TextBox 27"/>
-          <p:cNvSpPr txBox="1"/>
-          <p:nvPr/>
-        </p:nvSpPr>
-        <p:spPr>
-          <a:xfrm>
-            <a:off x="3218688" y="1463040"/>
-            <a:ext cx="2788920" cy="411480"/>
-          </a:xfrm>
-          <a:prstGeom prst="rect">
-            <a:avLst/>
-          </a:prstGeom>
-          <a:noFill/>
-        </p:spPr>
-        <p:txBody>
-          <a:bodyPr wrap="square">
-            <a:spAutoFit/>
-          </a:bodyPr>
-          <a:lstStyle/>
-          <a:p>
-            <a:pPr algn="ctr"/>
-            <a:r>
-              <a:rPr sz="1800" b="0" i="0">
-                <a:solidFill>
-                  <a:srgbClr val="FFFFFF"/>
-                </a:solidFill>
-              </a:rPr>
-              <a:t>⭐</a:t>
-            </a:r>
-          </a:p>
-        </p:txBody>
-      </p:sp>
-      <p:sp>
-        <p:nvSpPr>
-          <p:cNvPr id="29" name="TextBox 28"/>
-          <p:cNvSpPr txBox="1"/>
-          <p:nvPr/>
-        </p:nvSpPr>
-        <p:spPr>
-          <a:xfrm>
-            <a:off x="3218688" y="1847088"/>
-            <a:ext cx="2788920" cy="365760"/>
-          </a:xfrm>
-          <a:prstGeom prst="rect">
-            <a:avLst/>
-          </a:prstGeom>
-          <a:noFill/>
-        </p:spPr>
-        <p:txBody>
-          <a:bodyPr wrap="square">
-            <a:spAutoFit/>
-          </a:bodyPr>
-          <a:lstStyle/>
-          <a:p>
-            <a:pPr algn="ctr"/>
-            <a:r>
-              <a:rPr sz="1400" b="1" i="0">
-                <a:solidFill>
-                  <a:srgbClr val="FFFFFF"/>
-                </a:solidFill>
-              </a:rPr>
-              <a:t>Professional</a:t>
-            </a:r>
-          </a:p>
-        </p:txBody>
-      </p:sp>
-      <p:sp>
-        <p:nvSpPr>
-          <p:cNvPr id="30" name="TextBox 29"/>
-          <p:cNvSpPr txBox="1"/>
-          <p:nvPr/>
-        </p:nvSpPr>
-        <p:spPr>
-          <a:xfrm>
-            <a:off x="3218688" y="2194560"/>
-            <a:ext cx="2788920" cy="274320"/>
-          </a:xfrm>
-          <a:prstGeom prst="rect">
-            <a:avLst/>
-          </a:prstGeom>
-          <a:noFill/>
-        </p:spPr>
-        <p:txBody>
-          <a:bodyPr wrap="square">
-            <a:spAutoFit/>
-          </a:bodyPr>
-          <a:lstStyle/>
-          <a:p>
-            <a:pPr algn="ctr"/>
-            <a:r>
-              <a:rPr sz="850" b="0" i="0">
-                <a:solidFill>
-                  <a:srgbClr val="CCDDFF"/>
-                </a:solidFill>
-              </a:rPr>
-              <a:t>Up to 50 Users</a:t>
-            </a:r>
-          </a:p>
-        </p:txBody>
-      </p:sp>
-      <p:sp>
-        <p:nvSpPr>
-          <p:cNvPr id="31" name="Rectangle 30"/>
-          <p:cNvSpPr/>
-          <p:nvPr/>
-        </p:nvSpPr>
-        <p:spPr>
-          <a:xfrm>
-            <a:off x="3218688" y="2331720"/>
-            <a:ext cx="2788920" cy="502920"/>
-          </a:xfrm>
-          <a:prstGeom prst="rect">
-            <a:avLst/>
-          </a:prstGeom>
-          <a:solidFill>
-            <a:srgbClr val="F5F7FA"/>
-          </a:solidFill>
-          <a:ln>
-            <a:noFill/>
-          </a:ln>
-        </p:spPr>
-        <p:style>
-          <a:lnRef idx="1">
-            <a:schemeClr val="accent1"/>
-          </a:lnRef>
-          <a:fillRef idx="3">
-            <a:schemeClr val="accent1"/>
-          </a:fillRef>
-          <a:effectRef idx="2">
-            <a:schemeClr val="accent1"/>
-          </a:effectRef>
-          <a:fontRef idx="minor">
-            <a:schemeClr val="lt1"/>
-          </a:fontRef>
-        </p:style>
-        <p:txBody>
-          <a:bodyPr rtlCol="0" anchor="ctr"/>
-          <a:lstStyle/>
-          <a:p>
-            <a:pPr algn="ctr"/>
-          </a:p>
-        </p:txBody>
-      </p:sp>
-      <p:sp>
-        <p:nvSpPr>
-          <p:cNvPr id="32" name="TextBox 31"/>
-          <p:cNvSpPr txBox="1"/>
-          <p:nvPr/>
-        </p:nvSpPr>
-        <p:spPr>
-          <a:xfrm>
-            <a:off x="3310128" y="2350008"/>
-            <a:ext cx="2606039" cy="228600"/>
-          </a:xfrm>
-          <a:prstGeom prst="rect">
-            <a:avLst/>
-          </a:prstGeom>
-          <a:noFill/>
-        </p:spPr>
-        <p:txBody>
-          <a:bodyPr wrap="square">
-            <a:spAutoFit/>
-          </a:bodyPr>
-          <a:lstStyle/>
-          <a:p>
-            <a:pPr algn="l"/>
-            <a:r>
-              <a:rPr sz="750" b="0" i="0">
-                <a:solidFill>
-                  <a:srgbClr val="888888"/>
-                </a:solidFill>
-              </a:rPr>
-              <a:t>Implementation &amp; Onboarding</a:t>
-            </a:r>
-          </a:p>
-        </p:txBody>
-      </p:sp>
-      <p:sp>
-        <p:nvSpPr>
-          <p:cNvPr id="33" name="TextBox 32"/>
-          <p:cNvSpPr txBox="1"/>
-          <p:nvPr/>
-        </p:nvSpPr>
-        <p:spPr>
-          <a:xfrm>
-            <a:off x="3310128" y="2560320"/>
-            <a:ext cx="2606039" cy="228600"/>
-          </a:xfrm>
-          <a:prstGeom prst="rect">
-            <a:avLst/>
-          </a:prstGeom>
-          <a:noFill/>
-        </p:spPr>
-        <p:txBody>
-          <a:bodyPr wrap="square">
-            <a:spAutoFit/>
-          </a:bodyPr>
-          <a:lstStyle/>
-          <a:p>
-            <a:pPr algn="l"/>
-            <a:r>
-              <a:rPr sz="1100" b="1" i="0">
-                <a:solidFill>
-                  <a:srgbClr val="0F3460"/>
-                </a:solidFill>
-              </a:rPr>
-              <a:t>₹1,49,999</a:t>
-            </a:r>
-          </a:p>
-        </p:txBody>
-      </p:sp>
-      <p:sp>
-        <p:nvSpPr>
-          <p:cNvPr id="34" name="Rectangle 33"/>
-          <p:cNvSpPr/>
-          <p:nvPr/>
-        </p:nvSpPr>
-        <p:spPr>
-          <a:xfrm>
-            <a:off x="3218688" y="2834640"/>
-            <a:ext cx="2788920" cy="640080"/>
-          </a:xfrm>
-          <a:prstGeom prst="rect">
-            <a:avLst/>
-          </a:prstGeom>
-          <a:solidFill>
-            <a:srgbClr val="E94560"/>
-          </a:solidFill>
-          <a:ln>
-            <a:noFill/>
-          </a:ln>
-        </p:spPr>
-        <p:style>
-          <a:lnRef idx="1">
-            <a:schemeClr val="accent1"/>
-          </a:lnRef>
-          <a:fillRef idx="3">
-            <a:schemeClr val="accent1"/>
-          </a:fillRef>
-          <a:effectRef idx="2">
-            <a:schemeClr val="accent1"/>
-          </a:effectRef>
-          <a:fontRef idx="minor">
-            <a:schemeClr val="lt1"/>
-          </a:fontRef>
-        </p:style>
-        <p:txBody>
-          <a:bodyPr rtlCol="0" anchor="ctr"/>
-          <a:lstStyle/>
-          <a:p>
-            <a:pPr algn="ctr"/>
-          </a:p>
-        </p:txBody>
-      </p:sp>
-      <p:sp>
-        <p:nvSpPr>
-          <p:cNvPr id="35" name="TextBox 34"/>
-          <p:cNvSpPr txBox="1"/>
-          <p:nvPr/>
-        </p:nvSpPr>
-        <p:spPr>
-          <a:xfrm>
-            <a:off x="3218688" y="2880360"/>
-            <a:ext cx="2788920" cy="347472"/>
-          </a:xfrm>
-          <a:prstGeom prst="rect">
-            <a:avLst/>
-          </a:prstGeom>
-          <a:noFill/>
-        </p:spPr>
-        <p:txBody>
-          <a:bodyPr wrap="square">
-            <a:spAutoFit/>
-          </a:bodyPr>
-          <a:lstStyle/>
-          <a:p>
-            <a:pPr algn="ctr"/>
-            <a:r>
-              <a:rPr sz="1600" b="1" i="0">
-                <a:solidFill>
-                  <a:srgbClr val="FFFFFF"/>
-                </a:solidFill>
-              </a:rPr>
-              <a:t>₹22,000/month</a:t>
-            </a:r>
-          </a:p>
-        </p:txBody>
-      </p:sp>
-      <p:sp>
-        <p:nvSpPr>
-          <p:cNvPr id="36" name="TextBox 35"/>
-          <p:cNvSpPr txBox="1"/>
-          <p:nvPr/>
-        </p:nvSpPr>
-        <p:spPr>
-          <a:xfrm>
-            <a:off x="3218688" y="3227832"/>
-            <a:ext cx="2788920" cy="201168"/>
-          </a:xfrm>
-          <a:prstGeom prst="rect">
-            <a:avLst/>
-          </a:prstGeom>
-          <a:noFill/>
-        </p:spPr>
-        <p:txBody>
-          <a:bodyPr wrap="square">
-            <a:spAutoFit/>
-          </a:bodyPr>
-          <a:lstStyle/>
-          <a:p>
-            <a:pPr algn="ctr"/>
-            <a:r>
-              <a:rPr sz="750" b="0" i="0">
-                <a:solidFill>
-                  <a:srgbClr val="CCDDFF"/>
-                </a:solidFill>
-              </a:rPr>
-              <a:t>Monthly Subscription</a:t>
-            </a:r>
-          </a:p>
-        </p:txBody>
-      </p:sp>
-      <p:sp>
-        <p:nvSpPr>
-          <p:cNvPr id="37" name="TextBox 36"/>
-          <p:cNvSpPr txBox="1"/>
-          <p:nvPr/>
-        </p:nvSpPr>
-        <p:spPr>
-          <a:xfrm>
-            <a:off x="3355848" y="3611880"/>
-            <a:ext cx="2560320" cy="347472"/>
-          </a:xfrm>
-          <a:prstGeom prst="rect">
-            <a:avLst/>
-          </a:prstGeom>
-          <a:noFill/>
-        </p:spPr>
-        <p:txBody>
-          <a:bodyPr wrap="square">
-            <a:spAutoFit/>
-          </a:bodyPr>
-          <a:lstStyle/>
-          <a:p>
-            <a:pPr algn="l"/>
-            <a:r>
-              <a:rPr sz="900" b="0" i="0">
-                <a:solidFill>
-                  <a:srgbClr val="333333"/>
-                </a:solidFill>
-              </a:rPr>
-              <a:t>✓  Everything in Starter</a:t>
-            </a:r>
-          </a:p>
-        </p:txBody>
-      </p:sp>
-      <p:sp>
-        <p:nvSpPr>
-          <p:cNvPr id="38" name="TextBox 37"/>
-          <p:cNvSpPr txBox="1"/>
-          <p:nvPr/>
-        </p:nvSpPr>
-        <p:spPr>
-          <a:xfrm>
-            <a:off x="3355848" y="3995928"/>
-            <a:ext cx="2560320" cy="347472"/>
-          </a:xfrm>
-          <a:prstGeom prst="rect">
-            <a:avLst/>
-          </a:prstGeom>
-          <a:noFill/>
-        </p:spPr>
-        <p:txBody>
-          <a:bodyPr wrap="square">
-            <a:spAutoFit/>
-          </a:bodyPr>
-          <a:lstStyle/>
-          <a:p>
-            <a:pPr algn="l"/>
-            <a:r>
-              <a:rPr sz="900" b="0" i="0">
-                <a:solidFill>
-                  <a:srgbClr val="333333"/>
-                </a:solidFill>
-              </a:rPr>
-              <a:t>✓  Unlimited Certificates</a:t>
-            </a:r>
-          </a:p>
-        </p:txBody>
-      </p:sp>
-      <p:sp>
-        <p:nvSpPr>
-          <p:cNvPr id="39" name="TextBox 38"/>
-          <p:cNvSpPr txBox="1"/>
-          <p:nvPr/>
-        </p:nvSpPr>
-        <p:spPr>
-          <a:xfrm>
-            <a:off x="3355848" y="4379976"/>
-            <a:ext cx="2560320" cy="347472"/>
-          </a:xfrm>
-          <a:prstGeom prst="rect">
-            <a:avLst/>
-          </a:prstGeom>
-          <a:noFill/>
-        </p:spPr>
-        <p:txBody>
-          <a:bodyPr wrap="square">
-            <a:spAutoFit/>
-          </a:bodyPr>
-          <a:lstStyle/>
-          <a:p>
-            <a:pPr algn="l"/>
-            <a:r>
-              <a:rPr sz="900" b="0" i="0">
-                <a:solidFill>
-                  <a:srgbClr val="333333"/>
-                </a:solidFill>
-              </a:rPr>
-              <a:t>✓  Priority Support</a:t>
-            </a:r>
-          </a:p>
-        </p:txBody>
-      </p:sp>
-      <p:sp>
-        <p:nvSpPr>
-          <p:cNvPr id="40" name="TextBox 39"/>
-          <p:cNvSpPr txBox="1"/>
-          <p:nvPr/>
-        </p:nvSpPr>
-        <p:spPr>
-          <a:xfrm>
-            <a:off x="3355848" y="4764024"/>
-            <a:ext cx="2560320" cy="347472"/>
-          </a:xfrm>
-          <a:prstGeom prst="rect">
-            <a:avLst/>
-          </a:prstGeom>
-          <a:noFill/>
-        </p:spPr>
-        <p:txBody>
-          <a:bodyPr wrap="square">
-            <a:spAutoFit/>
-          </a:bodyPr>
-          <a:lstStyle/>
-          <a:p>
-            <a:pPr algn="l"/>
-            <a:r>
-              <a:rPr sz="900" b="0" i="0">
-                <a:solidFill>
-                  <a:srgbClr val="333333"/>
-                </a:solidFill>
-              </a:rPr>
-              <a:t>✓  Multi-location</a:t>
-            </a:r>
-          </a:p>
-        </p:txBody>
-      </p:sp>
-      <p:sp>
-        <p:nvSpPr>
-          <p:cNvPr id="41" name="TextBox 40"/>
-          <p:cNvSpPr txBox="1"/>
-          <p:nvPr/>
-        </p:nvSpPr>
-        <p:spPr>
-          <a:xfrm>
-            <a:off x="3355848" y="5148072"/>
-            <a:ext cx="2560320" cy="347472"/>
-          </a:xfrm>
-          <a:prstGeom prst="rect">
-            <a:avLst/>
-          </a:prstGeom>
-          <a:noFill/>
-        </p:spPr>
-        <p:txBody>
-          <a:bodyPr wrap="square">
-            <a:spAutoFit/>
-          </a:bodyPr>
-          <a:lstStyle/>
-          <a:p>
-            <a:pPr algn="l"/>
-            <a:r>
-              <a:rPr sz="900" b="0" i="0">
-                <a:solidFill>
-                  <a:srgbClr val="333333"/>
-                </a:solidFill>
-              </a:rPr>
-              <a:t>✓  Advanced Analytics</a:t>
-            </a:r>
-          </a:p>
-        </p:txBody>
-      </p:sp>
-      <p:sp>
-        <p:nvSpPr>
-          <p:cNvPr id="42" name="TextBox 41"/>
-          <p:cNvSpPr txBox="1"/>
-          <p:nvPr/>
-        </p:nvSpPr>
-        <p:spPr>
-          <a:xfrm>
-            <a:off x="3355848" y="5532120"/>
-            <a:ext cx="2560320" cy="347472"/>
-          </a:xfrm>
-          <a:prstGeom prst="rect">
-            <a:avLst/>
-          </a:prstGeom>
-          <a:noFill/>
-        </p:spPr>
-        <p:txBody>
-          <a:bodyPr wrap="square">
-            <a:spAutoFit/>
-          </a:bodyPr>
-          <a:lstStyle/>
-          <a:p>
-            <a:pPr algn="l"/>
-            <a:r>
-              <a:rPr sz="900" b="0" i="0">
-                <a:solidFill>
-                  <a:srgbClr val="333333"/>
-                </a:solidFill>
-              </a:rPr>
-              <a:t>✓  API Access</a:t>
-            </a:r>
-          </a:p>
-        </p:txBody>
-      </p:sp>
-      <p:sp>
-        <p:nvSpPr>
-          <p:cNvPr id="43" name="TextBox 42"/>
-          <p:cNvSpPr txBox="1"/>
-          <p:nvPr/>
-        </p:nvSpPr>
-        <p:spPr>
-          <a:xfrm>
-            <a:off x="3355848" y="5916168"/>
-            <a:ext cx="2560320" cy="347472"/>
-          </a:xfrm>
-          <a:prstGeom prst="rect">
-            <a:avLst/>
-          </a:prstGeom>
-          <a:noFill/>
-        </p:spPr>
-        <p:txBody>
-          <a:bodyPr wrap="square">
-            <a:spAutoFit/>
-          </a:bodyPr>
-          <a:lstStyle/>
-          <a:p>
-            <a:pPr algn="l"/>
-            <a:r>
-              <a:rPr sz="900" b="0" i="0">
-                <a:solidFill>
-                  <a:srgbClr val="333333"/>
-                </a:solidFill>
-              </a:rPr>
-              <a:t>✓  Custom Certificate Template</a:t>
-            </a:r>
-          </a:p>
-        </p:txBody>
-      </p:sp>
-      <p:sp>
-        <p:nvSpPr>
-          <p:cNvPr id="44" name="Rectangle 43"/>
-          <p:cNvSpPr/>
-          <p:nvPr/>
-        </p:nvSpPr>
-        <p:spPr>
-          <a:xfrm>
-            <a:off x="6263640" y="1197864"/>
-            <a:ext cx="2788920" cy="5394960"/>
-          </a:xfrm>
-          <a:prstGeom prst="rect">
-            <a:avLst/>
-          </a:prstGeom>
-          <a:solidFill>
-            <a:srgbClr val="CCCCCC"/>
-          </a:solidFill>
-          <a:ln>
-            <a:noFill/>
-          </a:ln>
-        </p:spPr>
-        <p:style>
-          <a:lnRef idx="1">
-            <a:schemeClr val="accent1"/>
-          </a:lnRef>
-          <a:fillRef idx="3">
-            <a:schemeClr val="accent1"/>
-          </a:fillRef>
-          <a:effectRef idx="2">
-            <a:schemeClr val="accent1"/>
-          </a:effectRef>
-          <a:fontRef idx="minor">
-            <a:schemeClr val="lt1"/>
-          </a:fontRef>
-        </p:style>
-        <p:txBody>
-          <a:bodyPr rtlCol="0" anchor="ctr"/>
-          <a:lstStyle/>
-          <a:p>
-            <a:pPr algn="ctr"/>
-          </a:p>
-        </p:txBody>
-      </p:sp>
-      <p:sp>
-        <p:nvSpPr>
-          <p:cNvPr id="45" name="Rectangle 44"/>
-          <p:cNvSpPr/>
-          <p:nvPr/>
-        </p:nvSpPr>
-        <p:spPr>
-          <a:xfrm>
-            <a:off x="6208776" y="1143000"/>
-            <a:ext cx="2788920" cy="5394960"/>
-          </a:xfrm>
-          <a:prstGeom prst="rect">
-            <a:avLst/>
-          </a:prstGeom>
-          <a:solidFill>
-            <a:srgbClr val="FFFFFF"/>
-          </a:solidFill>
-          <a:ln w="6350">
-            <a:solidFill>
-              <a:srgbClr val="E2E8F0"/>
-            </a:solidFill>
-          </a:ln>
-        </p:spPr>
-        <p:style>
-          <a:lnRef idx="1">
-            <a:schemeClr val="accent1"/>
-          </a:lnRef>
-          <a:fillRef idx="3">
-            <a:schemeClr val="accent1"/>
-          </a:fillRef>
-          <a:effectRef idx="2">
-            <a:schemeClr val="accent1"/>
-          </a:effectRef>
-          <a:fontRef idx="minor">
-            <a:schemeClr val="lt1"/>
-          </a:fontRef>
-        </p:style>
-        <p:txBody>
-          <a:bodyPr rtlCol="0" anchor="ctr"/>
-          <a:lstStyle/>
-          <a:p>
-            <a:pPr algn="ctr"/>
-          </a:p>
-        </p:txBody>
-      </p:sp>
-      <p:sp>
-        <p:nvSpPr>
-          <p:cNvPr id="46" name="Rectangle 45"/>
-          <p:cNvSpPr/>
-          <p:nvPr/>
-        </p:nvSpPr>
-        <p:spPr>
-          <a:xfrm>
-            <a:off x="6208776" y="1143000"/>
-            <a:ext cx="2788920" cy="1188720"/>
-          </a:xfrm>
-          <a:prstGeom prst="rect">
-            <a:avLst/>
-          </a:prstGeom>
-          <a:solidFill>
-            <a:srgbClr val="1A1A3E"/>
-          </a:solidFill>
-          <a:ln>
-            <a:noFill/>
-          </a:ln>
-        </p:spPr>
-        <p:style>
-          <a:lnRef idx="1">
-            <a:schemeClr val="accent1"/>
-          </a:lnRef>
-          <a:fillRef idx="3">
-            <a:schemeClr val="accent1"/>
-          </a:fillRef>
-          <a:effectRef idx="2">
-            <a:schemeClr val="accent1"/>
-          </a:effectRef>
-          <a:fontRef idx="minor">
-            <a:schemeClr val="lt1"/>
-          </a:fontRef>
-        </p:style>
-        <p:txBody>
-          <a:bodyPr rtlCol="0" anchor="ctr"/>
-          <a:lstStyle/>
-          <a:p>
-            <a:pPr algn="ctr"/>
-          </a:p>
-        </p:txBody>
-      </p:sp>
-      <p:sp>
-        <p:nvSpPr>
-          <p:cNvPr id="47" name="TextBox 46"/>
-          <p:cNvSpPr txBox="1"/>
-          <p:nvPr/>
-        </p:nvSpPr>
-        <p:spPr>
-          <a:xfrm>
-            <a:off x="6208776" y="1234440"/>
-            <a:ext cx="2788920" cy="411480"/>
-          </a:xfrm>
-          <a:prstGeom prst="rect">
-            <a:avLst/>
-          </a:prstGeom>
-          <a:noFill/>
-        </p:spPr>
-        <p:txBody>
-          <a:bodyPr wrap="square">
-            <a:spAutoFit/>
-          </a:bodyPr>
-          <a:lstStyle/>
-          <a:p>
-            <a:pPr algn="ctr"/>
-            <a:r>
-              <a:rPr sz="1800" b="0" i="0">
-                <a:solidFill>
-                  <a:srgbClr val="FFFFFF"/>
-                </a:solidFill>
-              </a:rPr>
-              <a:t>🏢</a:t>
-            </a:r>
-          </a:p>
-        </p:txBody>
-      </p:sp>
-      <p:sp>
-        <p:nvSpPr>
-          <p:cNvPr id="48" name="TextBox 47"/>
-          <p:cNvSpPr txBox="1"/>
-          <p:nvPr/>
-        </p:nvSpPr>
-        <p:spPr>
-          <a:xfrm>
-            <a:off x="6208776" y="1618488"/>
-            <a:ext cx="2788920" cy="365760"/>
-          </a:xfrm>
-          <a:prstGeom prst="rect">
-            <a:avLst/>
-          </a:prstGeom>
-          <a:noFill/>
-        </p:spPr>
-        <p:txBody>
-          <a:bodyPr wrap="square">
-            <a:spAutoFit/>
-          </a:bodyPr>
-          <a:lstStyle/>
-          <a:p>
-            <a:pPr algn="ctr"/>
-            <a:r>
-              <a:rPr sz="1400" b="1" i="0">
-                <a:solidFill>
-                  <a:srgbClr val="FFFFFF"/>
-                </a:solidFill>
-              </a:rPr>
-              <a:t>Enterprise</a:t>
-            </a:r>
-          </a:p>
-        </p:txBody>
-      </p:sp>
-      <p:sp>
-        <p:nvSpPr>
-          <p:cNvPr id="49" name="TextBox 48"/>
-          <p:cNvSpPr txBox="1"/>
-          <p:nvPr/>
-        </p:nvSpPr>
-        <p:spPr>
-          <a:xfrm>
-            <a:off x="6208776" y="1965960"/>
-            <a:ext cx="2788920" cy="274320"/>
-          </a:xfrm>
-          <a:prstGeom prst="rect">
-            <a:avLst/>
-          </a:prstGeom>
-          <a:noFill/>
-        </p:spPr>
-        <p:txBody>
-          <a:bodyPr wrap="square">
-            <a:spAutoFit/>
-          </a:bodyPr>
-          <a:lstStyle/>
-          <a:p>
-            <a:pPr algn="ctr"/>
-            <a:r>
-              <a:rPr sz="850" b="0" i="0">
-                <a:solidFill>
-                  <a:srgbClr val="CCDDFF"/>
-                </a:solidFill>
-              </a:rPr>
-              <a:t>Up to 100 Users</a:t>
-            </a:r>
-          </a:p>
-        </p:txBody>
-      </p:sp>
-      <p:sp>
-        <p:nvSpPr>
-          <p:cNvPr id="50" name="Rectangle 49"/>
-          <p:cNvSpPr/>
-          <p:nvPr/>
-        </p:nvSpPr>
-        <p:spPr>
-          <a:xfrm>
-            <a:off x="6208776" y="2331720"/>
-            <a:ext cx="2788920" cy="502920"/>
-          </a:xfrm>
-          <a:prstGeom prst="rect">
-            <a:avLst/>
-          </a:prstGeom>
-          <a:solidFill>
-            <a:srgbClr val="F5F7FA"/>
-          </a:solidFill>
-          <a:ln>
-            <a:noFill/>
-          </a:ln>
-        </p:spPr>
-        <p:style>
-          <a:lnRef idx="1">
-            <a:schemeClr val="accent1"/>
-          </a:lnRef>
-          <a:fillRef idx="3">
-            <a:schemeClr val="accent1"/>
-          </a:fillRef>
-          <a:effectRef idx="2">
-            <a:schemeClr val="accent1"/>
-          </a:effectRef>
-          <a:fontRef idx="minor">
-            <a:schemeClr val="lt1"/>
-          </a:fontRef>
-        </p:style>
-        <p:txBody>
-          <a:bodyPr rtlCol="0" anchor="ctr"/>
-          <a:lstStyle/>
-          <a:p>
-            <a:pPr algn="ctr"/>
-          </a:p>
-        </p:txBody>
-      </p:sp>
-      <p:sp>
-        <p:nvSpPr>
-          <p:cNvPr id="51" name="TextBox 50"/>
-          <p:cNvSpPr txBox="1"/>
-          <p:nvPr/>
-        </p:nvSpPr>
-        <p:spPr>
-          <a:xfrm>
-            <a:off x="6300216" y="2350008"/>
-            <a:ext cx="2606039" cy="228600"/>
-          </a:xfrm>
-          <a:prstGeom prst="rect">
-            <a:avLst/>
-          </a:prstGeom>
-          <a:noFill/>
-        </p:spPr>
-        <p:txBody>
-          <a:bodyPr wrap="square">
-            <a:spAutoFit/>
-          </a:bodyPr>
-          <a:lstStyle/>
-          <a:p>
-            <a:pPr algn="l"/>
-            <a:r>
-              <a:rPr sz="750" b="0" i="0">
-                <a:solidFill>
-                  <a:srgbClr val="888888"/>
-                </a:solidFill>
-              </a:rPr>
-              <a:t>Implementation &amp; Onboarding</a:t>
-            </a:r>
-          </a:p>
-        </p:txBody>
-      </p:sp>
-      <p:sp>
-        <p:nvSpPr>
-          <p:cNvPr id="52" name="TextBox 51"/>
-          <p:cNvSpPr txBox="1"/>
-          <p:nvPr/>
-        </p:nvSpPr>
-        <p:spPr>
-          <a:xfrm>
-            <a:off x="6300216" y="2560320"/>
-            <a:ext cx="2606039" cy="228600"/>
-          </a:xfrm>
-          <a:prstGeom prst="rect">
-            <a:avLst/>
-          </a:prstGeom>
-          <a:noFill/>
-        </p:spPr>
-        <p:txBody>
-          <a:bodyPr wrap="square">
-            <a:spAutoFit/>
-          </a:bodyPr>
-          <a:lstStyle/>
-          <a:p>
-            <a:pPr algn="l"/>
-            <a:r>
-              <a:rPr sz="1100" b="1" i="0">
-                <a:solidFill>
-                  <a:srgbClr val="0F3460"/>
-                </a:solidFill>
-              </a:rPr>
-              <a:t>₹2,99,999</a:t>
-            </a:r>
-          </a:p>
-        </p:txBody>
-      </p:sp>
-      <p:sp>
-        <p:nvSpPr>
-          <p:cNvPr id="53" name="Rectangle 52"/>
-          <p:cNvSpPr/>
-          <p:nvPr/>
-        </p:nvSpPr>
-        <p:spPr>
-          <a:xfrm>
-            <a:off x="6208776" y="2834640"/>
-            <a:ext cx="2788920" cy="640080"/>
-          </a:xfrm>
-          <a:prstGeom prst="rect">
-            <a:avLst/>
-          </a:prstGeom>
-          <a:solidFill>
-            <a:srgbClr val="1A1A3E"/>
-          </a:solidFill>
-          <a:ln>
-            <a:noFill/>
-          </a:ln>
-        </p:spPr>
-        <p:style>
-          <a:lnRef idx="1">
-            <a:schemeClr val="accent1"/>
-          </a:lnRef>
-          <a:fillRef idx="3">
-            <a:schemeClr val="accent1"/>
-          </a:fillRef>
-          <a:effectRef idx="2">
-            <a:schemeClr val="accent1"/>
-          </a:effectRef>
-          <a:fontRef idx="minor">
-            <a:schemeClr val="lt1"/>
-          </a:fontRef>
-        </p:style>
-        <p:txBody>
-          <a:bodyPr rtlCol="0" anchor="ctr"/>
-          <a:lstStyle/>
-          <a:p>
-            <a:pPr algn="ctr"/>
-          </a:p>
-        </p:txBody>
-      </p:sp>
-      <p:sp>
-        <p:nvSpPr>
-          <p:cNvPr id="54" name="TextBox 53"/>
-          <p:cNvSpPr txBox="1"/>
-          <p:nvPr/>
-        </p:nvSpPr>
-        <p:spPr>
-          <a:xfrm>
-            <a:off x="6208776" y="2880360"/>
-            <a:ext cx="2788920" cy="347472"/>
-          </a:xfrm>
-          <a:prstGeom prst="rect">
-            <a:avLst/>
-          </a:prstGeom>
-          <a:noFill/>
-        </p:spPr>
-        <p:txBody>
-          <a:bodyPr wrap="square">
-            <a:spAutoFit/>
-          </a:bodyPr>
-          <a:lstStyle/>
-          <a:p>
-            <a:pPr algn="ctr"/>
-            <a:r>
-              <a:rPr sz="1600" b="1" i="0">
-                <a:solidFill>
-                  <a:srgbClr val="FFFFFF"/>
-                </a:solidFill>
-              </a:rPr>
-              <a:t>₹35,000/month</a:t>
-            </a:r>
-          </a:p>
-        </p:txBody>
-      </p:sp>
-      <p:sp>
-        <p:nvSpPr>
-          <p:cNvPr id="55" name="TextBox 54"/>
-          <p:cNvSpPr txBox="1"/>
-          <p:nvPr/>
-        </p:nvSpPr>
-        <p:spPr>
-          <a:xfrm>
-            <a:off x="6208776" y="3227832"/>
-            <a:ext cx="2788920" cy="201168"/>
-          </a:xfrm>
-          <a:prstGeom prst="rect">
-            <a:avLst/>
-          </a:prstGeom>
-          <a:noFill/>
-        </p:spPr>
-        <p:txBody>
-          <a:bodyPr wrap="square">
-            <a:spAutoFit/>
-          </a:bodyPr>
-          <a:lstStyle/>
-          <a:p>
-            <a:pPr algn="ctr"/>
-            <a:r>
-              <a:rPr sz="750" b="0" i="0">
-                <a:solidFill>
-                  <a:srgbClr val="CCDDFF"/>
-                </a:solidFill>
-              </a:rPr>
-              <a:t>Monthly Subscription</a:t>
-            </a:r>
-          </a:p>
-        </p:txBody>
-      </p:sp>
-      <p:sp>
-        <p:nvSpPr>
-          <p:cNvPr id="56" name="TextBox 55"/>
-          <p:cNvSpPr txBox="1"/>
-          <p:nvPr/>
-        </p:nvSpPr>
-        <p:spPr>
-          <a:xfrm>
-            <a:off x="6345936" y="3611880"/>
-            <a:ext cx="2560320" cy="347472"/>
-          </a:xfrm>
-          <a:prstGeom prst="rect">
-            <a:avLst/>
-          </a:prstGeom>
-          <a:noFill/>
-        </p:spPr>
-        <p:txBody>
-          <a:bodyPr wrap="square">
-            <a:spAutoFit/>
-          </a:bodyPr>
-          <a:lstStyle/>
-          <a:p>
-            <a:pPr algn="l"/>
-            <a:r>
-              <a:rPr sz="900" b="0" i="0">
-                <a:solidFill>
-                  <a:srgbClr val="333333"/>
-                </a:solidFill>
-              </a:rPr>
-              <a:t>✓  Everything in Professional</a:t>
-            </a:r>
-          </a:p>
-        </p:txBody>
-      </p:sp>
-      <p:sp>
-        <p:nvSpPr>
-          <p:cNvPr id="57" name="TextBox 56"/>
-          <p:cNvSpPr txBox="1"/>
-          <p:nvPr/>
-        </p:nvSpPr>
-        <p:spPr>
-          <a:xfrm>
-            <a:off x="6345936" y="3995928"/>
-            <a:ext cx="2560320" cy="347472"/>
-          </a:xfrm>
-          <a:prstGeom prst="rect">
-            <a:avLst/>
-          </a:prstGeom>
-          <a:noFill/>
-        </p:spPr>
-        <p:txBody>
-          <a:bodyPr wrap="square">
-            <a:spAutoFit/>
-          </a:bodyPr>
-          <a:lstStyle/>
-          <a:p>
-            <a:pPr algn="l"/>
-            <a:r>
-              <a:rPr sz="900" b="0" i="0">
-                <a:solidFill>
-                  <a:srgbClr val="333333"/>
-                </a:solidFill>
-              </a:rPr>
-              <a:t>✓  Dedicated Account Manager</a:t>
-            </a:r>
-          </a:p>
-        </p:txBody>
-      </p:sp>
-      <p:sp>
-        <p:nvSpPr>
-          <p:cNvPr id="58" name="TextBox 57"/>
-          <p:cNvSpPr txBox="1"/>
-          <p:nvPr/>
-        </p:nvSpPr>
-        <p:spPr>
-          <a:xfrm>
-            <a:off x="6345936" y="4379976"/>
-            <a:ext cx="2560320" cy="347472"/>
-          </a:xfrm>
-          <a:prstGeom prst="rect">
-            <a:avLst/>
-          </a:prstGeom>
-          <a:noFill/>
-        </p:spPr>
-        <p:txBody>
-          <a:bodyPr wrap="square">
-            <a:spAutoFit/>
-          </a:bodyPr>
-          <a:lstStyle/>
-          <a:p>
-            <a:pPr algn="l"/>
-            <a:r>
-              <a:rPr sz="900" b="0" i="0">
-                <a:solidFill>
-                  <a:srgbClr val="333333"/>
-                </a:solidFill>
-              </a:rPr>
-              <a:t>✓  SLA Guarantee</a:t>
-            </a:r>
-          </a:p>
-        </p:txBody>
-      </p:sp>
-      <p:sp>
-        <p:nvSpPr>
-          <p:cNvPr id="59" name="TextBox 58"/>
-          <p:cNvSpPr txBox="1"/>
-          <p:nvPr/>
-        </p:nvSpPr>
-        <p:spPr>
-          <a:xfrm>
-            <a:off x="6345936" y="4764024"/>
-            <a:ext cx="2560320" cy="347472"/>
-          </a:xfrm>
-          <a:prstGeom prst="rect">
-            <a:avLst/>
-          </a:prstGeom>
-          <a:noFill/>
-        </p:spPr>
-        <p:txBody>
-          <a:bodyPr wrap="square">
-            <a:spAutoFit/>
-          </a:bodyPr>
-          <a:lstStyle/>
-          <a:p>
-            <a:pPr algn="l"/>
-            <a:r>
-              <a:rPr sz="900" b="0" i="0">
-                <a:solidFill>
-                  <a:srgbClr val="333333"/>
-                </a:solidFill>
-              </a:rPr>
-              <a:t>✓  Custom Integrations</a:t>
-            </a:r>
-          </a:p>
-        </p:txBody>
-      </p:sp>
-      <p:sp>
-        <p:nvSpPr>
-          <p:cNvPr id="60" name="TextBox 59"/>
-          <p:cNvSpPr txBox="1"/>
-          <p:nvPr/>
-        </p:nvSpPr>
-        <p:spPr>
-          <a:xfrm>
-            <a:off x="6345936" y="5148072"/>
-            <a:ext cx="2560320" cy="347472"/>
-          </a:xfrm>
-          <a:prstGeom prst="rect">
-            <a:avLst/>
-          </a:prstGeom>
-          <a:noFill/>
-        </p:spPr>
-        <p:txBody>
-          <a:bodyPr wrap="square">
-            <a:spAutoFit/>
-          </a:bodyPr>
-          <a:lstStyle/>
-          <a:p>
-            <a:pPr algn="l"/>
-            <a:r>
-              <a:rPr sz="900" b="0" i="0">
-                <a:solidFill>
-                  <a:srgbClr val="333333"/>
-                </a:solidFill>
-              </a:rPr>
-              <a:t>✓  On-premise Option</a:t>
-            </a:r>
-          </a:p>
-        </p:txBody>
-      </p:sp>
-      <p:sp>
-        <p:nvSpPr>
-          <p:cNvPr id="61" name="TextBox 60"/>
-          <p:cNvSpPr txBox="1"/>
-          <p:nvPr/>
-        </p:nvSpPr>
-        <p:spPr>
-          <a:xfrm>
-            <a:off x="6345936" y="5532120"/>
-            <a:ext cx="2560320" cy="347472"/>
-          </a:xfrm>
-          <a:prstGeom prst="rect">
-            <a:avLst/>
-          </a:prstGeom>
-          <a:noFill/>
-        </p:spPr>
-        <p:txBody>
-          <a:bodyPr wrap="square">
-            <a:spAutoFit/>
-          </a:bodyPr>
-          <a:lstStyle/>
-          <a:p>
-            <a:pPr algn="l"/>
-            <a:r>
-              <a:rPr sz="900" b="0" i="0">
-                <a:solidFill>
-                  <a:srgbClr val="333333"/>
-                </a:solidFill>
-              </a:rPr>
-              <a:t>✓  Training Workshops</a:t>
-            </a:r>
-          </a:p>
-        </p:txBody>
-      </p:sp>
-      <p:sp>
-        <p:nvSpPr>
-          <p:cNvPr id="62" name="TextBox 61"/>
-          <p:cNvSpPr txBox="1"/>
-          <p:nvPr/>
-        </p:nvSpPr>
-        <p:spPr>
-          <a:xfrm>
-            <a:off x="6345936" y="5916168"/>
-            <a:ext cx="2560320" cy="347472"/>
-          </a:xfrm>
-          <a:prstGeom prst="rect">
-            <a:avLst/>
-          </a:prstGeom>
-          <a:noFill/>
-        </p:spPr>
-        <p:txBody>
-          <a:bodyPr wrap="square">
-            <a:spAutoFit/>
-          </a:bodyPr>
-          <a:lstStyle/>
-          <a:p>
-            <a:pPr algn="l"/>
-            <a:r>
-              <a:rPr sz="900" b="0" i="0">
-                <a:solidFill>
-                  <a:srgbClr val="333333"/>
-                </a:solidFill>
-              </a:rPr>
-              <a:t>✓  NABL Audit Support</a:t>
-            </a:r>
-          </a:p>
-        </p:txBody>
-      </p:sp>
-      <p:sp>
-        <p:nvSpPr>
-          <p:cNvPr id="63" name="Rectangle 62"/>
-          <p:cNvSpPr/>
-          <p:nvPr/>
-        </p:nvSpPr>
-        <p:spPr>
-          <a:xfrm>
-            <a:off x="9253728" y="1197864"/>
-            <a:ext cx="2788920" cy="5394960"/>
-          </a:xfrm>
-          <a:prstGeom prst="rect">
-            <a:avLst/>
-          </a:prstGeom>
-          <a:solidFill>
-            <a:srgbClr val="CCCCCC"/>
-          </a:solidFill>
-          <a:ln>
-            <a:noFill/>
-          </a:ln>
-        </p:spPr>
-        <p:style>
-          <a:lnRef idx="1">
-            <a:schemeClr val="accent1"/>
-          </a:lnRef>
-          <a:fillRef idx="3">
-            <a:schemeClr val="accent1"/>
-          </a:fillRef>
-          <a:effectRef idx="2">
-            <a:schemeClr val="accent1"/>
-          </a:effectRef>
-          <a:fontRef idx="minor">
-            <a:schemeClr val="lt1"/>
-          </a:fontRef>
-        </p:style>
-        <p:txBody>
-          <a:bodyPr rtlCol="0" anchor="ctr"/>
-          <a:lstStyle/>
-          <a:p>
-            <a:pPr algn="ctr"/>
-          </a:p>
-        </p:txBody>
-      </p:sp>
-      <p:sp>
-        <p:nvSpPr>
-          <p:cNvPr id="64" name="Rectangle 63"/>
-          <p:cNvSpPr/>
-          <p:nvPr/>
-        </p:nvSpPr>
-        <p:spPr>
-          <a:xfrm>
-            <a:off x="9198864" y="1143000"/>
-            <a:ext cx="2788920" cy="5394960"/>
-          </a:xfrm>
-          <a:prstGeom prst="rect">
-            <a:avLst/>
-          </a:prstGeom>
-          <a:solidFill>
-            <a:srgbClr val="FFFFFF"/>
-          </a:solidFill>
-          <a:ln w="6350">
-            <a:solidFill>
-              <a:srgbClr val="E2E8F0"/>
-            </a:solidFill>
-          </a:ln>
-        </p:spPr>
-        <p:style>
-          <a:lnRef idx="1">
-            <a:schemeClr val="accent1"/>
-          </a:lnRef>
-          <a:fillRef idx="3">
-            <a:schemeClr val="accent1"/>
-          </a:fillRef>
-          <a:effectRef idx="2">
-            <a:schemeClr val="accent1"/>
-          </a:effectRef>
-          <a:fontRef idx="minor">
-            <a:schemeClr val="lt1"/>
-          </a:fontRef>
-        </p:style>
-        <p:txBody>
-          <a:bodyPr rtlCol="0" anchor="ctr"/>
-          <a:lstStyle/>
-          <a:p>
-            <a:pPr algn="ctr"/>
-          </a:p>
-        </p:txBody>
-      </p:sp>
-      <p:sp>
-        <p:nvSpPr>
-          <p:cNvPr id="65" name="Rectangle 64"/>
-          <p:cNvSpPr/>
-          <p:nvPr/>
-        </p:nvSpPr>
-        <p:spPr>
-          <a:xfrm>
-            <a:off x="9198864" y="1143000"/>
-            <a:ext cx="2788920" cy="1188720"/>
-          </a:xfrm>
-          <a:prstGeom prst="rect">
-            <a:avLst/>
-          </a:prstGeom>
-          <a:solidFill>
-            <a:srgbClr val="2D1B69"/>
-          </a:solidFill>
-          <a:ln>
-            <a:noFill/>
-          </a:ln>
-        </p:spPr>
-        <p:style>
-          <a:lnRef idx="1">
-            <a:schemeClr val="accent1"/>
-          </a:lnRef>
-          <a:fillRef idx="3">
-            <a:schemeClr val="accent1"/>
-          </a:fillRef>
-          <a:effectRef idx="2">
-            <a:schemeClr val="accent1"/>
-          </a:effectRef>
-          <a:fontRef idx="minor">
-            <a:schemeClr val="lt1"/>
-          </a:fontRef>
-        </p:style>
-        <p:txBody>
-          <a:bodyPr rtlCol="0" anchor="ctr"/>
-          <a:lstStyle/>
-          <a:p>
-            <a:pPr algn="ctr"/>
-          </a:p>
-        </p:txBody>
-      </p:sp>
-      <p:sp>
-        <p:nvSpPr>
-          <p:cNvPr id="66" name="TextBox 65"/>
-          <p:cNvSpPr txBox="1"/>
-          <p:nvPr/>
-        </p:nvSpPr>
-        <p:spPr>
-          <a:xfrm>
-            <a:off x="9198864" y="1234440"/>
-            <a:ext cx="2788920" cy="411480"/>
-          </a:xfrm>
-          <a:prstGeom prst="rect">
-            <a:avLst/>
-          </a:prstGeom>
-          <a:noFill/>
-        </p:spPr>
-        <p:txBody>
-          <a:bodyPr wrap="square">
-            <a:spAutoFit/>
-          </a:bodyPr>
-          <a:lstStyle/>
-          <a:p>
-            <a:pPr algn="ctr"/>
-            <a:r>
-              <a:rPr sz="1800" b="0" i="0">
-                <a:solidFill>
-                  <a:srgbClr val="FFFFFF"/>
-                </a:solidFill>
-              </a:rPr>
-              <a:t>🌐</a:t>
-            </a:r>
-          </a:p>
-        </p:txBody>
-      </p:sp>
-      <p:sp>
-        <p:nvSpPr>
-          <p:cNvPr id="67" name="TextBox 66"/>
-          <p:cNvSpPr txBox="1"/>
-          <p:nvPr/>
-        </p:nvSpPr>
-        <p:spPr>
-          <a:xfrm>
-            <a:off x="9198864" y="1618488"/>
-            <a:ext cx="2788920" cy="365760"/>
-          </a:xfrm>
-          <a:prstGeom prst="rect">
-            <a:avLst/>
-          </a:prstGeom>
-          <a:noFill/>
-        </p:spPr>
-        <p:txBody>
-          <a:bodyPr wrap="square">
-            <a:spAutoFit/>
-          </a:bodyPr>
-          <a:lstStyle/>
-          <a:p>
-            <a:pPr algn="ctr"/>
-            <a:r>
-              <a:rPr sz="1400" b="1" i="0">
-                <a:solidFill>
-                  <a:srgbClr val="FFFFFF"/>
-                </a:solidFill>
-              </a:rPr>
-              <a:t>Enterprise+</a:t>
-            </a:r>
-          </a:p>
-        </p:txBody>
-      </p:sp>
-      <p:sp>
-        <p:nvSpPr>
-          <p:cNvPr id="68" name="TextBox 67"/>
-          <p:cNvSpPr txBox="1"/>
-          <p:nvPr/>
-        </p:nvSpPr>
-        <p:spPr>
-          <a:xfrm>
-            <a:off x="9198864" y="1965960"/>
-            <a:ext cx="2788920" cy="274320"/>
-          </a:xfrm>
-          <a:prstGeom prst="rect">
-            <a:avLst/>
-          </a:prstGeom>
-          <a:noFill/>
-        </p:spPr>
-        <p:txBody>
-          <a:bodyPr wrap="square">
-            <a:spAutoFit/>
-          </a:bodyPr>
-          <a:lstStyle/>
-          <a:p>
-            <a:pPr algn="ctr"/>
-            <a:r>
-              <a:rPr sz="850" b="0" i="0">
-                <a:solidFill>
-                  <a:srgbClr val="CCDDFF"/>
-                </a:solidFill>
-              </a:rPr>
-              <a:t>Unlimited Users</a:t>
-            </a:r>
-          </a:p>
-        </p:txBody>
-      </p:sp>
-      <p:sp>
-        <p:nvSpPr>
-          <p:cNvPr id="69" name="Rectangle 68"/>
-          <p:cNvSpPr/>
-          <p:nvPr/>
-        </p:nvSpPr>
-        <p:spPr>
-          <a:xfrm>
-            <a:off x="9198864" y="2331720"/>
-            <a:ext cx="2788920" cy="502920"/>
-          </a:xfrm>
-          <a:prstGeom prst="rect">
-            <a:avLst/>
-          </a:prstGeom>
-          <a:solidFill>
-            <a:srgbClr val="F5F7FA"/>
-          </a:solidFill>
-          <a:ln>
-            <a:noFill/>
-          </a:ln>
-        </p:spPr>
-        <p:style>
-          <a:lnRef idx="1">
-            <a:schemeClr val="accent1"/>
-          </a:lnRef>
-          <a:fillRef idx="3">
-            <a:schemeClr val="accent1"/>
-          </a:fillRef>
-          <a:effectRef idx="2">
-            <a:schemeClr val="accent1"/>
-          </a:effectRef>
-          <a:fontRef idx="minor">
-            <a:schemeClr val="lt1"/>
-          </a:fontRef>
-        </p:style>
-        <p:txBody>
-          <a:bodyPr rtlCol="0" anchor="ctr"/>
-          <a:lstStyle/>
-          <a:p>
-            <a:pPr algn="ctr"/>
-          </a:p>
-        </p:txBody>
-      </p:sp>
-      <p:sp>
-        <p:nvSpPr>
-          <p:cNvPr id="70" name="TextBox 69"/>
-          <p:cNvSpPr txBox="1"/>
-          <p:nvPr/>
-        </p:nvSpPr>
-        <p:spPr>
-          <a:xfrm>
-            <a:off x="9290304" y="2350008"/>
-            <a:ext cx="2606039" cy="228600"/>
-          </a:xfrm>
-          <a:prstGeom prst="rect">
-            <a:avLst/>
-          </a:prstGeom>
-          <a:noFill/>
-        </p:spPr>
-        <p:txBody>
-          <a:bodyPr wrap="square">
-            <a:spAutoFit/>
-          </a:bodyPr>
-          <a:lstStyle/>
-          <a:p>
-            <a:pPr algn="l"/>
-            <a:r>
-              <a:rPr sz="750" b="0" i="0">
-                <a:solidFill>
-                  <a:srgbClr val="888888"/>
-                </a:solidFill>
-              </a:rPr>
-              <a:t>Implementation &amp; Onboarding</a:t>
-            </a:r>
-          </a:p>
-        </p:txBody>
-      </p:sp>
-      <p:sp>
-        <p:nvSpPr>
-          <p:cNvPr id="71" name="TextBox 70"/>
-          <p:cNvSpPr txBox="1"/>
-          <p:nvPr/>
-        </p:nvSpPr>
-        <p:spPr>
-          <a:xfrm>
-            <a:off x="9290304" y="2560320"/>
-            <a:ext cx="2606039" cy="228600"/>
-          </a:xfrm>
-          <a:prstGeom prst="rect">
-            <a:avLst/>
-          </a:prstGeom>
-          <a:noFill/>
-        </p:spPr>
-        <p:txBody>
-          <a:bodyPr wrap="square">
-            <a:spAutoFit/>
-          </a:bodyPr>
-          <a:lstStyle/>
-          <a:p>
-            <a:pPr algn="l"/>
-            <a:r>
-              <a:rPr sz="1100" b="1" i="0">
-                <a:solidFill>
-                  <a:srgbClr val="0F3460"/>
-                </a:solidFill>
-              </a:rPr>
-              <a:t>Custom Quote</a:t>
-            </a:r>
-          </a:p>
-        </p:txBody>
-      </p:sp>
-      <p:sp>
-        <p:nvSpPr>
-          <p:cNvPr id="72" name="Rectangle 71"/>
-          <p:cNvSpPr/>
-          <p:nvPr/>
-        </p:nvSpPr>
-        <p:spPr>
-          <a:xfrm>
-            <a:off x="9198864" y="2834640"/>
-            <a:ext cx="2788920" cy="640080"/>
-          </a:xfrm>
-          <a:prstGeom prst="rect">
-            <a:avLst/>
-          </a:prstGeom>
-          <a:solidFill>
-            <a:srgbClr val="2D1B69"/>
-          </a:solidFill>
-          <a:ln>
-            <a:noFill/>
-          </a:ln>
-        </p:spPr>
-        <p:style>
-          <a:lnRef idx="1">
-            <a:schemeClr val="accent1"/>
-          </a:lnRef>
-          <a:fillRef idx="3">
-            <a:schemeClr val="accent1"/>
-          </a:fillRef>
-          <a:effectRef idx="2">
-            <a:schemeClr val="accent1"/>
-          </a:effectRef>
-          <a:fontRef idx="minor">
-            <a:schemeClr val="lt1"/>
-          </a:fontRef>
-        </p:style>
-        <p:txBody>
-          <a:bodyPr rtlCol="0" anchor="ctr"/>
-          <a:lstStyle/>
-          <a:p>
-            <a:pPr algn="ctr"/>
-          </a:p>
-        </p:txBody>
-      </p:sp>
-      <p:sp>
-        <p:nvSpPr>
-          <p:cNvPr id="73" name="TextBox 72"/>
-          <p:cNvSpPr txBox="1"/>
-          <p:nvPr/>
-        </p:nvSpPr>
-        <p:spPr>
-          <a:xfrm>
-            <a:off x="9198864" y="2880360"/>
-            <a:ext cx="2788920" cy="347472"/>
-          </a:xfrm>
-          <a:prstGeom prst="rect">
-            <a:avLst/>
-          </a:prstGeom>
-          <a:noFill/>
-        </p:spPr>
-        <p:txBody>
-          <a:bodyPr wrap="square">
-            <a:spAutoFit/>
-          </a:bodyPr>
-          <a:lstStyle/>
-          <a:p>
-            <a:pPr algn="ctr"/>
-            <a:r>
-              <a:rPr sz="1600" b="1" i="0">
-                <a:solidFill>
-                  <a:srgbClr val="FFFFFF"/>
-                </a:solidFill>
-              </a:rPr>
-              <a:t>Custom Quote</a:t>
-            </a:r>
-          </a:p>
-        </p:txBody>
-      </p:sp>
-      <p:sp>
-        <p:nvSpPr>
-          <p:cNvPr id="74" name="TextBox 73"/>
-          <p:cNvSpPr txBox="1"/>
-          <p:nvPr/>
-        </p:nvSpPr>
-        <p:spPr>
-          <a:xfrm>
-            <a:off x="9198864" y="3227832"/>
-            <a:ext cx="2788920" cy="201168"/>
-          </a:xfrm>
-          <a:prstGeom prst="rect">
-            <a:avLst/>
-          </a:prstGeom>
-          <a:noFill/>
-        </p:spPr>
-        <p:txBody>
-          <a:bodyPr wrap="square">
-            <a:spAutoFit/>
-          </a:bodyPr>
-          <a:lstStyle/>
-          <a:p>
-            <a:pPr algn="ctr"/>
-            <a:r>
-              <a:rPr sz="750" b="0" i="0">
-                <a:solidFill>
-                  <a:srgbClr val="CCDDFF"/>
-                </a:solidFill>
-              </a:rPr>
-              <a:t>Monthly Subscription</a:t>
-            </a:r>
-          </a:p>
-        </p:txBody>
-      </p:sp>
-      <p:sp>
-        <p:nvSpPr>
-          <p:cNvPr id="75" name="TextBox 74"/>
-          <p:cNvSpPr txBox="1"/>
-          <p:nvPr/>
-        </p:nvSpPr>
-        <p:spPr>
-          <a:xfrm>
-            <a:off x="9336024" y="3611880"/>
-            <a:ext cx="2560320" cy="347472"/>
-          </a:xfrm>
-          <a:prstGeom prst="rect">
-            <a:avLst/>
-          </a:prstGeom>
-          <a:noFill/>
-        </p:spPr>
-        <p:txBody>
-          <a:bodyPr wrap="square">
-            <a:spAutoFit/>
-          </a:bodyPr>
-          <a:lstStyle/>
-          <a:p>
-            <a:pPr algn="l"/>
-            <a:r>
-              <a:rPr sz="900" b="0" i="0">
-                <a:solidFill>
-                  <a:srgbClr val="333333"/>
-                </a:solidFill>
-              </a:rPr>
-              <a:t>✓  Everything in Enterprise</a:t>
-            </a:r>
-          </a:p>
-        </p:txBody>
-      </p:sp>
-      <p:sp>
-        <p:nvSpPr>
-          <p:cNvPr id="76" name="TextBox 75"/>
-          <p:cNvSpPr txBox="1"/>
-          <p:nvPr/>
-        </p:nvSpPr>
-        <p:spPr>
-          <a:xfrm>
-            <a:off x="9336024" y="3995928"/>
-            <a:ext cx="2560320" cy="347472"/>
-          </a:xfrm>
-          <a:prstGeom prst="rect">
-            <a:avLst/>
-          </a:prstGeom>
-          <a:noFill/>
-        </p:spPr>
-        <p:txBody>
-          <a:bodyPr wrap="square">
-            <a:spAutoFit/>
-          </a:bodyPr>
-          <a:lstStyle/>
-          <a:p>
-            <a:pPr algn="l"/>
-            <a:r>
-              <a:rPr sz="900" b="0" i="0">
-                <a:solidFill>
-                  <a:srgbClr val="333333"/>
-                </a:solidFill>
-              </a:rPr>
-              <a:t>✓  White-label Option</a:t>
-            </a:r>
-          </a:p>
-        </p:txBody>
-      </p:sp>
-      <p:sp>
-        <p:nvSpPr>
-          <p:cNvPr id="77" name="TextBox 76"/>
-          <p:cNvSpPr txBox="1"/>
-          <p:nvPr/>
-        </p:nvSpPr>
-        <p:spPr>
-          <a:xfrm>
-            <a:off x="9336024" y="4379976"/>
-            <a:ext cx="2560320" cy="347472"/>
-          </a:xfrm>
-          <a:prstGeom prst="rect">
-            <a:avLst/>
-          </a:prstGeom>
-          <a:noFill/>
-        </p:spPr>
-        <p:txBody>
-          <a:bodyPr wrap="square">
-            <a:spAutoFit/>
-          </a:bodyPr>
-          <a:lstStyle/>
-          <a:p>
-            <a:pPr algn="l"/>
-            <a:r>
-              <a:rPr sz="900" b="0" i="0">
-                <a:solidFill>
-                  <a:srgbClr val="333333"/>
-                </a:solidFill>
-              </a:rPr>
-              <a:t>✓  Source Code License</a:t>
-            </a:r>
-          </a:p>
-        </p:txBody>
-      </p:sp>
-      <p:sp>
-        <p:nvSpPr>
-          <p:cNvPr id="78" name="TextBox 77"/>
-          <p:cNvSpPr txBox="1"/>
-          <p:nvPr/>
-        </p:nvSpPr>
-        <p:spPr>
-          <a:xfrm>
-            <a:off x="9336024" y="4764024"/>
-            <a:ext cx="2560320" cy="347472"/>
-          </a:xfrm>
-          <a:prstGeom prst="rect">
-            <a:avLst/>
-          </a:prstGeom>
-          <a:noFill/>
-        </p:spPr>
-        <p:txBody>
-          <a:bodyPr wrap="square">
-            <a:spAutoFit/>
-          </a:bodyPr>
-          <a:lstStyle/>
-          <a:p>
-            <a:pPr algn="l"/>
-            <a:r>
-              <a:rPr sz="900" b="0" i="0">
-                <a:solidFill>
-                  <a:srgbClr val="333333"/>
-                </a:solidFill>
-              </a:rPr>
-              <a:t>✓  Custom AI Features</a:t>
-            </a:r>
-          </a:p>
-        </p:txBody>
-      </p:sp>
-      <p:sp>
-        <p:nvSpPr>
-          <p:cNvPr id="79" name="TextBox 78"/>
-          <p:cNvSpPr txBox="1"/>
-          <p:nvPr/>
-        </p:nvSpPr>
-        <p:spPr>
-          <a:xfrm>
-            <a:off x="9336024" y="5148072"/>
-            <a:ext cx="2560320" cy="347472"/>
-          </a:xfrm>
-          <a:prstGeom prst="rect">
-            <a:avLst/>
-          </a:prstGeom>
-          <a:noFill/>
-        </p:spPr>
-        <p:txBody>
-          <a:bodyPr wrap="square">
-            <a:spAutoFit/>
-          </a:bodyPr>
-          <a:lstStyle/>
-          <a:p>
-            <a:pPr algn="l"/>
-            <a:r>
-              <a:rPr sz="900" b="0" i="0">
-                <a:solidFill>
-                  <a:srgbClr val="333333"/>
-                </a:solidFill>
-              </a:rPr>
-              <a:t>✓  Multi-lab Group Mgmt</a:t>
-            </a:r>
-          </a:p>
-        </p:txBody>
-      </p:sp>
-      <p:sp>
-        <p:nvSpPr>
-          <p:cNvPr id="80" name="TextBox 79"/>
-          <p:cNvSpPr txBox="1"/>
-          <p:nvPr/>
-        </p:nvSpPr>
-        <p:spPr>
-          <a:xfrm>
-            <a:off x="9336024" y="5532120"/>
-            <a:ext cx="2560320" cy="347472"/>
-          </a:xfrm>
-          <a:prstGeom prst="rect">
-            <a:avLst/>
-          </a:prstGeom>
-          <a:noFill/>
-        </p:spPr>
-        <p:txBody>
-          <a:bodyPr wrap="square">
-            <a:spAutoFit/>
-          </a:bodyPr>
-          <a:lstStyle/>
-          <a:p>
-            <a:pPr algn="l"/>
-            <a:r>
-              <a:rPr sz="900" b="0" i="0">
-                <a:solidFill>
-                  <a:srgbClr val="333333"/>
-                </a:solidFill>
-              </a:rPr>
-              <a:t>✓  24×7 Dedicated Support</a:t>
-            </a:r>
-          </a:p>
-        </p:txBody>
-      </p:sp>
-      <p:sp>
-        <p:nvSpPr>
-          <p:cNvPr id="81" name="TextBox 80"/>
-          <p:cNvSpPr txBox="1"/>
-          <p:nvPr/>
-        </p:nvSpPr>
-        <p:spPr>
-          <a:xfrm>
-            <a:off x="9336024" y="5916168"/>
-            <a:ext cx="2560320" cy="347472"/>
-          </a:xfrm>
-          <a:prstGeom prst="rect">
-            <a:avLst/>
-          </a:prstGeom>
-          <a:noFill/>
-        </p:spPr>
-        <p:txBody>
-          <a:bodyPr wrap="square">
-            <a:spAutoFit/>
-          </a:bodyPr>
-          <a:lstStyle/>
-          <a:p>
-            <a:pPr algn="l"/>
-            <a:r>
-              <a:rPr sz="900" b="0" i="0">
-                <a:solidFill>
-                  <a:srgbClr val="333333"/>
-                </a:solidFill>
-              </a:rPr>
-              <a:t>✓  Quarterly Business Review</a:t>
-            </a:r>
-          </a:p>
-        </p:txBody>
-      </p:sp>
-      <p:sp>
-        <p:nvSpPr>
-          <p:cNvPr id="82" name="TextBox 81"/>
-          <p:cNvSpPr txBox="1"/>
-          <p:nvPr/>
-        </p:nvSpPr>
-        <p:spPr>
-          <a:xfrm>
-            <a:off x="228600" y="6492240"/>
-            <a:ext cx="11704320" cy="320040"/>
-          </a:xfrm>
-          <a:prstGeom prst="rect">
-            <a:avLst/>
-          </a:prstGeom>
-          <a:noFill/>
-        </p:spPr>
-        <p:txBody>
-          <a:bodyPr wrap="square">
-            <a:spAutoFit/>
-          </a:bodyPr>
-          <a:lstStyle/>
-          <a:p>
-            <a:pPr algn="l"/>
-            <a:r>
-              <a:rPr sz="850" b="0" i="1">
-                <a:solidFill>
-                  <a:srgbClr val="888888"/>
-                </a:solidFill>
-              </a:rPr>
-              <a:t>* All plans include: Free Setup, Data Migration Assistance, User Training, 30-day free trial period, and 1-year bug-fix warranty.</a:t>
             </a:r>
           </a:p>
         </p:txBody>

--- a/CortexCLMS-Presentation.pptx
+++ b/CortexCLMS-Presentation.pptx
@@ -7508,7 +7508,7 @@
                   <a:srgbClr val="888888"/>
                 </a:solidFill>
               </a:rPr>
-              <a:t>* All plans include: Free Setup, Data Migration Assistance, User Training, 30-day free trial period, and 1-year bug-fix warranty.</a:t>
+              <a:t>* All plans include: Free Setup, Data Migration Assistance, User Training, and 1-year bug-fix warranty.</a:t>
             </a:r>
           </a:p>
         </p:txBody>
@@ -16754,7 +16754,7 @@
                   <a:srgbClr val="FFFFFF"/>
                 </a:solidFill>
               </a:rPr>
-              <a:t>30-Day Free Trial</a:t>
+              <a:t>Pilot Implementation</a:t>
             </a:r>
           </a:p>
         </p:txBody>
@@ -16788,7 +16788,7 @@
                   <a:srgbClr val="AABBCC"/>
                 </a:solidFill>
               </a:rPr>
-              <a:t>Get full access to all features. Your data, your lab — zero commitment.</a:t>
+              <a:t>We set up your lab data, configure workflows, and run a pilot with your team — hands-on and guided.</a:t>
             </a:r>
           </a:p>
         </p:txBody>

--- a/CortexCLMS-Presentation.pptx
+++ b/CortexCLMS-Presentation.pptx
@@ -4167,8 +4167,8 @@
         </p:nvSpPr>
         <p:spPr>
           <a:xfrm>
-            <a:off x="548640" y="914400"/>
-            <a:ext cx="1005840" cy="1005840"/>
+            <a:off x="502920" y="914400"/>
+            <a:ext cx="109728" cy="822960"/>
           </a:xfrm>
           <a:prstGeom prst="rect">
             <a:avLst/>
@@ -4210,42 +4210,119 @@
         </p:nvSpPr>
         <p:spPr>
           <a:xfrm>
-            <a:off x="566928" y="960120"/>
-            <a:ext cx="1005840" cy="914400"/>
-          </a:xfrm>
-          <a:prstGeom prst="rect">
-            <a:avLst/>
-          </a:prstGeom>
-          <a:noFill/>
-        </p:spPr>
-        <p:txBody>
-          <a:bodyPr wrap="square">
-            <a:spAutoFit/>
-          </a:bodyPr>
-          <a:lstStyle/>
-          <a:p>
-            <a:pPr algn="ctr"/>
-            <a:r>
-              <a:rPr sz="3600" b="1" i="0">
+            <a:off x="658368" y="914400"/>
+            <a:ext cx="2743200" cy="502920"/>
+          </a:xfrm>
+          <a:prstGeom prst="rect">
+            <a:avLst/>
+          </a:prstGeom>
+          <a:noFill/>
+        </p:spPr>
+        <p:txBody>
+          <a:bodyPr wrap="square">
+            <a:spAutoFit/>
+          </a:bodyPr>
+          <a:lstStyle/>
+          <a:p>
+            <a:pPr algn="l"/>
+            <a:r>
+              <a:rPr sz="2800" b="1" i="0">
                 <a:solidFill>
                   <a:srgbClr val="FFFFFF"/>
                 </a:solidFill>
               </a:rPr>
-              <a:t>C</a:t>
-            </a:r>
-          </a:p>
-        </p:txBody>
-      </p:sp>
-      <p:sp>
-        <p:nvSpPr>
-          <p:cNvPr id="10" name="TextBox 9"/>
-          <p:cNvSpPr txBox="1"/>
-          <p:nvPr/>
-        </p:nvSpPr>
-        <p:spPr>
-          <a:xfrm>
-            <a:off x="1691640" y="914400"/>
-            <a:ext cx="8229600" cy="411480"/>
+              <a:t>CORTEX</a:t>
+            </a:r>
+          </a:p>
+        </p:txBody>
+      </p:sp>
+      <p:sp>
+        <p:nvSpPr>
+          <p:cNvPr id="10" name="Rectangle 9"/>
+          <p:cNvSpPr/>
+          <p:nvPr/>
+        </p:nvSpPr>
+        <p:spPr>
+          <a:xfrm>
+            <a:off x="658368" y="1417320"/>
+            <a:ext cx="2651760" cy="320040"/>
+          </a:xfrm>
+          <a:prstGeom prst="rect">
+            <a:avLst/>
+          </a:prstGeom>
+          <a:solidFill>
+            <a:srgbClr val="1A1A1A"/>
+          </a:solidFill>
+          <a:ln>
+            <a:noFill/>
+          </a:ln>
+        </p:spPr>
+        <p:style>
+          <a:lnRef idx="1">
+            <a:schemeClr val="accent1"/>
+          </a:lnRef>
+          <a:fillRef idx="3">
+            <a:schemeClr val="accent1"/>
+          </a:fillRef>
+          <a:effectRef idx="2">
+            <a:schemeClr val="accent1"/>
+          </a:effectRef>
+          <a:fontRef idx="minor">
+            <a:schemeClr val="lt1"/>
+          </a:fontRef>
+        </p:style>
+        <p:txBody>
+          <a:bodyPr rtlCol="0" anchor="ctr"/>
+          <a:lstStyle/>
+          <a:p>
+            <a:pPr algn="ctr"/>
+          </a:p>
+        </p:txBody>
+      </p:sp>
+      <p:sp>
+        <p:nvSpPr>
+          <p:cNvPr id="11" name="TextBox 10"/>
+          <p:cNvSpPr txBox="1"/>
+          <p:nvPr/>
+        </p:nvSpPr>
+        <p:spPr>
+          <a:xfrm>
+            <a:off x="658368" y="1435608"/>
+            <a:ext cx="2651760" cy="292608"/>
+          </a:xfrm>
+          <a:prstGeom prst="rect">
+            <a:avLst/>
+          </a:prstGeom>
+          <a:noFill/>
+        </p:spPr>
+        <p:txBody>
+          <a:bodyPr wrap="square">
+            <a:spAutoFit/>
+          </a:bodyPr>
+          <a:lstStyle/>
+          <a:p>
+            <a:pPr algn="ctr"/>
+            <a:r>
+              <a:rPr sz="950" b="1" i="0">
+                <a:solidFill>
+                  <a:srgbClr val="FFFFFF"/>
+                </a:solidFill>
+              </a:rPr>
+              <a:t>AI  TECHNOLOGIES</a:t>
+            </a:r>
+          </a:p>
+        </p:txBody>
+      </p:sp>
+      <p:sp>
+        <p:nvSpPr>
+          <p:cNvPr id="12" name="TextBox 11"/>
+          <p:cNvSpPr txBox="1"/>
+          <p:nvPr/>
+        </p:nvSpPr>
+        <p:spPr>
+          <a:xfrm>
+            <a:off x="1691640" y="1920240"/>
+            <a:ext cx="3657600" cy="1005840"/>
           </a:xfrm>
           <a:prstGeom prst="rect">
             <a:avLst/>
@@ -4260,26 +4337,26 @@
           <a:p>
             <a:pPr algn="l"/>
             <a:r>
-              <a:rPr sz="1100" b="1" i="0">
-                <a:solidFill>
-                  <a:srgbClr val="E94560"/>
-                </a:solidFill>
-              </a:rPr>
-              <a:t>CORTEX TECHNOLOGIES</a:t>
-            </a:r>
-          </a:p>
-        </p:txBody>
-      </p:sp>
-      <p:sp>
-        <p:nvSpPr>
-          <p:cNvPr id="11" name="TextBox 10"/>
-          <p:cNvSpPr txBox="1"/>
-          <p:nvPr/>
-        </p:nvSpPr>
-        <p:spPr>
-          <a:xfrm>
-            <a:off x="1691640" y="1371600"/>
-            <a:ext cx="8229600" cy="1280160"/>
+              <a:rPr sz="4800" b="1" i="0">
+                <a:solidFill>
+                  <a:srgbClr val="FFFFFF"/>
+                </a:solidFill>
+              </a:rPr>
+              <a:t>Cortex</a:t>
+            </a:r>
+          </a:p>
+        </p:txBody>
+      </p:sp>
+      <p:sp>
+        <p:nvSpPr>
+          <p:cNvPr id="13" name="TextBox 12"/>
+          <p:cNvSpPr txBox="1"/>
+          <p:nvPr/>
+        </p:nvSpPr>
+        <p:spPr>
+          <a:xfrm>
+            <a:off x="4919472" y="1920240"/>
+            <a:ext cx="4389120" cy="1005840"/>
           </a:xfrm>
           <a:prstGeom prst="rect">
             <a:avLst/>
@@ -4294,26 +4371,26 @@
           <a:p>
             <a:pPr algn="l"/>
             <a:r>
-              <a:rPr sz="5400" b="1" i="0">
-                <a:solidFill>
-                  <a:srgbClr val="FFFFFF"/>
-                </a:solidFill>
-              </a:rPr>
-              <a:t>CortexCLMS</a:t>
-            </a:r>
-          </a:p>
-        </p:txBody>
-      </p:sp>
-      <p:sp>
-        <p:nvSpPr>
-          <p:cNvPr id="12" name="TextBox 11"/>
-          <p:cNvSpPr txBox="1"/>
-          <p:nvPr/>
-        </p:nvSpPr>
-        <p:spPr>
-          <a:xfrm>
-            <a:off x="1691640" y="2697480"/>
-            <a:ext cx="8229600" cy="1097280"/>
+              <a:rPr sz="4800" b="1" i="0">
+                <a:solidFill>
+                  <a:srgbClr val="00BFFF"/>
+                </a:solidFill>
+              </a:rPr>
+              <a:t>CLMS</a:t>
+            </a:r>
+          </a:p>
+        </p:txBody>
+      </p:sp>
+      <p:sp>
+        <p:nvSpPr>
+          <p:cNvPr id="14" name="TextBox 13"/>
+          <p:cNvSpPr txBox="1"/>
+          <p:nvPr/>
+        </p:nvSpPr>
+        <p:spPr>
+          <a:xfrm>
+            <a:off x="1691640" y="2944368"/>
+            <a:ext cx="8229600" cy="1005840"/>
           </a:xfrm>
           <a:prstGeom prst="rect">
             <a:avLst/>
@@ -4328,7 +4405,7 @@
           <a:p>
             <a:pPr algn="l"/>
             <a:r>
-              <a:rPr sz="2200" b="0" i="0">
+              <a:rPr sz="2000" b="0" i="0">
                 <a:solidFill>
                   <a:srgbClr val="B0C4DE"/>
                 </a:solidFill>
@@ -4341,13 +4418,13 @@
       </p:sp>
       <p:sp>
         <p:nvSpPr>
-          <p:cNvPr id="13" name="Rectangle 12"/>
+          <p:cNvPr id="15" name="Rectangle 14"/>
           <p:cNvSpPr/>
           <p:nvPr/>
         </p:nvSpPr>
         <p:spPr>
           <a:xfrm>
-            <a:off x="1691640" y="3840480"/>
+            <a:off x="1691640" y="4114800"/>
             <a:ext cx="5029200" cy="36576"/>
           </a:xfrm>
           <a:prstGeom prst="rect">
@@ -4384,14 +4461,14 @@
       </p:sp>
       <p:sp>
         <p:nvSpPr>
-          <p:cNvPr id="14" name="TextBox 13"/>
-          <p:cNvSpPr txBox="1"/>
-          <p:nvPr/>
-        </p:nvSpPr>
-        <p:spPr>
-          <a:xfrm>
-            <a:off x="1691640" y="4023360"/>
-            <a:ext cx="8686800" cy="640080"/>
+          <p:cNvPr id="16" name="TextBox 15"/>
+          <p:cNvSpPr txBox="1"/>
+          <p:nvPr/>
+        </p:nvSpPr>
+        <p:spPr>
+          <a:xfrm>
+            <a:off x="1691640" y="4297680"/>
+            <a:ext cx="8686800" cy="548640"/>
           </a:xfrm>
           <a:prstGeom prst="rect">
             <a:avLst/>
@@ -4418,14 +4495,14 @@
       </p:sp>
       <p:sp>
         <p:nvSpPr>
-          <p:cNvPr id="15" name="TextBox 14"/>
-          <p:cNvSpPr txBox="1"/>
-          <p:nvPr/>
-        </p:nvSpPr>
-        <p:spPr>
-          <a:xfrm>
-            <a:off x="1691640" y="6217920"/>
-            <a:ext cx="5486400" cy="365760"/>
+          <p:cNvPr id="17" name="TextBox 16"/>
+          <p:cNvSpPr txBox="1"/>
+          <p:nvPr/>
+        </p:nvSpPr>
+        <p:spPr>
+          <a:xfrm>
+            <a:off x="1691640" y="4846320"/>
+            <a:ext cx="5486400" cy="320040"/>
           </a:xfrm>
           <a:prstGeom prst="rect">
             <a:avLst/>
@@ -4452,7 +4529,41 @@
       </p:sp>
       <p:sp>
         <p:nvSpPr>
-          <p:cNvPr id="16" name="Rectangle 15"/>
+          <p:cNvPr id="18" name="TextBox 17"/>
+          <p:cNvSpPr txBox="1"/>
+          <p:nvPr/>
+        </p:nvSpPr>
+        <p:spPr>
+          <a:xfrm>
+            <a:off x="1691640" y="6126480"/>
+            <a:ext cx="10058400" cy="457200"/>
+          </a:xfrm>
+          <a:prstGeom prst="rect">
+            <a:avLst/>
+          </a:prstGeom>
+          <a:noFill/>
+        </p:spPr>
+        <p:txBody>
+          <a:bodyPr wrap="square">
+            <a:spAutoFit/>
+          </a:bodyPr>
+          <a:lstStyle/>
+          <a:p>
+            <a:pPr algn="l"/>
+            <a:r>
+              <a:rPr sz="950" b="0" i="0">
+                <a:solidFill>
+                  <a:srgbClr val="88AACC"/>
+                </a:solidFill>
+              </a:rPr>
+              <a:t>📞 +91 8329925318   |   ✉ cortexaitechnologies@zohomail.in   |   📍 Pune, Maharashtra, India 411034</a:t>
+            </a:r>
+          </a:p>
+        </p:txBody>
+      </p:sp>
+      <p:sp>
+        <p:nvSpPr>
+          <p:cNvPr id="19" name="Rectangle 18"/>
           <p:cNvSpPr/>
           <p:nvPr/>
         </p:nvSpPr>
@@ -4495,7 +4606,7 @@
       </p:sp>
       <p:sp>
         <p:nvSpPr>
-          <p:cNvPr id="17" name="TextBox 16"/>
+          <p:cNvPr id="20" name="TextBox 19"/>
           <p:cNvSpPr txBox="1"/>
           <p:nvPr/>
         </p:nvSpPr>
@@ -17245,8 +17356,8 @@
         </p:nvSpPr>
         <p:spPr>
           <a:xfrm>
-            <a:off x="274320" y="5166360"/>
-            <a:ext cx="11612880" cy="1417320"/>
+            <a:off x="274320" y="5029200"/>
+            <a:ext cx="11612880" cy="1554480"/>
           </a:xfrm>
           <a:prstGeom prst="rect">
             <a:avLst/>
@@ -17288,28 +17399,28 @@
         </p:nvSpPr>
         <p:spPr>
           <a:xfrm>
-            <a:off x="274320" y="5440680"/>
-            <a:ext cx="11612880" cy="548640"/>
-          </a:xfrm>
-          <a:prstGeom prst="rect">
-            <a:avLst/>
-          </a:prstGeom>
-          <a:noFill/>
-        </p:spPr>
-        <p:txBody>
-          <a:bodyPr wrap="square">
-            <a:spAutoFit/>
-          </a:bodyPr>
-          <a:lstStyle/>
-          <a:p>
-            <a:pPr algn="ctr"/>
-            <a:r>
-              <a:rPr sz="1400" b="1" i="0">
+            <a:off x="274320" y="5230368"/>
+            <a:ext cx="11612880" cy="502920"/>
+          </a:xfrm>
+          <a:prstGeom prst="rect">
+            <a:avLst/>
+          </a:prstGeom>
+          <a:noFill/>
+        </p:spPr>
+        <p:txBody>
+          <a:bodyPr wrap="square">
+            <a:spAutoFit/>
+          </a:bodyPr>
+          <a:lstStyle/>
+          <a:p>
+            <a:pPr algn="ctr"/>
+            <a:r>
+              <a:rPr sz="1350" b="1" i="0">
                 <a:solidFill>
                   <a:srgbClr val="FFFFFF"/>
                 </a:solidFill>
               </a:rPr>
-              <a:t>📧 sales@cortexai.in     |     📞 +91 98765 43210     |     🌐 www.cortexai.in/clms</a:t>
+              <a:t>📞 +91 8329925318     |     ✉ cortexaitechnologies@zohomail.in</a:t>
             </a:r>
           </a:p>
         </p:txBody>
@@ -17322,28 +17433,62 @@
         </p:nvSpPr>
         <p:spPr>
           <a:xfrm>
-            <a:off x="274320" y="5989320"/>
-            <a:ext cx="11612880" cy="411480"/>
-          </a:xfrm>
-          <a:prstGeom prst="rect">
-            <a:avLst/>
-          </a:prstGeom>
-          <a:noFill/>
-        </p:spPr>
-        <p:txBody>
-          <a:bodyPr wrap="square">
-            <a:spAutoFit/>
-          </a:bodyPr>
-          <a:lstStyle/>
-          <a:p>
-            <a:pPr algn="ctr"/>
-            <a:r>
-              <a:rPr sz="1000" b="0" i="0">
+            <a:off x="274320" y="5687568"/>
+            <a:ext cx="11612880" cy="365760"/>
+          </a:xfrm>
+          <a:prstGeom prst="rect">
+            <a:avLst/>
+          </a:prstGeom>
+          <a:noFill/>
+        </p:spPr>
+        <p:txBody>
+          <a:bodyPr wrap="square">
+            <a:spAutoFit/>
+          </a:bodyPr>
+          <a:lstStyle/>
+          <a:p>
+            <a:pPr algn="ctr"/>
+            <a:r>
+              <a:rPr sz="1100" b="0" i="0">
+                <a:solidFill>
+                  <a:srgbClr val="FFFFFF"/>
+                </a:solidFill>
+              </a:rPr>
+              <a:t>📍 Pune, Maharashtra, India 411034</a:t>
+            </a:r>
+          </a:p>
+        </p:txBody>
+      </p:sp>
+      <p:sp>
+        <p:nvSpPr>
+          <p:cNvPr id="33" name="TextBox 32"/>
+          <p:cNvSpPr txBox="1"/>
+          <p:nvPr/>
+        </p:nvSpPr>
+        <p:spPr>
+          <a:xfrm>
+            <a:off x="274320" y="6108192"/>
+            <a:ext cx="11612880" cy="365760"/>
+          </a:xfrm>
+          <a:prstGeom prst="rect">
+            <a:avLst/>
+          </a:prstGeom>
+          <a:noFill/>
+        </p:spPr>
+        <p:txBody>
+          <a:bodyPr wrap="square">
+            <a:spAutoFit/>
+          </a:bodyPr>
+          <a:lstStyle/>
+          <a:p>
+            <a:pPr algn="ctr"/>
+            <a:r>
+              <a:rPr sz="950" b="0" i="0">
                 <a:solidFill>
                   <a:srgbClr val="FFCCCC"/>
                 </a:solidFill>
               </a:rPr>
-              <a:t>Cortex Technologies Pvt. Ltd.  ·  Making Calibration Labs Smarter, Faster, Compliant</a:t>
+              <a:t>Cortex AI Technologies  ·  Making Calibration Labs Smarter, Faster, Compliant</a:t>
             </a:r>
           </a:p>
         </p:txBody>
